--- a/output/presentations/08-multi-agent-systems.pptx
+++ b/output/presentations/08-multi-agent-systems.pptx
@@ -2,22 +2,24 @@
 <file path=ppt/presentation.xml><?xml version="1.0" encoding="utf-8"?>
 <p:presentation xmlns:p="http://schemas.openxmlformats.org/presentationml/2006/main">
   <p:sldMasterIdLst>
-    <p:sldMasterId xmlns:r="http://schemas.openxmlformats.org/officeDocument/2006/relationships" id="2147483648" r:id="R922019c43dde46e8"/>
+    <p:sldMasterId xmlns:r="http://schemas.openxmlformats.org/officeDocument/2006/relationships" id="2147483648" r:id="Rb4f92cbdd27a4040"/>
   </p:sldMasterIdLst>
   <p:notesMasterIdLst>
-    <p:notesMasterId xmlns:r="http://schemas.openxmlformats.org/officeDocument/2006/relationships" r:id="R27d4a9df9d6c4a1c"/>
+    <p:notesMasterId xmlns:r="http://schemas.openxmlformats.org/officeDocument/2006/relationships" r:id="Rf2c74ef84a60417a"/>
   </p:notesMasterIdLst>
   <p:sldIdLst>
-    <p:sldId xmlns:r="http://schemas.openxmlformats.org/officeDocument/2006/relationships" id="256" r:id="R29c37f373d43456a"/>
-    <p:sldId xmlns:r="http://schemas.openxmlformats.org/officeDocument/2006/relationships" id="257" r:id="Rb25d981e39fb4531"/>
-    <p:sldId xmlns:r="http://schemas.openxmlformats.org/officeDocument/2006/relationships" id="258" r:id="R9967d73ca5db490f"/>
-    <p:sldId xmlns:r="http://schemas.openxmlformats.org/officeDocument/2006/relationships" id="259" r:id="R21c269faa6324b5e"/>
-    <p:sldId xmlns:r="http://schemas.openxmlformats.org/officeDocument/2006/relationships" id="260" r:id="R832fa8b3c4094339"/>
-    <p:sldId xmlns:r="http://schemas.openxmlformats.org/officeDocument/2006/relationships" id="261" r:id="Rdb58aff08a124979"/>
-    <p:sldId xmlns:r="http://schemas.openxmlformats.org/officeDocument/2006/relationships" id="262" r:id="R5096379067034acb"/>
-    <p:sldId xmlns:r="http://schemas.openxmlformats.org/officeDocument/2006/relationships" id="263" r:id="Re1c19042dcb240aa"/>
-    <p:sldId xmlns:r="http://schemas.openxmlformats.org/officeDocument/2006/relationships" id="264" r:id="Rca64670921874be5"/>
-    <p:sldId xmlns:r="http://schemas.openxmlformats.org/officeDocument/2006/relationships" id="265" r:id="R1ab89c0fb8564657"/>
+    <p:sldId xmlns:r="http://schemas.openxmlformats.org/officeDocument/2006/relationships" id="256" r:id="R074f1f470f1248c2"/>
+    <p:sldId xmlns:r="http://schemas.openxmlformats.org/officeDocument/2006/relationships" id="257" r:id="R322e1be2c3454690"/>
+    <p:sldId xmlns:r="http://schemas.openxmlformats.org/officeDocument/2006/relationships" id="258" r:id="R485fdb44043043ef"/>
+    <p:sldId xmlns:r="http://schemas.openxmlformats.org/officeDocument/2006/relationships" id="259" r:id="R07f39a176b6d4570"/>
+    <p:sldId xmlns:r="http://schemas.openxmlformats.org/officeDocument/2006/relationships" id="260" r:id="R464e234be8a24152"/>
+    <p:sldId xmlns:r="http://schemas.openxmlformats.org/officeDocument/2006/relationships" id="261" r:id="R2cb4d7dcaa024012"/>
+    <p:sldId xmlns:r="http://schemas.openxmlformats.org/officeDocument/2006/relationships" id="262" r:id="R524157647ada4cdc"/>
+    <p:sldId xmlns:r="http://schemas.openxmlformats.org/officeDocument/2006/relationships" id="263" r:id="R2d3183e57d3e430b"/>
+    <p:sldId xmlns:r="http://schemas.openxmlformats.org/officeDocument/2006/relationships" id="264" r:id="R99b0d621dfc54ec4"/>
+    <p:sldId xmlns:r="http://schemas.openxmlformats.org/officeDocument/2006/relationships" id="265" r:id="R21521997a0ad4666"/>
+    <p:sldId xmlns:r="http://schemas.openxmlformats.org/officeDocument/2006/relationships" id="266" r:id="Rcb7434a0263b40f2"/>
+    <p:sldId xmlns:r="http://schemas.openxmlformats.org/officeDocument/2006/relationships" id="267" r:id="Ra9f87dfdc92d44c8"/>
   </p:sldIdLst>
   <p:sldSz cx="12192000" cy="6858000"/>
   <p:notesSz cx="6858000" cy="9144000"/>
@@ -461,12 +463,57 @@
           </a:p>
           <a:p xmlns:a="http://schemas.openxmlformats.org/drawingml/2006/main">
             <a:r>
+              <a:t>Edition: 2026-09-09</a:t>
+            </a:r>
+          </a:p>
+          <a:p xmlns:a="http://schemas.openxmlformats.org/drawingml/2006/main">
+            <a:r>
+              <a:t/>
+            </a:r>
+          </a:p>
+          <a:p xmlns:a="http://schemas.openxmlformats.org/drawingml/2006/main">
+            <a:r>
               <a:t>[Sources]</a:t>
             </a:r>
           </a:p>
           <a:p xmlns:a="http://schemas.openxmlformats.org/drawingml/2006/main">
             <a:r>
-              <a:t>- Supplied source presentation: 08-multi-agent-systems.pdf</a:t>
+              <a:t>- Original source presentation: 08-multi-agent-systems.pdf</a:t>
+            </a:r>
+          </a:p>
+          <a:p xmlns:a="http://schemas.openxmlformats.org/drawingml/2006/main">
+            <a:r>
+              <a:t>- R1: Patterns and problems in emerging multiagent systems. Anthropic research post, 2026-08-13. https://www.anthropic.com/research/multiagent-systems Controlled coordination experiments. Compare scope and budgets before interpreting the findings.</a:t>
+            </a:r>
+          </a:p>
+          <a:p xmlns:a="http://schemas.openxmlformats.org/drawingml/2006/main">
+            <a:r>
+              <a:t>- S2: OpenAI Agents SDK model integration. SDK documentation, accessed, 2026-09-09. https://openai.github.io/openai-agents-python/models/ The course uses local tools with a Gemini Chat Completions compatibility endpoint.</a:t>
+            </a:r>
+          </a:p>
+          <a:p xmlns:a="http://schemas.openxmlformats.org/drawingml/2006/main">
+            <a:r>
+              <a:t/>
+            </a:r>
+          </a:p>
+          <a:p xmlns:a="http://schemas.openxmlformats.org/drawingml/2006/main">
+            <a:r>
+              <a:t>[Assessed practice]</a:t>
+            </a:r>
+          </a:p>
+          <a:p xmlns:a="http://schemas.openxmlformats.org/drawingml/2006/main">
+            <a:r>
+              <a:t>Complete Lab 7. Compare a single agent, an objective reviewer, and an optional model reviewer. Add one case where every role sees the same misleading cue.</a:t>
+            </a:r>
+          </a:p>
+          <a:p xmlns:a="http://schemas.openxmlformats.org/drawingml/2006/main">
+            <a:r>
+              <a:t>Acceptance: Report extra requests and shared errors. Explain any scope or information advantage before comparing outcomes.</a:t>
+            </a:r>
+          </a:p>
+          <a:p xmlns:a="http://schemas.openxmlformats.org/drawingml/2006/main">
+            <a:r>
+              <a:t>Lab: labs/07_agents_sdk_evaluation.ipynb</a:t>
             </a:r>
           </a:p>
         </p:txBody>
@@ -536,6 +583,136 @@
           <a:lstStyle xmlns:a="http://schemas.openxmlformats.org/drawingml/2006/main"/>
           <a:p xmlns:a="http://schemas.openxmlformats.org/drawingml/2006/main">
             <a:r>
+              <a:t>Use as retrieval practice. Ask for an answer that defines, compares, traces, and evaluates.</a:t>
+            </a:r>
+          </a:p>
+          <a:p xmlns:a="http://schemas.openxmlformats.org/drawingml/2006/main">
+            <a:r>
+              <a:t/>
+            </a:r>
+          </a:p>
+          <a:p xmlns:a="http://schemas.openxmlformats.org/drawingml/2006/main">
+            <a:r>
+              <a:t>Edition: 2026-09-09</a:t>
+            </a:r>
+          </a:p>
+          <a:p xmlns:a="http://schemas.openxmlformats.org/drawingml/2006/main">
+            <a:r>
+              <a:t/>
+            </a:r>
+          </a:p>
+          <a:p xmlns:a="http://schemas.openxmlformats.org/drawingml/2006/main">
+            <a:r>
+              <a:t>[Sources]</a:t>
+            </a:r>
+          </a:p>
+          <a:p xmlns:a="http://schemas.openxmlformats.org/drawingml/2006/main">
+            <a:r>
+              <a:t>- Original source presentation: 08-multi-agent-systems.pdf</a:t>
+            </a:r>
+          </a:p>
+          <a:p xmlns:a="http://schemas.openxmlformats.org/drawingml/2006/main">
+            <a:r>
+              <a:t>- R1: Patterns and problems in emerging multiagent systems. Anthropic research post, 2026-08-13. https://www.anthropic.com/research/multiagent-systems Controlled coordination experiments. Compare scope and budgets before interpreting the findings.</a:t>
+            </a:r>
+          </a:p>
+          <a:p xmlns:a="http://schemas.openxmlformats.org/drawingml/2006/main">
+            <a:r>
+              <a:t>- S2: OpenAI Agents SDK model integration. SDK documentation, accessed, 2026-09-09. https://openai.github.io/openai-agents-python/models/ The course uses local tools with a Gemini Chat Completions compatibility endpoint.</a:t>
+            </a:r>
+          </a:p>
+          <a:p xmlns:a="http://schemas.openxmlformats.org/drawingml/2006/main">
+            <a:r>
+              <a:t/>
+            </a:r>
+          </a:p>
+          <a:p xmlns:a="http://schemas.openxmlformats.org/drawingml/2006/main">
+            <a:r>
+              <a:t>[Assessed practice]</a:t>
+            </a:r>
+          </a:p>
+          <a:p xmlns:a="http://schemas.openxmlformats.org/drawingml/2006/main">
+            <a:r>
+              <a:t>Complete Lab 7. Compare a single agent, an objective reviewer, and an optional model reviewer. Add one case where every role sees the same misleading cue.</a:t>
+            </a:r>
+          </a:p>
+          <a:p xmlns:a="http://schemas.openxmlformats.org/drawingml/2006/main">
+            <a:r>
+              <a:t>Acceptance: Report extra requests and shared errors. Explain any scope or information advantage before comparing outcomes.</a:t>
+            </a:r>
+          </a:p>
+          <a:p xmlns:a="http://schemas.openxmlformats.org/drawingml/2006/main">
+            <a:r>
+              <a:t>Lab: labs/07_agents_sdk_evaluation.ipynb</a:t>
+            </a:r>
+          </a:p>
+        </p:txBody>
+      </p:sp>
+      <p:sp>
+        <p:nvSpPr>
+          <p:cNvPr id="4" name="Slide Number Placeholder 3"/>
+          <p:cNvSpPr>
+            <a:spLocks xmlns:a="http://schemas.openxmlformats.org/drawingml/2006/main" noGrp="1"/>
+          </p:cNvSpPr>
+          <p:nvPr>
+            <p:ph type="sldNum" idx="5"/>
+          </p:nvPr>
+        </p:nvSpPr>
+        <p:spPr/>
+        <p:txBody>
+          <a:bodyPr xmlns:a="http://schemas.openxmlformats.org/drawingml/2006/main"/>
+          <a:lstStyle xmlns:a="http://schemas.openxmlformats.org/drawingml/2006/main"/>
+          <a:p xmlns:a="http://schemas.openxmlformats.org/drawingml/2006/main"/>
+        </p:txBody>
+      </p:sp>
+    </p:spTree>
+  </p:cSld>
+  <p:clrMapOvr>
+    <a:masterClrMapping xmlns:a="http://schemas.openxmlformats.org/drawingml/2006/main"/>
+  </p:clrMapOvr>
+</p:notes>
+</file>
+
+<file path=ppt/notesSlides/notesSlide11.xml><?xml version="1.0" encoding="utf-8"?>
+<p:notes xmlns:p="http://schemas.openxmlformats.org/presentationml/2006/main">
+  <p:cSld>
+    <p:spTree>
+      <p:nvGrpSpPr>
+        <p:cNvPr id="1" name=""/>
+        <p:cNvGrpSpPr/>
+        <p:nvPr/>
+      </p:nvGrpSpPr>
+      <p:grpSpPr>
+        <a:xfrm xmlns:a="http://schemas.openxmlformats.org/drawingml/2006/main"/>
+      </p:grpSpPr>
+      <p:sp>
+        <p:nvSpPr>
+          <p:cNvPr id="2" name="Slide Image Placeholder 1"/>
+          <p:cNvSpPr>
+            <a:spLocks xmlns:a="http://schemas.openxmlformats.org/drawingml/2006/main" noGrp="1"/>
+          </p:cNvSpPr>
+          <p:nvPr>
+            <p:ph type="sldImg" idx="0"/>
+          </p:nvPr>
+        </p:nvSpPr>
+        <p:spPr/>
+      </p:sp>
+      <p:sp>
+        <p:nvSpPr>
+          <p:cNvPr id="3" name="Notes Placeholder 2"/>
+          <p:cNvSpPr>
+            <a:spLocks xmlns:a="http://schemas.openxmlformats.org/drawingml/2006/main" noGrp="1"/>
+          </p:cNvSpPr>
+          <p:nvPr>
+            <p:ph type="body" idx="1"/>
+          </p:nvPr>
+        </p:nvSpPr>
+        <p:spPr/>
+        <p:txBody>
+          <a:bodyPr xmlns:a="http://schemas.openxmlformats.org/drawingml/2006/main"/>
+          <a:lstStyle xmlns:a="http://schemas.openxmlformats.org/drawingml/2006/main"/>
+          <a:p xmlns:a="http://schemas.openxmlformats.org/drawingml/2006/main">
+            <a:r>
               <a:t>Close by restating the four durable ideas and linking forward to the next chapter.</a:t>
             </a:r>
           </a:p>
@@ -546,12 +723,187 @@
           </a:p>
           <a:p xmlns:a="http://schemas.openxmlformats.org/drawingml/2006/main">
             <a:r>
+              <a:t>Edition: 2026-09-09</a:t>
+            </a:r>
+          </a:p>
+          <a:p xmlns:a="http://schemas.openxmlformats.org/drawingml/2006/main">
+            <a:r>
+              <a:t/>
+            </a:r>
+          </a:p>
+          <a:p xmlns:a="http://schemas.openxmlformats.org/drawingml/2006/main">
+            <a:r>
               <a:t>[Sources]</a:t>
             </a:r>
           </a:p>
           <a:p xmlns:a="http://schemas.openxmlformats.org/drawingml/2006/main">
             <a:r>
-              <a:t>- Supplied source presentation: 08-multi-agent-systems.pdf</a:t>
+              <a:t>- Original source presentation: 08-multi-agent-systems.pdf</a:t>
+            </a:r>
+          </a:p>
+          <a:p xmlns:a="http://schemas.openxmlformats.org/drawingml/2006/main">
+            <a:r>
+              <a:t>- R1: Patterns and problems in emerging multiagent systems. Anthropic research post, 2026-08-13. https://www.anthropic.com/research/multiagent-systems Controlled coordination experiments. Compare scope and budgets before interpreting the findings.</a:t>
+            </a:r>
+          </a:p>
+          <a:p xmlns:a="http://schemas.openxmlformats.org/drawingml/2006/main">
+            <a:r>
+              <a:t>- S2: OpenAI Agents SDK model integration. SDK documentation, accessed, 2026-09-09. https://openai.github.io/openai-agents-python/models/ The course uses local tools with a Gemini Chat Completions compatibility endpoint.</a:t>
+            </a:r>
+          </a:p>
+          <a:p xmlns:a="http://schemas.openxmlformats.org/drawingml/2006/main">
+            <a:r>
+              <a:t/>
+            </a:r>
+          </a:p>
+          <a:p xmlns:a="http://schemas.openxmlformats.org/drawingml/2006/main">
+            <a:r>
+              <a:t>[Assessed practice]</a:t>
+            </a:r>
+          </a:p>
+          <a:p xmlns:a="http://schemas.openxmlformats.org/drawingml/2006/main">
+            <a:r>
+              <a:t>Complete Lab 7. Compare a single agent, an objective reviewer, and an optional model reviewer. Add one case where every role sees the same misleading cue.</a:t>
+            </a:r>
+          </a:p>
+          <a:p xmlns:a="http://schemas.openxmlformats.org/drawingml/2006/main">
+            <a:r>
+              <a:t>Acceptance: Report extra requests and shared errors. Explain any scope or information advantage before comparing outcomes.</a:t>
+            </a:r>
+          </a:p>
+          <a:p xmlns:a="http://schemas.openxmlformats.org/drawingml/2006/main">
+            <a:r>
+              <a:t>Lab: labs/07_agents_sdk_evaluation.ipynb</a:t>
+            </a:r>
+          </a:p>
+        </p:txBody>
+      </p:sp>
+      <p:sp>
+        <p:nvSpPr>
+          <p:cNvPr id="4" name="Slide Number Placeholder 3"/>
+          <p:cNvSpPr>
+            <a:spLocks xmlns:a="http://schemas.openxmlformats.org/drawingml/2006/main" noGrp="1"/>
+          </p:cNvSpPr>
+          <p:nvPr>
+            <p:ph type="sldNum" idx="5"/>
+          </p:nvPr>
+        </p:nvSpPr>
+        <p:spPr/>
+        <p:txBody>
+          <a:bodyPr xmlns:a="http://schemas.openxmlformats.org/drawingml/2006/main"/>
+          <a:lstStyle xmlns:a="http://schemas.openxmlformats.org/drawingml/2006/main"/>
+          <a:p xmlns:a="http://schemas.openxmlformats.org/drawingml/2006/main"/>
+        </p:txBody>
+      </p:sp>
+    </p:spTree>
+  </p:cSld>
+  <p:clrMapOvr>
+    <a:masterClrMapping xmlns:a="http://schemas.openxmlformats.org/drawingml/2006/main"/>
+  </p:clrMapOvr>
+</p:notes>
+</file>
+
+<file path=ppt/notesSlides/notesSlide12.xml><?xml version="1.0" encoding="utf-8"?>
+<p:notes xmlns:p="http://schemas.openxmlformats.org/presentationml/2006/main">
+  <p:cSld>
+    <p:spTree>
+      <p:nvGrpSpPr>
+        <p:cNvPr id="1" name=""/>
+        <p:cNvGrpSpPr/>
+        <p:nvPr/>
+      </p:nvGrpSpPr>
+      <p:grpSpPr>
+        <a:xfrm xmlns:a="http://schemas.openxmlformats.org/drawingml/2006/main"/>
+      </p:grpSpPr>
+      <p:sp>
+        <p:nvSpPr>
+          <p:cNvPr id="2" name="Slide Image Placeholder 1"/>
+          <p:cNvSpPr>
+            <a:spLocks xmlns:a="http://schemas.openxmlformats.org/drawingml/2006/main" noGrp="1"/>
+          </p:cNvSpPr>
+          <p:nvPr>
+            <p:ph type="sldImg" idx="0"/>
+          </p:nvPr>
+        </p:nvSpPr>
+        <p:spPr/>
+      </p:sp>
+      <p:sp>
+        <p:nvSpPr>
+          <p:cNvPr id="3" name="Notes Placeholder 2"/>
+          <p:cNvSpPr>
+            <a:spLocks xmlns:a="http://schemas.openxmlformats.org/drawingml/2006/main" noGrp="1"/>
+          </p:cNvSpPr>
+          <p:nvPr>
+            <p:ph type="body" idx="1"/>
+          </p:nvPr>
+        </p:nvSpPr>
+        <p:spPr/>
+        <p:txBody>
+          <a:bodyPr xmlns:a="http://schemas.openxmlformats.org/drawingml/2006/main"/>
+          <a:lstStyle xmlns:a="http://schemas.openxmlformats.org/drawingml/2006/main"/>
+          <a:p xmlns:a="http://schemas.openxmlformats.org/drawingml/2006/main">
+            <a:r>
+              <a:t>Assess the submitted evidence with the stated acceptance check. Reading links and limitations follow.</a:t>
+            </a:r>
+          </a:p>
+          <a:p xmlns:a="http://schemas.openxmlformats.org/drawingml/2006/main">
+            <a:r>
+              <a:t/>
+            </a:r>
+          </a:p>
+          <a:p xmlns:a="http://schemas.openxmlformats.org/drawingml/2006/main">
+            <a:r>
+              <a:t>Edition: 2026-09-09</a:t>
+            </a:r>
+          </a:p>
+          <a:p xmlns:a="http://schemas.openxmlformats.org/drawingml/2006/main">
+            <a:r>
+              <a:t/>
+            </a:r>
+          </a:p>
+          <a:p xmlns:a="http://schemas.openxmlformats.org/drawingml/2006/main">
+            <a:r>
+              <a:t>[Sources]</a:t>
+            </a:r>
+          </a:p>
+          <a:p xmlns:a="http://schemas.openxmlformats.org/drawingml/2006/main">
+            <a:r>
+              <a:t>- Original source presentation: 08-multi-agent-systems.pdf</a:t>
+            </a:r>
+          </a:p>
+          <a:p xmlns:a="http://schemas.openxmlformats.org/drawingml/2006/main">
+            <a:r>
+              <a:t>- R1: Patterns and problems in emerging multiagent systems. Anthropic research post, 2026-08-13. https://www.anthropic.com/research/multiagent-systems Controlled coordination experiments. Compare scope and budgets before interpreting the findings.</a:t>
+            </a:r>
+          </a:p>
+          <a:p xmlns:a="http://schemas.openxmlformats.org/drawingml/2006/main">
+            <a:r>
+              <a:t>- S2: OpenAI Agents SDK model integration. SDK documentation, accessed, 2026-09-09. https://openai.github.io/openai-agents-python/models/ The course uses local tools with a Gemini Chat Completions compatibility endpoint.</a:t>
+            </a:r>
+          </a:p>
+          <a:p xmlns:a="http://schemas.openxmlformats.org/drawingml/2006/main">
+            <a:r>
+              <a:t/>
+            </a:r>
+          </a:p>
+          <a:p xmlns:a="http://schemas.openxmlformats.org/drawingml/2006/main">
+            <a:r>
+              <a:t>[Assessed practice]</a:t>
+            </a:r>
+          </a:p>
+          <a:p xmlns:a="http://schemas.openxmlformats.org/drawingml/2006/main">
+            <a:r>
+              <a:t>Complete Lab 7. Compare a single agent, an objective reviewer, and an optional model reviewer. Add one case where every role sees the same misleading cue.</a:t>
+            </a:r>
+          </a:p>
+          <a:p xmlns:a="http://schemas.openxmlformats.org/drawingml/2006/main">
+            <a:r>
+              <a:t>Acceptance: Report extra requests and shared errors. Explain any scope or information advantage before comparing outcomes.</a:t>
+            </a:r>
+          </a:p>
+          <a:p xmlns:a="http://schemas.openxmlformats.org/drawingml/2006/main">
+            <a:r>
+              <a:t>Lab: labs/07_agents_sdk_evaluation.ipynb</a:t>
             </a:r>
           </a:p>
         </p:txBody>
@@ -631,12 +983,57 @@
           </a:p>
           <a:p xmlns:a="http://schemas.openxmlformats.org/drawingml/2006/main">
             <a:r>
+              <a:t>Edition: 2026-09-09</a:t>
+            </a:r>
+          </a:p>
+          <a:p xmlns:a="http://schemas.openxmlformats.org/drawingml/2006/main">
+            <a:r>
+              <a:t/>
+            </a:r>
+          </a:p>
+          <a:p xmlns:a="http://schemas.openxmlformats.org/drawingml/2006/main">
+            <a:r>
               <a:t>[Sources]</a:t>
             </a:r>
           </a:p>
           <a:p xmlns:a="http://schemas.openxmlformats.org/drawingml/2006/main">
             <a:r>
-              <a:t>- Supplied source presentation: 08-multi-agent-systems.pdf</a:t>
+              <a:t>- Original source presentation: 08-multi-agent-systems.pdf</a:t>
+            </a:r>
+          </a:p>
+          <a:p xmlns:a="http://schemas.openxmlformats.org/drawingml/2006/main">
+            <a:r>
+              <a:t>- R1: Patterns and problems in emerging multiagent systems. Anthropic research post, 2026-08-13. https://www.anthropic.com/research/multiagent-systems Controlled coordination experiments. Compare scope and budgets before interpreting the findings.</a:t>
+            </a:r>
+          </a:p>
+          <a:p xmlns:a="http://schemas.openxmlformats.org/drawingml/2006/main">
+            <a:r>
+              <a:t>- S2: OpenAI Agents SDK model integration. SDK documentation, accessed, 2026-09-09. https://openai.github.io/openai-agents-python/models/ The course uses local tools with a Gemini Chat Completions compatibility endpoint.</a:t>
+            </a:r>
+          </a:p>
+          <a:p xmlns:a="http://schemas.openxmlformats.org/drawingml/2006/main">
+            <a:r>
+              <a:t/>
+            </a:r>
+          </a:p>
+          <a:p xmlns:a="http://schemas.openxmlformats.org/drawingml/2006/main">
+            <a:r>
+              <a:t>[Assessed practice]</a:t>
+            </a:r>
+          </a:p>
+          <a:p xmlns:a="http://schemas.openxmlformats.org/drawingml/2006/main">
+            <a:r>
+              <a:t>Complete Lab 7. Compare a single agent, an objective reviewer, and an optional model reviewer. Add one case where every role sees the same misleading cue.</a:t>
+            </a:r>
+          </a:p>
+          <a:p xmlns:a="http://schemas.openxmlformats.org/drawingml/2006/main">
+            <a:r>
+              <a:t>Acceptance: Report extra requests and shared errors. Explain any scope or information advantage before comparing outcomes.</a:t>
+            </a:r>
+          </a:p>
+          <a:p xmlns:a="http://schemas.openxmlformats.org/drawingml/2006/main">
+            <a:r>
+              <a:t>Lab: labs/07_agents_sdk_evaluation.ipynb</a:t>
             </a:r>
           </a:p>
         </p:txBody>
@@ -716,12 +1113,57 @@
           </a:p>
           <a:p xmlns:a="http://schemas.openxmlformats.org/drawingml/2006/main">
             <a:r>
+              <a:t>Edition: 2026-09-09</a:t>
+            </a:r>
+          </a:p>
+          <a:p xmlns:a="http://schemas.openxmlformats.org/drawingml/2006/main">
+            <a:r>
+              <a:t/>
+            </a:r>
+          </a:p>
+          <a:p xmlns:a="http://schemas.openxmlformats.org/drawingml/2006/main">
+            <a:r>
               <a:t>[Sources]</a:t>
             </a:r>
           </a:p>
           <a:p xmlns:a="http://schemas.openxmlformats.org/drawingml/2006/main">
             <a:r>
-              <a:t>- Supplied source presentation: 08-multi-agent-systems.pdf</a:t>
+              <a:t>- Original source presentation: 08-multi-agent-systems.pdf</a:t>
+            </a:r>
+          </a:p>
+          <a:p xmlns:a="http://schemas.openxmlformats.org/drawingml/2006/main">
+            <a:r>
+              <a:t>- R1: Patterns and problems in emerging multiagent systems. Anthropic research post, 2026-08-13. https://www.anthropic.com/research/multiagent-systems Controlled coordination experiments. Compare scope and budgets before interpreting the findings.</a:t>
+            </a:r>
+          </a:p>
+          <a:p xmlns:a="http://schemas.openxmlformats.org/drawingml/2006/main">
+            <a:r>
+              <a:t>- S2: OpenAI Agents SDK model integration. SDK documentation, accessed, 2026-09-09. https://openai.github.io/openai-agents-python/models/ The course uses local tools with a Gemini Chat Completions compatibility endpoint.</a:t>
+            </a:r>
+          </a:p>
+          <a:p xmlns:a="http://schemas.openxmlformats.org/drawingml/2006/main">
+            <a:r>
+              <a:t/>
+            </a:r>
+          </a:p>
+          <a:p xmlns:a="http://schemas.openxmlformats.org/drawingml/2006/main">
+            <a:r>
+              <a:t>[Assessed practice]</a:t>
+            </a:r>
+          </a:p>
+          <a:p xmlns:a="http://schemas.openxmlformats.org/drawingml/2006/main">
+            <a:r>
+              <a:t>Complete Lab 7. Compare a single agent, an objective reviewer, and an optional model reviewer. Add one case where every role sees the same misleading cue.</a:t>
+            </a:r>
+          </a:p>
+          <a:p xmlns:a="http://schemas.openxmlformats.org/drawingml/2006/main">
+            <a:r>
+              <a:t>Acceptance: Report extra requests and shared errors. Explain any scope or information advantage before comparing outcomes.</a:t>
+            </a:r>
+          </a:p>
+          <a:p xmlns:a="http://schemas.openxmlformats.org/drawingml/2006/main">
+            <a:r>
+              <a:t>Lab: labs/07_agents_sdk_evaluation.ipynb</a:t>
             </a:r>
           </a:p>
         </p:txBody>
@@ -801,12 +1243,57 @@
           </a:p>
           <a:p xmlns:a="http://schemas.openxmlformats.org/drawingml/2006/main">
             <a:r>
+              <a:t>Edition: 2026-09-09</a:t>
+            </a:r>
+          </a:p>
+          <a:p xmlns:a="http://schemas.openxmlformats.org/drawingml/2006/main">
+            <a:r>
+              <a:t/>
+            </a:r>
+          </a:p>
+          <a:p xmlns:a="http://schemas.openxmlformats.org/drawingml/2006/main">
+            <a:r>
               <a:t>[Sources]</a:t>
             </a:r>
           </a:p>
           <a:p xmlns:a="http://schemas.openxmlformats.org/drawingml/2006/main">
             <a:r>
-              <a:t>- Supplied source presentation: 08-multi-agent-systems.pdf</a:t>
+              <a:t>- Original source presentation: 08-multi-agent-systems.pdf</a:t>
+            </a:r>
+          </a:p>
+          <a:p xmlns:a="http://schemas.openxmlformats.org/drawingml/2006/main">
+            <a:r>
+              <a:t>- R1: Patterns and problems in emerging multiagent systems. Anthropic research post, 2026-08-13. https://www.anthropic.com/research/multiagent-systems Controlled coordination experiments. Compare scope and budgets before interpreting the findings.</a:t>
+            </a:r>
+          </a:p>
+          <a:p xmlns:a="http://schemas.openxmlformats.org/drawingml/2006/main">
+            <a:r>
+              <a:t>- S2: OpenAI Agents SDK model integration. SDK documentation, accessed, 2026-09-09. https://openai.github.io/openai-agents-python/models/ The course uses local tools with a Gemini Chat Completions compatibility endpoint.</a:t>
+            </a:r>
+          </a:p>
+          <a:p xmlns:a="http://schemas.openxmlformats.org/drawingml/2006/main">
+            <a:r>
+              <a:t/>
+            </a:r>
+          </a:p>
+          <a:p xmlns:a="http://schemas.openxmlformats.org/drawingml/2006/main">
+            <a:r>
+              <a:t>[Assessed practice]</a:t>
+            </a:r>
+          </a:p>
+          <a:p xmlns:a="http://schemas.openxmlformats.org/drawingml/2006/main">
+            <a:r>
+              <a:t>Complete Lab 7. Compare a single agent, an objective reviewer, and an optional model reviewer. Add one case where every role sees the same misleading cue.</a:t>
+            </a:r>
+          </a:p>
+          <a:p xmlns:a="http://schemas.openxmlformats.org/drawingml/2006/main">
+            <a:r>
+              <a:t>Acceptance: Report extra requests and shared errors. Explain any scope or information advantage before comparing outcomes.</a:t>
+            </a:r>
+          </a:p>
+          <a:p xmlns:a="http://schemas.openxmlformats.org/drawingml/2006/main">
+            <a:r>
+              <a:t>Lab: labs/07_agents_sdk_evaluation.ipynb</a:t>
             </a:r>
           </a:p>
         </p:txBody>
@@ -886,12 +1373,57 @@
           </a:p>
           <a:p xmlns:a="http://schemas.openxmlformats.org/drawingml/2006/main">
             <a:r>
+              <a:t>Edition: 2026-09-09</a:t>
+            </a:r>
+          </a:p>
+          <a:p xmlns:a="http://schemas.openxmlformats.org/drawingml/2006/main">
+            <a:r>
+              <a:t/>
+            </a:r>
+          </a:p>
+          <a:p xmlns:a="http://schemas.openxmlformats.org/drawingml/2006/main">
+            <a:r>
               <a:t>[Sources]</a:t>
             </a:r>
           </a:p>
           <a:p xmlns:a="http://schemas.openxmlformats.org/drawingml/2006/main">
             <a:r>
-              <a:t>- Supplied source presentation: 08-multi-agent-systems.pdf</a:t>
+              <a:t>- Original source presentation: 08-multi-agent-systems.pdf</a:t>
+            </a:r>
+          </a:p>
+          <a:p xmlns:a="http://schemas.openxmlformats.org/drawingml/2006/main">
+            <a:r>
+              <a:t>- R1: Patterns and problems in emerging multiagent systems. Anthropic research post, 2026-08-13. https://www.anthropic.com/research/multiagent-systems Controlled coordination experiments. Compare scope and budgets before interpreting the findings.</a:t>
+            </a:r>
+          </a:p>
+          <a:p xmlns:a="http://schemas.openxmlformats.org/drawingml/2006/main">
+            <a:r>
+              <a:t>- S2: OpenAI Agents SDK model integration. SDK documentation, accessed, 2026-09-09. https://openai.github.io/openai-agents-python/models/ The course uses local tools with a Gemini Chat Completions compatibility endpoint.</a:t>
+            </a:r>
+          </a:p>
+          <a:p xmlns:a="http://schemas.openxmlformats.org/drawingml/2006/main">
+            <a:r>
+              <a:t/>
+            </a:r>
+          </a:p>
+          <a:p xmlns:a="http://schemas.openxmlformats.org/drawingml/2006/main">
+            <a:r>
+              <a:t>[Assessed practice]</a:t>
+            </a:r>
+          </a:p>
+          <a:p xmlns:a="http://schemas.openxmlformats.org/drawingml/2006/main">
+            <a:r>
+              <a:t>Complete Lab 7. Compare a single agent, an objective reviewer, and an optional model reviewer. Add one case where every role sees the same misleading cue.</a:t>
+            </a:r>
+          </a:p>
+          <a:p xmlns:a="http://schemas.openxmlformats.org/drawingml/2006/main">
+            <a:r>
+              <a:t>Acceptance: Report extra requests and shared errors. Explain any scope or information advantage before comparing outcomes.</a:t>
+            </a:r>
+          </a:p>
+          <a:p xmlns:a="http://schemas.openxmlformats.org/drawingml/2006/main">
+            <a:r>
+              <a:t>Lab: labs/07_agents_sdk_evaluation.ipynb</a:t>
             </a:r>
           </a:p>
         </p:txBody>
@@ -971,12 +1503,57 @@
           </a:p>
           <a:p xmlns:a="http://schemas.openxmlformats.org/drawingml/2006/main">
             <a:r>
+              <a:t>Edition: 2026-09-09</a:t>
+            </a:r>
+          </a:p>
+          <a:p xmlns:a="http://schemas.openxmlformats.org/drawingml/2006/main">
+            <a:r>
+              <a:t/>
+            </a:r>
+          </a:p>
+          <a:p xmlns:a="http://schemas.openxmlformats.org/drawingml/2006/main">
+            <a:r>
               <a:t>[Sources]</a:t>
             </a:r>
           </a:p>
           <a:p xmlns:a="http://schemas.openxmlformats.org/drawingml/2006/main">
             <a:r>
-              <a:t>- Supplied source presentation: 08-multi-agent-systems.pdf</a:t>
+              <a:t>- Original source presentation: 08-multi-agent-systems.pdf</a:t>
+            </a:r>
+          </a:p>
+          <a:p xmlns:a="http://schemas.openxmlformats.org/drawingml/2006/main">
+            <a:r>
+              <a:t>- R1: Patterns and problems in emerging multiagent systems. Anthropic research post, 2026-08-13. https://www.anthropic.com/research/multiagent-systems Controlled coordination experiments. Compare scope and budgets before interpreting the findings.</a:t>
+            </a:r>
+          </a:p>
+          <a:p xmlns:a="http://schemas.openxmlformats.org/drawingml/2006/main">
+            <a:r>
+              <a:t>- S2: OpenAI Agents SDK model integration. SDK documentation, accessed, 2026-09-09. https://openai.github.io/openai-agents-python/models/ The course uses local tools with a Gemini Chat Completions compatibility endpoint.</a:t>
+            </a:r>
+          </a:p>
+          <a:p xmlns:a="http://schemas.openxmlformats.org/drawingml/2006/main">
+            <a:r>
+              <a:t/>
+            </a:r>
+          </a:p>
+          <a:p xmlns:a="http://schemas.openxmlformats.org/drawingml/2006/main">
+            <a:r>
+              <a:t>[Assessed practice]</a:t>
+            </a:r>
+          </a:p>
+          <a:p xmlns:a="http://schemas.openxmlformats.org/drawingml/2006/main">
+            <a:r>
+              <a:t>Complete Lab 7. Compare a single agent, an objective reviewer, and an optional model reviewer. Add one case where every role sees the same misleading cue.</a:t>
+            </a:r>
+          </a:p>
+          <a:p xmlns:a="http://schemas.openxmlformats.org/drawingml/2006/main">
+            <a:r>
+              <a:t>Acceptance: Report extra requests and shared errors. Explain any scope or information advantage before comparing outcomes.</a:t>
+            </a:r>
+          </a:p>
+          <a:p xmlns:a="http://schemas.openxmlformats.org/drawingml/2006/main">
+            <a:r>
+              <a:t>Lab: labs/07_agents_sdk_evaluation.ipynb</a:t>
             </a:r>
           </a:p>
         </p:txBody>
@@ -1056,12 +1633,57 @@
           </a:p>
           <a:p xmlns:a="http://schemas.openxmlformats.org/drawingml/2006/main">
             <a:r>
+              <a:t>Edition: 2026-09-09</a:t>
+            </a:r>
+          </a:p>
+          <a:p xmlns:a="http://schemas.openxmlformats.org/drawingml/2006/main">
+            <a:r>
+              <a:t/>
+            </a:r>
+          </a:p>
+          <a:p xmlns:a="http://schemas.openxmlformats.org/drawingml/2006/main">
+            <a:r>
               <a:t>[Sources]</a:t>
             </a:r>
           </a:p>
           <a:p xmlns:a="http://schemas.openxmlformats.org/drawingml/2006/main">
             <a:r>
-              <a:t>- Supplied source presentation: 08-multi-agent-systems.pdf</a:t>
+              <a:t>- Original source presentation: 08-multi-agent-systems.pdf</a:t>
+            </a:r>
+          </a:p>
+          <a:p xmlns:a="http://schemas.openxmlformats.org/drawingml/2006/main">
+            <a:r>
+              <a:t>- R1: Patterns and problems in emerging multiagent systems. Anthropic research post, 2026-08-13. https://www.anthropic.com/research/multiagent-systems Controlled coordination experiments. Compare scope and budgets before interpreting the findings.</a:t>
+            </a:r>
+          </a:p>
+          <a:p xmlns:a="http://schemas.openxmlformats.org/drawingml/2006/main">
+            <a:r>
+              <a:t>- S2: OpenAI Agents SDK model integration. SDK documentation, accessed, 2026-09-09. https://openai.github.io/openai-agents-python/models/ The course uses local tools with a Gemini Chat Completions compatibility endpoint.</a:t>
+            </a:r>
+          </a:p>
+          <a:p xmlns:a="http://schemas.openxmlformats.org/drawingml/2006/main">
+            <a:r>
+              <a:t/>
+            </a:r>
+          </a:p>
+          <a:p xmlns:a="http://schemas.openxmlformats.org/drawingml/2006/main">
+            <a:r>
+              <a:t>[Assessed practice]</a:t>
+            </a:r>
+          </a:p>
+          <a:p xmlns:a="http://schemas.openxmlformats.org/drawingml/2006/main">
+            <a:r>
+              <a:t>Complete Lab 7. Compare a single agent, an objective reviewer, and an optional model reviewer. Add one case where every role sees the same misleading cue.</a:t>
+            </a:r>
+          </a:p>
+          <a:p xmlns:a="http://schemas.openxmlformats.org/drawingml/2006/main">
+            <a:r>
+              <a:t>Acceptance: Report extra requests and shared errors. Explain any scope or information advantage before comparing outcomes.</a:t>
+            </a:r>
+          </a:p>
+          <a:p xmlns:a="http://schemas.openxmlformats.org/drawingml/2006/main">
+            <a:r>
+              <a:t>Lab: labs/07_agents_sdk_evaluation.ipynb</a:t>
             </a:r>
           </a:p>
         </p:txBody>
@@ -1141,12 +1763,57 @@
           </a:p>
           <a:p xmlns:a="http://schemas.openxmlformats.org/drawingml/2006/main">
             <a:r>
+              <a:t>Edition: 2026-09-09</a:t>
+            </a:r>
+          </a:p>
+          <a:p xmlns:a="http://schemas.openxmlformats.org/drawingml/2006/main">
+            <a:r>
+              <a:t/>
+            </a:r>
+          </a:p>
+          <a:p xmlns:a="http://schemas.openxmlformats.org/drawingml/2006/main">
+            <a:r>
               <a:t>[Sources]</a:t>
             </a:r>
           </a:p>
           <a:p xmlns:a="http://schemas.openxmlformats.org/drawingml/2006/main">
             <a:r>
-              <a:t>- Supplied source presentation: 08-multi-agent-systems.pdf</a:t>
+              <a:t>- Original source presentation: 08-multi-agent-systems.pdf</a:t>
+            </a:r>
+          </a:p>
+          <a:p xmlns:a="http://schemas.openxmlformats.org/drawingml/2006/main">
+            <a:r>
+              <a:t>- R1: Patterns and problems in emerging multiagent systems. Anthropic research post, 2026-08-13. https://www.anthropic.com/research/multiagent-systems Controlled coordination experiments. Compare scope and budgets before interpreting the findings.</a:t>
+            </a:r>
+          </a:p>
+          <a:p xmlns:a="http://schemas.openxmlformats.org/drawingml/2006/main">
+            <a:r>
+              <a:t>- S2: OpenAI Agents SDK model integration. SDK documentation, accessed, 2026-09-09. https://openai.github.io/openai-agents-python/models/ The course uses local tools with a Gemini Chat Completions compatibility endpoint.</a:t>
+            </a:r>
+          </a:p>
+          <a:p xmlns:a="http://schemas.openxmlformats.org/drawingml/2006/main">
+            <a:r>
+              <a:t/>
+            </a:r>
+          </a:p>
+          <a:p xmlns:a="http://schemas.openxmlformats.org/drawingml/2006/main">
+            <a:r>
+              <a:t>[Assessed practice]</a:t>
+            </a:r>
+          </a:p>
+          <a:p xmlns:a="http://schemas.openxmlformats.org/drawingml/2006/main">
+            <a:r>
+              <a:t>Complete Lab 7. Compare a single agent, an objective reviewer, and an optional model reviewer. Add one case where every role sees the same misleading cue.</a:t>
+            </a:r>
+          </a:p>
+          <a:p xmlns:a="http://schemas.openxmlformats.org/drawingml/2006/main">
+            <a:r>
+              <a:t>Acceptance: Report extra requests and shared errors. Explain any scope or information advantage before comparing outcomes.</a:t>
+            </a:r>
+          </a:p>
+          <a:p xmlns:a="http://schemas.openxmlformats.org/drawingml/2006/main">
+            <a:r>
+              <a:t>Lab: labs/07_agents_sdk_evaluation.ipynb</a:t>
             </a:r>
           </a:p>
         </p:txBody>
@@ -1216,7 +1883,7 @@
           <a:lstStyle xmlns:a="http://schemas.openxmlformats.org/drawingml/2006/main"/>
           <a:p xmlns:a="http://schemas.openxmlformats.org/drawingml/2006/main">
             <a:r>
-              <a:t>Use as retrieval practice. Ask for an answer that defines, compares, traces, and evaluates.</a:t>
+              <a:t>Explain the claim first, then use the numbered points as evidence and design consequences.</a:t>
             </a:r>
           </a:p>
           <a:p xmlns:a="http://schemas.openxmlformats.org/drawingml/2006/main">
@@ -1226,12 +1893,57 @@
           </a:p>
           <a:p xmlns:a="http://schemas.openxmlformats.org/drawingml/2006/main">
             <a:r>
+              <a:t>Edition: 2026-09-09</a:t>
+            </a:r>
+          </a:p>
+          <a:p xmlns:a="http://schemas.openxmlformats.org/drawingml/2006/main">
+            <a:r>
+              <a:t/>
+            </a:r>
+          </a:p>
+          <a:p xmlns:a="http://schemas.openxmlformats.org/drawingml/2006/main">
+            <a:r>
               <a:t>[Sources]</a:t>
             </a:r>
           </a:p>
           <a:p xmlns:a="http://schemas.openxmlformats.org/drawingml/2006/main">
             <a:r>
-              <a:t>- Supplied source presentation: 08-multi-agent-systems.pdf</a:t>
+              <a:t>- Original source presentation: 08-multi-agent-systems.pdf</a:t>
+            </a:r>
+          </a:p>
+          <a:p xmlns:a="http://schemas.openxmlformats.org/drawingml/2006/main">
+            <a:r>
+              <a:t>- R1: Patterns and problems in emerging multiagent systems. Anthropic research post, 2026-08-13. https://www.anthropic.com/research/multiagent-systems Controlled coordination experiments. Compare scope and budgets before interpreting the findings.</a:t>
+            </a:r>
+          </a:p>
+          <a:p xmlns:a="http://schemas.openxmlformats.org/drawingml/2006/main">
+            <a:r>
+              <a:t>- S2: OpenAI Agents SDK model integration. SDK documentation, accessed, 2026-09-09. https://openai.github.io/openai-agents-python/models/ The course uses local tools with a Gemini Chat Completions compatibility endpoint.</a:t>
+            </a:r>
+          </a:p>
+          <a:p xmlns:a="http://schemas.openxmlformats.org/drawingml/2006/main">
+            <a:r>
+              <a:t/>
+            </a:r>
+          </a:p>
+          <a:p xmlns:a="http://schemas.openxmlformats.org/drawingml/2006/main">
+            <a:r>
+              <a:t>[Assessed practice]</a:t>
+            </a:r>
+          </a:p>
+          <a:p xmlns:a="http://schemas.openxmlformats.org/drawingml/2006/main">
+            <a:r>
+              <a:t>Complete Lab 7. Compare a single agent, an objective reviewer, and an optional model reviewer. Add one case where every role sees the same misleading cue.</a:t>
+            </a:r>
+          </a:p>
+          <a:p xmlns:a="http://schemas.openxmlformats.org/drawingml/2006/main">
+            <a:r>
+              <a:t>Acceptance: Report extra requests and shared errors. Explain any scope or information advantage before comparing outcomes.</a:t>
+            </a:r>
+          </a:p>
+          <a:p xmlns:a="http://schemas.openxmlformats.org/drawingml/2006/main">
+            <a:r>
+              <a:t>Lab: labs/07_agents_sdk_evaluation.ipynb</a:t>
             </a:r>
           </a:p>
         </p:txBody>
@@ -1299,7 +2011,7 @@
   </p:cSld>
   <p:clrMap bg1="lt1" tx1="dk1" bg2="lt2" tx2="dk2" accent1="accent1" accent2="accent2" accent3="accent3" accent4="accent4" accent5="accent5" accent6="accent6" hlink="hlink" folHlink="folHlink"/>
   <p:sldLayoutIdLst>
-    <p:sldLayoutId xmlns:r="http://schemas.openxmlformats.org/officeDocument/2006/relationships" id="2147483649" r:id="Rc30127f371ee4aa1"/>
+    <p:sldLayoutId xmlns:r="http://schemas.openxmlformats.org/officeDocument/2006/relationships" id="2147483649" r:id="Rf1117eb1ec524116"/>
   </p:sldLayoutIdLst>
   <p:txStyles>
     <p:titleStyle>
@@ -1850,7 +2562,7 @@
           <p:cNvPr id="8" name="title-accent">
             <a:extLst xmlns:a="http://schemas.openxmlformats.org/drawingml/2006/main">
               <a:ext uri="{FF2B5EF4-FFF2-40B4-BE49-F238E27FC236}">
-                <a16:creationId xmlns:a16="http://schemas.microsoft.com/office/drawing/2014/main" id="{37CECE94-D8DB-4BAE-8D01-644FFB6DB3D1}"/>
+                <a16:creationId xmlns:a16="http://schemas.microsoft.com/office/drawing/2014/main" id="{6370CD4D-0435-46A7-BCAF-58BA8A8EBBCC}"/>
               </a:ext>
             </a:extLst>
           </p:cNvPr>
@@ -1883,7 +2595,7 @@
           <p:cNvPr id="2" name="course-title">
             <a:extLst xmlns:a="http://schemas.openxmlformats.org/drawingml/2006/main">
               <a:ext uri="{FF2B5EF4-FFF2-40B4-BE49-F238E27FC236}">
-                <a16:creationId xmlns:a16="http://schemas.microsoft.com/office/drawing/2014/main" id="{97181813-0310-486E-9460-841A8AA1583A}"/>
+                <a16:creationId xmlns:a16="http://schemas.microsoft.com/office/drawing/2014/main" id="{00D0117C-F719-406B-B662-B28E49CB1C62}"/>
               </a:ext>
             </a:extLst>
           </p:cNvPr>
@@ -1941,7 +2653,7 @@
           <p:cNvPr id="3" name="chapter-number">
             <a:extLst xmlns:a="http://schemas.openxmlformats.org/drawingml/2006/main">
               <a:ext uri="{FF2B5EF4-FFF2-40B4-BE49-F238E27FC236}">
-                <a16:creationId xmlns:a16="http://schemas.microsoft.com/office/drawing/2014/main" id="{62CD903B-727C-4863-B5A7-C54ACBAEF414}"/>
+                <a16:creationId xmlns:a16="http://schemas.microsoft.com/office/drawing/2014/main" id="{30C4437E-7A33-4460-AA49-AF261F91EA0D}"/>
               </a:ext>
             </a:extLst>
           </p:cNvPr>
@@ -1999,7 +2711,7 @@
           <p:cNvPr id="4" name="deck-title">
             <a:extLst xmlns:a="http://schemas.openxmlformats.org/drawingml/2006/main">
               <a:ext uri="{FF2B5EF4-FFF2-40B4-BE49-F238E27FC236}">
-                <a16:creationId xmlns:a16="http://schemas.microsoft.com/office/drawing/2014/main" id="{1E0CDA67-BEBA-411A-8951-94F07BDFF825}"/>
+                <a16:creationId xmlns:a16="http://schemas.microsoft.com/office/drawing/2014/main" id="{ED452DC6-B16C-4724-97FF-BDBAD7CD0548}"/>
               </a:ext>
             </a:extLst>
           </p:cNvPr>
@@ -2057,7 +2769,7 @@
           <p:cNvPr id="5" name="deck-thesis">
             <a:extLst xmlns:a="http://schemas.openxmlformats.org/drawingml/2006/main">
               <a:ext uri="{FF2B5EF4-FFF2-40B4-BE49-F238E27FC236}">
-                <a16:creationId xmlns:a16="http://schemas.microsoft.com/office/drawing/2014/main" id="{B258AD34-EC9D-4C28-BC19-1C2A41332956}"/>
+                <a16:creationId xmlns:a16="http://schemas.microsoft.com/office/drawing/2014/main" id="{908785DB-CF20-4F11-B55B-483B77FA7F6E}"/>
               </a:ext>
             </a:extLst>
           </p:cNvPr>
@@ -2115,7 +2827,7 @@
           <p:cNvPr id="6" name="title-marker">
             <a:extLst xmlns:a="http://schemas.openxmlformats.org/drawingml/2006/main">
               <a:ext uri="{FF2B5EF4-FFF2-40B4-BE49-F238E27FC236}">
-                <a16:creationId xmlns:a16="http://schemas.microsoft.com/office/drawing/2014/main" id="{0543BCBD-8E1D-4EB0-BBEE-66BAC76300A8}"/>
+                <a16:creationId xmlns:a16="http://schemas.microsoft.com/office/drawing/2014/main" id="{CF7EDD1F-E9A8-47CB-AA04-B571DC7C3769}"/>
               </a:ext>
             </a:extLst>
           </p:cNvPr>
@@ -2148,7 +2860,7 @@
           <p:cNvPr id="7" name="title-marker-text">
             <a:extLst xmlns:a="http://schemas.openxmlformats.org/drawingml/2006/main">
               <a:ext uri="{FF2B5EF4-FFF2-40B4-BE49-F238E27FC236}">
-                <a16:creationId xmlns:a16="http://schemas.microsoft.com/office/drawing/2014/main" id="{CAC31211-FBBD-4C7C-9754-F221EE9E37EF}"/>
+                <a16:creationId xmlns:a16="http://schemas.microsoft.com/office/drawing/2014/main" id="{AD21A6FC-55F9-49E1-AE6B-4A8D33B3CA9E}"/>
               </a:ext>
             </a:extLst>
           </p:cNvPr>
@@ -2227,7 +2939,7 @@
     </p:spTree>
     <p:extLst>
       <p:ext uri="{BB962C8B-B14F-4D97-AF65-F5344CB8AC3E}">
-        <p14:creationId xmlns:p14="http://schemas.microsoft.com/office/powerpoint/2010/main" val="2107879720"/>
+        <p14:creationId xmlns:p14="http://schemas.microsoft.com/office/powerpoint/2010/main" val="313269900"/>
       </p:ext>
     </p:extLst>
   </p:cSld>
@@ -2235,6 +2947,996 @@
 </file>
 
 <file path=ppt/slides/slide10.xml><?xml version="1.0" encoding="utf-8"?>
+<p:sld xmlns:p="http://schemas.openxmlformats.org/presentationml/2006/main">
+  <p:cSld>
+    <p:bg>
+      <p:bgPr>
+        <a:solidFill xmlns:a="http://schemas.openxmlformats.org/drawingml/2006/main">
+          <a:srgbClr val="FFFFFF"/>
+        </a:solidFill>
+      </p:bgPr>
+    </p:bg>
+    <p:spTree>
+      <p:nvGrpSpPr>
+        <p:cNvPr id="1" name=""/>
+        <p:cNvGrpSpPr/>
+        <p:nvPr/>
+      </p:nvGrpSpPr>
+      <p:grpSpPr>
+        <a:xfrm xmlns:a="http://schemas.openxmlformats.org/drawingml/2006/main"/>
+      </p:grpSpPr>
+      <p:sp>
+        <p:nvSpPr>
+          <p:cNvPr id="18" name="accent-line">
+            <a:extLst xmlns:a="http://schemas.openxmlformats.org/drawingml/2006/main">
+              <a:ext uri="{FF2B5EF4-FFF2-40B4-BE49-F238E27FC236}">
+                <a16:creationId xmlns:a16="http://schemas.microsoft.com/office/drawing/2014/main" id="{A058A978-1919-4F1A-9809-AA6543BB4702}"/>
+              </a:ext>
+            </a:extLst>
+          </p:cNvPr>
+          <p:cNvSpPr>
+            <a:spLocks xmlns:a="http://schemas.openxmlformats.org/drawingml/2006/main" noGrp="1"/>
+          </p:cNvSpPr>
+          <p:nvPr/>
+        </p:nvSpPr>
+        <p:spPr>
+          <a:xfrm xmlns:a="http://schemas.openxmlformats.org/drawingml/2006/main">
+            <a:off x="390525" y="304800"/>
+            <a:ext cx="11410950" cy="66675"/>
+          </a:xfrm>
+          <a:prstGeom xmlns:a="http://schemas.openxmlformats.org/drawingml/2006/main" prst="rect">
+            <a:avLst/>
+          </a:prstGeom>
+          <a:solidFill xmlns:a="http://schemas.openxmlformats.org/drawingml/2006/main">
+            <a:srgbClr val="FFB45E"/>
+          </a:solidFill>
+          <a:ln xmlns:a="http://schemas.openxmlformats.org/drawingml/2006/main" w="0">
+            <a:solidFill>
+              <a:srgbClr val="FFB45E"/>
+            </a:solidFill>
+            <a:prstDash val="solid"/>
+          </a:ln>
+        </p:spPr>
+      </p:sp>
+      <p:sp>
+        <p:nvSpPr>
+          <p:cNvPr id="2" name="chapter-label">
+            <a:extLst xmlns:a="http://schemas.openxmlformats.org/drawingml/2006/main">
+              <a:ext uri="{FF2B5EF4-FFF2-40B4-BE49-F238E27FC236}">
+                <a16:creationId xmlns:a16="http://schemas.microsoft.com/office/drawing/2014/main" id="{2A43AD7E-3A27-457A-8836-B6F8F08E01BE}"/>
+              </a:ext>
+            </a:extLst>
+          </p:cNvPr>
+          <p:cNvSpPr>
+            <a:spLocks xmlns:a="http://schemas.openxmlformats.org/drawingml/2006/main" noGrp="1"/>
+          </p:cNvSpPr>
+          <p:nvPr/>
+        </p:nvSpPr>
+        <p:spPr>
+          <a:xfrm xmlns:a="http://schemas.openxmlformats.org/drawingml/2006/main">
+            <a:off x="390525" y="466725"/>
+            <a:ext cx="4953000" cy="323850"/>
+          </a:xfrm>
+          <a:prstGeom xmlns:a="http://schemas.openxmlformats.org/drawingml/2006/main" prst="rect">
+            <a:avLst/>
+          </a:prstGeom>
+          <a:noFill xmlns:a="http://schemas.openxmlformats.org/drawingml/2006/main"/>
+          <a:ln xmlns:a="http://schemas.openxmlformats.org/drawingml/2006/main" w="0">
+            <a:noFill/>
+            <a:prstDash val="solid"/>
+          </a:ln>
+        </p:spPr>
+        <p:txBody>
+          <a:bodyPr xmlns:a="http://schemas.openxmlformats.org/drawingml/2006/main" anchor="t">
+            <a:noAutofit/>
+          </a:bodyPr>
+          <a:lstStyle xmlns:a="http://schemas.openxmlformats.org/drawingml/2006/main"/>
+          <a:p xmlns:a="http://schemas.openxmlformats.org/drawingml/2006/main">
+            <a:pPr algn="l">
+              <a:defRPr sz="1275" b="1">
+                <a:solidFill>
+                  <a:srgbClr val="5B5B57"/>
+                </a:solidFill>
+                <a:latin typeface="Helvetica Neue"/>
+                <a:ea typeface="Helvetica Neue"/>
+                <a:cs typeface="Helvetica Neue"/>
+              </a:defRPr>
+            </a:pPr>
+            <a:r>
+              <a:rPr sz="1275" b="1">
+                <a:solidFill>
+                  <a:srgbClr val="5B5B57"/>
+                </a:solidFill>
+                <a:latin typeface="Helvetica Neue"/>
+                <a:ea typeface="Helvetica Neue"/>
+                <a:cs typeface="Helvetica Neue"/>
+              </a:rPr>
+              <a:t>EXAM CHECK  /  08</a:t>
+            </a:r>
+          </a:p>
+        </p:txBody>
+      </p:sp>
+      <p:sp>
+        <p:nvSpPr>
+          <p:cNvPr id="3" name="slide-number">
+            <a:extLst xmlns:a="http://schemas.openxmlformats.org/drawingml/2006/main">
+              <a:ext uri="{FF2B5EF4-FFF2-40B4-BE49-F238E27FC236}">
+                <a16:creationId xmlns:a16="http://schemas.microsoft.com/office/drawing/2014/main" id="{399BD5EF-C958-4E14-897B-E1C6D41EC292}"/>
+              </a:ext>
+            </a:extLst>
+          </p:cNvPr>
+          <p:cNvSpPr>
+            <a:spLocks xmlns:a="http://schemas.openxmlformats.org/drawingml/2006/main" noGrp="1"/>
+          </p:cNvSpPr>
+          <p:nvPr/>
+        </p:nvSpPr>
+        <p:spPr>
+          <a:xfrm xmlns:a="http://schemas.openxmlformats.org/drawingml/2006/main">
+            <a:off x="11049000" y="6286500"/>
+            <a:ext cx="742950" cy="266700"/>
+          </a:xfrm>
+          <a:prstGeom xmlns:a="http://schemas.openxmlformats.org/drawingml/2006/main" prst="rect">
+            <a:avLst/>
+          </a:prstGeom>
+          <a:noFill xmlns:a="http://schemas.openxmlformats.org/drawingml/2006/main"/>
+          <a:ln xmlns:a="http://schemas.openxmlformats.org/drawingml/2006/main" w="0">
+            <a:noFill/>
+            <a:prstDash val="solid"/>
+          </a:ln>
+        </p:spPr>
+        <p:txBody>
+          <a:bodyPr xmlns:a="http://schemas.openxmlformats.org/drawingml/2006/main" anchor="t">
+            <a:noAutofit/>
+          </a:bodyPr>
+          <a:lstStyle xmlns:a="http://schemas.openxmlformats.org/drawingml/2006/main"/>
+          <a:p xmlns:a="http://schemas.openxmlformats.org/drawingml/2006/main">
+            <a:pPr algn="r">
+              <a:defRPr sz="1200" b="0">
+                <a:solidFill>
+                  <a:srgbClr val="5B5B57"/>
+                </a:solidFill>
+                <a:latin typeface="Helvetica Neue"/>
+                <a:ea typeface="Helvetica Neue"/>
+                <a:cs typeface="Helvetica Neue"/>
+              </a:defRPr>
+            </a:pPr>
+            <a:r>
+              <a:rPr sz="1200" b="0">
+                <a:solidFill>
+                  <a:srgbClr val="5B5B57"/>
+                </a:solidFill>
+                <a:latin typeface="Helvetica Neue"/>
+                <a:ea typeface="Helvetica Neue"/>
+                <a:cs typeface="Helvetica Neue"/>
+              </a:rPr>
+              <a:t>10</a:t>
+            </a:r>
+          </a:p>
+        </p:txBody>
+      </p:sp>
+      <p:sp>
+        <p:nvSpPr>
+          <p:cNvPr id="4" name="chapter-footer">
+            <a:extLst xmlns:a="http://schemas.openxmlformats.org/drawingml/2006/main">
+              <a:ext uri="{FF2B5EF4-FFF2-40B4-BE49-F238E27FC236}">
+                <a16:creationId xmlns:a16="http://schemas.microsoft.com/office/drawing/2014/main" id="{D8EB878C-C8DF-4211-B9A3-79A3DC353D72}"/>
+              </a:ext>
+            </a:extLst>
+          </p:cNvPr>
+          <p:cNvSpPr>
+            <a:spLocks xmlns:a="http://schemas.openxmlformats.org/drawingml/2006/main" noGrp="1"/>
+          </p:cNvSpPr>
+          <p:nvPr/>
+        </p:nvSpPr>
+        <p:spPr>
+          <a:xfrm xmlns:a="http://schemas.openxmlformats.org/drawingml/2006/main">
+            <a:off x="390525" y="6286500"/>
+            <a:ext cx="8191500" cy="266700"/>
+          </a:xfrm>
+          <a:prstGeom xmlns:a="http://schemas.openxmlformats.org/drawingml/2006/main" prst="rect">
+            <a:avLst/>
+          </a:prstGeom>
+          <a:noFill xmlns:a="http://schemas.openxmlformats.org/drawingml/2006/main"/>
+          <a:ln xmlns:a="http://schemas.openxmlformats.org/drawingml/2006/main" w="0">
+            <a:noFill/>
+            <a:prstDash val="solid"/>
+          </a:ln>
+        </p:spPr>
+        <p:txBody>
+          <a:bodyPr xmlns:a="http://schemas.openxmlformats.org/drawingml/2006/main" anchor="t">
+            <a:noAutofit/>
+          </a:bodyPr>
+          <a:lstStyle xmlns:a="http://schemas.openxmlformats.org/drawingml/2006/main"/>
+          <a:p xmlns:a="http://schemas.openxmlformats.org/drawingml/2006/main">
+            <a:pPr algn="l">
+              <a:defRPr sz="1125" b="0">
+                <a:solidFill>
+                  <a:srgbClr val="5B5B57"/>
+                </a:solidFill>
+                <a:latin typeface="Helvetica Neue"/>
+                <a:ea typeface="Helvetica Neue"/>
+                <a:cs typeface="Helvetica Neue"/>
+              </a:defRPr>
+            </a:pPr>
+            <a:r>
+              <a:rPr sz="1125" b="0">
+                <a:solidFill>
+                  <a:srgbClr val="5B5B57"/>
+                </a:solidFill>
+                <a:latin typeface="Helvetica Neue"/>
+                <a:ea typeface="Helvetica Neue"/>
+                <a:cs typeface="Helvetica Neue"/>
+              </a:rPr>
+              <a:t>Multi-Agent Systems</a:t>
+            </a:r>
+          </a:p>
+        </p:txBody>
+      </p:sp>
+      <p:sp>
+        <p:nvSpPr>
+          <p:cNvPr id="5" name="exam-title">
+            <a:extLst xmlns:a="http://schemas.openxmlformats.org/drawingml/2006/main">
+              <a:ext uri="{FF2B5EF4-FFF2-40B4-BE49-F238E27FC236}">
+                <a16:creationId xmlns:a16="http://schemas.microsoft.com/office/drawing/2014/main" id="{9998204E-FC24-4B7B-899F-75885508DD25}"/>
+              </a:ext>
+            </a:extLst>
+          </p:cNvPr>
+          <p:cNvSpPr>
+            <a:spLocks xmlns:a="http://schemas.openxmlformats.org/drawingml/2006/main" noGrp="1"/>
+          </p:cNvSpPr>
+          <p:nvPr/>
+        </p:nvSpPr>
+        <p:spPr>
+          <a:xfrm xmlns:a="http://schemas.openxmlformats.org/drawingml/2006/main">
+            <a:off x="390525" y="981075"/>
+            <a:ext cx="10668000" cy="781050"/>
+          </a:xfrm>
+          <a:prstGeom xmlns:a="http://schemas.openxmlformats.org/drawingml/2006/main" prst="rect">
+            <a:avLst/>
+          </a:prstGeom>
+          <a:noFill xmlns:a="http://schemas.openxmlformats.org/drawingml/2006/main"/>
+          <a:ln xmlns:a="http://schemas.openxmlformats.org/drawingml/2006/main" w="0">
+            <a:noFill/>
+            <a:prstDash val="solid"/>
+          </a:ln>
+        </p:spPr>
+        <p:txBody>
+          <a:bodyPr xmlns:a="http://schemas.openxmlformats.org/drawingml/2006/main" anchor="t">
+            <a:noAutofit/>
+          </a:bodyPr>
+          <a:lstStyle xmlns:a="http://schemas.openxmlformats.org/drawingml/2006/main"/>
+          <a:p xmlns:a="http://schemas.openxmlformats.org/drawingml/2006/main">
+            <a:pPr algn="l">
+              <a:defRPr sz="3150" b="1">
+                <a:solidFill>
+                  <a:srgbClr val="111111"/>
+                </a:solidFill>
+                <a:latin typeface="Helvetica Neue"/>
+                <a:ea typeface="Helvetica Neue"/>
+                <a:cs typeface="Helvetica Neue"/>
+              </a:defRPr>
+            </a:pPr>
+            <a:r>
+              <a:rPr sz="3150" b="1">
+                <a:solidFill>
+                  <a:srgbClr val="111111"/>
+                </a:solidFill>
+                <a:latin typeface="Helvetica Neue"/>
+                <a:ea typeface="Helvetica Neue"/>
+                <a:cs typeface="Helvetica Neue"/>
+              </a:rPr>
+              <a:t>Can you answer these without notes?</a:t>
+            </a:r>
+          </a:p>
+        </p:txBody>
+      </p:sp>
+      <p:sp>
+        <p:nvSpPr>
+          <p:cNvPr id="6" name="exam-number-1">
+            <a:extLst xmlns:a="http://schemas.openxmlformats.org/drawingml/2006/main">
+              <a:ext uri="{FF2B5EF4-FFF2-40B4-BE49-F238E27FC236}">
+                <a16:creationId xmlns:a16="http://schemas.microsoft.com/office/drawing/2014/main" id="{85A0257A-EEB0-4DE7-A3CC-D7E0DE2A0181}"/>
+              </a:ext>
+            </a:extLst>
+          </p:cNvPr>
+          <p:cNvSpPr>
+            <a:spLocks xmlns:a="http://schemas.openxmlformats.org/drawingml/2006/main" noGrp="1"/>
+          </p:cNvSpPr>
+          <p:nvPr/>
+        </p:nvSpPr>
+        <p:spPr>
+          <a:xfrm xmlns:a="http://schemas.openxmlformats.org/drawingml/2006/main">
+            <a:off x="390525" y="2238375"/>
+            <a:ext cx="590550" cy="400050"/>
+          </a:xfrm>
+          <a:prstGeom xmlns:a="http://schemas.openxmlformats.org/drawingml/2006/main" prst="rect">
+            <a:avLst/>
+          </a:prstGeom>
+          <a:noFill xmlns:a="http://schemas.openxmlformats.org/drawingml/2006/main"/>
+          <a:ln xmlns:a="http://schemas.openxmlformats.org/drawingml/2006/main" w="0">
+            <a:noFill/>
+            <a:prstDash val="solid"/>
+          </a:ln>
+        </p:spPr>
+        <p:txBody>
+          <a:bodyPr xmlns:a="http://schemas.openxmlformats.org/drawingml/2006/main" anchor="t">
+            <a:noAutofit/>
+          </a:bodyPr>
+          <a:lstStyle xmlns:a="http://schemas.openxmlformats.org/drawingml/2006/main"/>
+          <a:p xmlns:a="http://schemas.openxmlformats.org/drawingml/2006/main">
+            <a:pPr algn="l">
+              <a:defRPr sz="1725" b="1">
+                <a:solidFill>
+                  <a:srgbClr val="FFB45E"/>
+                </a:solidFill>
+                <a:latin typeface="Helvetica Neue"/>
+                <a:ea typeface="Helvetica Neue"/>
+                <a:cs typeface="Helvetica Neue"/>
+              </a:defRPr>
+            </a:pPr>
+            <a:r>
+              <a:rPr sz="1725" b="1">
+                <a:solidFill>
+                  <a:srgbClr val="FFB45E"/>
+                </a:solidFill>
+                <a:latin typeface="Helvetica Neue"/>
+                <a:ea typeface="Helvetica Neue"/>
+                <a:cs typeface="Helvetica Neue"/>
+              </a:rPr>
+              <a:t>01</a:t>
+            </a:r>
+          </a:p>
+        </p:txBody>
+      </p:sp>
+      <p:sp>
+        <p:nvSpPr>
+          <p:cNvPr id="7" name="exam-question-1">
+            <a:extLst xmlns:a="http://schemas.openxmlformats.org/drawingml/2006/main">
+              <a:ext uri="{FF2B5EF4-FFF2-40B4-BE49-F238E27FC236}">
+                <a16:creationId xmlns:a16="http://schemas.microsoft.com/office/drawing/2014/main" id="{30C06514-14B3-4130-9523-DE0D86CBFB7B}"/>
+              </a:ext>
+            </a:extLst>
+          </p:cNvPr>
+          <p:cNvSpPr>
+            <a:spLocks xmlns:a="http://schemas.openxmlformats.org/drawingml/2006/main" noGrp="1"/>
+          </p:cNvSpPr>
+          <p:nvPr/>
+        </p:nvSpPr>
+        <p:spPr>
+          <a:xfrm xmlns:a="http://schemas.openxmlformats.org/drawingml/2006/main">
+            <a:off x="1076325" y="2238375"/>
+            <a:ext cx="4762500" cy="895350"/>
+          </a:xfrm>
+          <a:prstGeom xmlns:a="http://schemas.openxmlformats.org/drawingml/2006/main" prst="rect">
+            <a:avLst/>
+          </a:prstGeom>
+          <a:noFill xmlns:a="http://schemas.openxmlformats.org/drawingml/2006/main"/>
+          <a:ln xmlns:a="http://schemas.openxmlformats.org/drawingml/2006/main" w="0">
+            <a:noFill/>
+            <a:prstDash val="solid"/>
+          </a:ln>
+        </p:spPr>
+        <p:txBody>
+          <a:bodyPr xmlns:a="http://schemas.openxmlformats.org/drawingml/2006/main" anchor="t">
+            <a:normAutofit fontScale="100000"/>
+          </a:bodyPr>
+          <a:lstStyle xmlns:a="http://schemas.openxmlformats.org/drawingml/2006/main"/>
+          <a:p xmlns:a="http://schemas.openxmlformats.org/drawingml/2006/main">
+            <a:pPr algn="l">
+              <a:defRPr sz="1575" b="1">
+                <a:solidFill>
+                  <a:srgbClr val="111111"/>
+                </a:solidFill>
+                <a:latin typeface="Helvetica Neue"/>
+                <a:ea typeface="Helvetica Neue"/>
+                <a:cs typeface="Helvetica Neue"/>
+              </a:defRPr>
+            </a:pPr>
+            <a:r>
+              <a:rPr sz="1575" b="1">
+                <a:solidFill>
+                  <a:srgbClr val="111111"/>
+                </a:solidFill>
+                <a:latin typeface="Helvetica Neue"/>
+                <a:ea typeface="Helvetica Neue"/>
+                <a:cs typeface="Helvetica Neue"/>
+              </a:rPr>
+              <a:t>List four benefits and four costs of multi-agent systems.</a:t>
+            </a:r>
+          </a:p>
+        </p:txBody>
+      </p:sp>
+      <p:sp>
+        <p:nvSpPr>
+          <p:cNvPr id="8" name="exam-number-2">
+            <a:extLst xmlns:a="http://schemas.openxmlformats.org/drawingml/2006/main">
+              <a:ext uri="{FF2B5EF4-FFF2-40B4-BE49-F238E27FC236}">
+                <a16:creationId xmlns:a16="http://schemas.microsoft.com/office/drawing/2014/main" id="{A2441847-50BD-46BF-9CE1-04F9DE23BAF1}"/>
+              </a:ext>
+            </a:extLst>
+          </p:cNvPr>
+          <p:cNvSpPr>
+            <a:spLocks xmlns:a="http://schemas.openxmlformats.org/drawingml/2006/main" noGrp="1"/>
+          </p:cNvSpPr>
+          <p:nvPr/>
+        </p:nvSpPr>
+        <p:spPr>
+          <a:xfrm xmlns:a="http://schemas.openxmlformats.org/drawingml/2006/main">
+            <a:off x="6191250" y="2238375"/>
+            <a:ext cx="590550" cy="400050"/>
+          </a:xfrm>
+          <a:prstGeom xmlns:a="http://schemas.openxmlformats.org/drawingml/2006/main" prst="rect">
+            <a:avLst/>
+          </a:prstGeom>
+          <a:noFill xmlns:a="http://schemas.openxmlformats.org/drawingml/2006/main"/>
+          <a:ln xmlns:a="http://schemas.openxmlformats.org/drawingml/2006/main" w="0">
+            <a:noFill/>
+            <a:prstDash val="solid"/>
+          </a:ln>
+        </p:spPr>
+        <p:txBody>
+          <a:bodyPr xmlns:a="http://schemas.openxmlformats.org/drawingml/2006/main" anchor="t">
+            <a:noAutofit/>
+          </a:bodyPr>
+          <a:lstStyle xmlns:a="http://schemas.openxmlformats.org/drawingml/2006/main"/>
+          <a:p xmlns:a="http://schemas.openxmlformats.org/drawingml/2006/main">
+            <a:pPr algn="l">
+              <a:defRPr sz="1725" b="1">
+                <a:solidFill>
+                  <a:srgbClr val="FFB45E"/>
+                </a:solidFill>
+                <a:latin typeface="Helvetica Neue"/>
+                <a:ea typeface="Helvetica Neue"/>
+                <a:cs typeface="Helvetica Neue"/>
+              </a:defRPr>
+            </a:pPr>
+            <a:r>
+              <a:rPr sz="1725" b="1">
+                <a:solidFill>
+                  <a:srgbClr val="FFB45E"/>
+                </a:solidFill>
+                <a:latin typeface="Helvetica Neue"/>
+                <a:ea typeface="Helvetica Neue"/>
+                <a:cs typeface="Helvetica Neue"/>
+              </a:rPr>
+              <a:t>02</a:t>
+            </a:r>
+          </a:p>
+        </p:txBody>
+      </p:sp>
+      <p:sp>
+        <p:nvSpPr>
+          <p:cNvPr id="9" name="exam-question-2">
+            <a:extLst xmlns:a="http://schemas.openxmlformats.org/drawingml/2006/main">
+              <a:ext uri="{FF2B5EF4-FFF2-40B4-BE49-F238E27FC236}">
+                <a16:creationId xmlns:a16="http://schemas.microsoft.com/office/drawing/2014/main" id="{910329F2-6938-4A82-8DC8-90A8D429F1E8}"/>
+              </a:ext>
+            </a:extLst>
+          </p:cNvPr>
+          <p:cNvSpPr>
+            <a:spLocks xmlns:a="http://schemas.openxmlformats.org/drawingml/2006/main" noGrp="1"/>
+          </p:cNvSpPr>
+          <p:nvPr/>
+        </p:nvSpPr>
+        <p:spPr>
+          <a:xfrm xmlns:a="http://schemas.openxmlformats.org/drawingml/2006/main">
+            <a:off x="6877050" y="2238375"/>
+            <a:ext cx="4762500" cy="895350"/>
+          </a:xfrm>
+          <a:prstGeom xmlns:a="http://schemas.openxmlformats.org/drawingml/2006/main" prst="rect">
+            <a:avLst/>
+          </a:prstGeom>
+          <a:noFill xmlns:a="http://schemas.openxmlformats.org/drawingml/2006/main"/>
+          <a:ln xmlns:a="http://schemas.openxmlformats.org/drawingml/2006/main" w="0">
+            <a:noFill/>
+            <a:prstDash val="solid"/>
+          </a:ln>
+        </p:spPr>
+        <p:txBody>
+          <a:bodyPr xmlns:a="http://schemas.openxmlformats.org/drawingml/2006/main" anchor="t">
+            <a:normAutofit fontScale="100000"/>
+          </a:bodyPr>
+          <a:lstStyle xmlns:a="http://schemas.openxmlformats.org/drawingml/2006/main"/>
+          <a:p xmlns:a="http://schemas.openxmlformats.org/drawingml/2006/main">
+            <a:pPr algn="l">
+              <a:defRPr sz="1575" b="1">
+                <a:solidFill>
+                  <a:srgbClr val="111111"/>
+                </a:solidFill>
+                <a:latin typeface="Helvetica Neue"/>
+                <a:ea typeface="Helvetica Neue"/>
+                <a:cs typeface="Helvetica Neue"/>
+              </a:defRPr>
+            </a:pPr>
+            <a:r>
+              <a:rPr sz="1575" b="1">
+                <a:solidFill>
+                  <a:srgbClr val="111111"/>
+                </a:solidFill>
+                <a:latin typeface="Helvetica Neue"/>
+                <a:ea typeface="Helvetica Neue"/>
+                <a:cs typeface="Helvetica Neue"/>
+              </a:rPr>
+              <a:t>What are the four dimensions of collaboration?</a:t>
+            </a:r>
+          </a:p>
+        </p:txBody>
+      </p:sp>
+      <p:sp>
+        <p:nvSpPr>
+          <p:cNvPr id="10" name="exam-number-3">
+            <a:extLst xmlns:a="http://schemas.openxmlformats.org/drawingml/2006/main">
+              <a:ext uri="{FF2B5EF4-FFF2-40B4-BE49-F238E27FC236}">
+                <a16:creationId xmlns:a16="http://schemas.microsoft.com/office/drawing/2014/main" id="{C97E04CD-5D4C-4DC5-A907-F68808AE9F29}"/>
+              </a:ext>
+            </a:extLst>
+          </p:cNvPr>
+          <p:cNvSpPr>
+            <a:spLocks xmlns:a="http://schemas.openxmlformats.org/drawingml/2006/main" noGrp="1"/>
+          </p:cNvSpPr>
+          <p:nvPr/>
+        </p:nvSpPr>
+        <p:spPr>
+          <a:xfrm xmlns:a="http://schemas.openxmlformats.org/drawingml/2006/main">
+            <a:off x="390525" y="3495675"/>
+            <a:ext cx="590550" cy="400050"/>
+          </a:xfrm>
+          <a:prstGeom xmlns:a="http://schemas.openxmlformats.org/drawingml/2006/main" prst="rect">
+            <a:avLst/>
+          </a:prstGeom>
+          <a:noFill xmlns:a="http://schemas.openxmlformats.org/drawingml/2006/main"/>
+          <a:ln xmlns:a="http://schemas.openxmlformats.org/drawingml/2006/main" w="0">
+            <a:noFill/>
+            <a:prstDash val="solid"/>
+          </a:ln>
+        </p:spPr>
+        <p:txBody>
+          <a:bodyPr xmlns:a="http://schemas.openxmlformats.org/drawingml/2006/main" anchor="t">
+            <a:noAutofit/>
+          </a:bodyPr>
+          <a:lstStyle xmlns:a="http://schemas.openxmlformats.org/drawingml/2006/main"/>
+          <a:p xmlns:a="http://schemas.openxmlformats.org/drawingml/2006/main">
+            <a:pPr algn="l">
+              <a:defRPr sz="1725" b="1">
+                <a:solidFill>
+                  <a:srgbClr val="FFB45E"/>
+                </a:solidFill>
+                <a:latin typeface="Helvetica Neue"/>
+                <a:ea typeface="Helvetica Neue"/>
+                <a:cs typeface="Helvetica Neue"/>
+              </a:defRPr>
+            </a:pPr>
+            <a:r>
+              <a:rPr sz="1725" b="1">
+                <a:solidFill>
+                  <a:srgbClr val="FFB45E"/>
+                </a:solidFill>
+                <a:latin typeface="Helvetica Neue"/>
+                <a:ea typeface="Helvetica Neue"/>
+                <a:cs typeface="Helvetica Neue"/>
+              </a:rPr>
+              <a:t>03</a:t>
+            </a:r>
+          </a:p>
+        </p:txBody>
+      </p:sp>
+      <p:sp>
+        <p:nvSpPr>
+          <p:cNvPr id="11" name="exam-question-3">
+            <a:extLst xmlns:a="http://schemas.openxmlformats.org/drawingml/2006/main">
+              <a:ext uri="{FF2B5EF4-FFF2-40B4-BE49-F238E27FC236}">
+                <a16:creationId xmlns:a16="http://schemas.microsoft.com/office/drawing/2014/main" id="{0882812A-ABA0-45B2-BA70-FE8742146B3D}"/>
+              </a:ext>
+            </a:extLst>
+          </p:cNvPr>
+          <p:cNvSpPr>
+            <a:spLocks xmlns:a="http://schemas.openxmlformats.org/drawingml/2006/main" noGrp="1"/>
+          </p:cNvSpPr>
+          <p:nvPr/>
+        </p:nvSpPr>
+        <p:spPr>
+          <a:xfrm xmlns:a="http://schemas.openxmlformats.org/drawingml/2006/main">
+            <a:off x="1076325" y="3495675"/>
+            <a:ext cx="4762500" cy="895350"/>
+          </a:xfrm>
+          <a:prstGeom xmlns:a="http://schemas.openxmlformats.org/drawingml/2006/main" prst="rect">
+            <a:avLst/>
+          </a:prstGeom>
+          <a:noFill xmlns:a="http://schemas.openxmlformats.org/drawingml/2006/main"/>
+          <a:ln xmlns:a="http://schemas.openxmlformats.org/drawingml/2006/main" w="0">
+            <a:noFill/>
+            <a:prstDash val="solid"/>
+          </a:ln>
+        </p:spPr>
+        <p:txBody>
+          <a:bodyPr xmlns:a="http://schemas.openxmlformats.org/drawingml/2006/main" anchor="t">
+            <a:normAutofit fontScale="100000"/>
+          </a:bodyPr>
+          <a:lstStyle xmlns:a="http://schemas.openxmlformats.org/drawingml/2006/main"/>
+          <a:p xmlns:a="http://schemas.openxmlformats.org/drawingml/2006/main">
+            <a:pPr algn="l">
+              <a:defRPr sz="1575" b="1">
+                <a:solidFill>
+                  <a:srgbClr val="111111"/>
+                </a:solidFill>
+                <a:latin typeface="Helvetica Neue"/>
+                <a:ea typeface="Helvetica Neue"/>
+                <a:cs typeface="Helvetica Neue"/>
+              </a:defRPr>
+            </a:pPr>
+            <a:r>
+              <a:rPr sz="1575" b="1">
+                <a:solidFill>
+                  <a:srgbClr val="111111"/>
+                </a:solidFill>
+                <a:latin typeface="Helvetica Neue"/>
+                <a:ea typeface="Helvetica Neue"/>
+                <a:cs typeface="Helvetica Neue"/>
+              </a:rPr>
+              <a:t>Compare shared state, direct messaging, and publish-subscribe.</a:t>
+            </a:r>
+          </a:p>
+        </p:txBody>
+      </p:sp>
+      <p:sp>
+        <p:nvSpPr>
+          <p:cNvPr id="12" name="exam-number-4">
+            <a:extLst xmlns:a="http://schemas.openxmlformats.org/drawingml/2006/main">
+              <a:ext uri="{FF2B5EF4-FFF2-40B4-BE49-F238E27FC236}">
+                <a16:creationId xmlns:a16="http://schemas.microsoft.com/office/drawing/2014/main" id="{460A6267-6719-4175-BBD6-336C2E2F5F36}"/>
+              </a:ext>
+            </a:extLst>
+          </p:cNvPr>
+          <p:cNvSpPr>
+            <a:spLocks xmlns:a="http://schemas.openxmlformats.org/drawingml/2006/main" noGrp="1"/>
+          </p:cNvSpPr>
+          <p:nvPr/>
+        </p:nvSpPr>
+        <p:spPr>
+          <a:xfrm xmlns:a="http://schemas.openxmlformats.org/drawingml/2006/main">
+            <a:off x="6191250" y="3495675"/>
+            <a:ext cx="590550" cy="400050"/>
+          </a:xfrm>
+          <a:prstGeom xmlns:a="http://schemas.openxmlformats.org/drawingml/2006/main" prst="rect">
+            <a:avLst/>
+          </a:prstGeom>
+          <a:noFill xmlns:a="http://schemas.openxmlformats.org/drawingml/2006/main"/>
+          <a:ln xmlns:a="http://schemas.openxmlformats.org/drawingml/2006/main" w="0">
+            <a:noFill/>
+            <a:prstDash val="solid"/>
+          </a:ln>
+        </p:spPr>
+        <p:txBody>
+          <a:bodyPr xmlns:a="http://schemas.openxmlformats.org/drawingml/2006/main" anchor="t">
+            <a:noAutofit/>
+          </a:bodyPr>
+          <a:lstStyle xmlns:a="http://schemas.openxmlformats.org/drawingml/2006/main"/>
+          <a:p xmlns:a="http://schemas.openxmlformats.org/drawingml/2006/main">
+            <a:pPr algn="l">
+              <a:defRPr sz="1725" b="1">
+                <a:solidFill>
+                  <a:srgbClr val="FFB45E"/>
+                </a:solidFill>
+                <a:latin typeface="Helvetica Neue"/>
+                <a:ea typeface="Helvetica Neue"/>
+                <a:cs typeface="Helvetica Neue"/>
+              </a:defRPr>
+            </a:pPr>
+            <a:r>
+              <a:rPr sz="1725" b="1">
+                <a:solidFill>
+                  <a:srgbClr val="FFB45E"/>
+                </a:solidFill>
+                <a:latin typeface="Helvetica Neue"/>
+                <a:ea typeface="Helvetica Neue"/>
+                <a:cs typeface="Helvetica Neue"/>
+              </a:rPr>
+              <a:t>04</a:t>
+            </a:r>
+          </a:p>
+        </p:txBody>
+      </p:sp>
+      <p:sp>
+        <p:nvSpPr>
+          <p:cNvPr id="13" name="exam-question-4">
+            <a:extLst xmlns:a="http://schemas.openxmlformats.org/drawingml/2006/main">
+              <a:ext uri="{FF2B5EF4-FFF2-40B4-BE49-F238E27FC236}">
+                <a16:creationId xmlns:a16="http://schemas.microsoft.com/office/drawing/2014/main" id="{64166ACD-816E-4FE9-A724-38DD1984E558}"/>
+              </a:ext>
+            </a:extLst>
+          </p:cNvPr>
+          <p:cNvSpPr>
+            <a:spLocks xmlns:a="http://schemas.openxmlformats.org/drawingml/2006/main" noGrp="1"/>
+          </p:cNvSpPr>
+          <p:nvPr/>
+        </p:nvSpPr>
+        <p:spPr>
+          <a:xfrm xmlns:a="http://schemas.openxmlformats.org/drawingml/2006/main">
+            <a:off x="6877050" y="3495675"/>
+            <a:ext cx="4762500" cy="895350"/>
+          </a:xfrm>
+          <a:prstGeom xmlns:a="http://schemas.openxmlformats.org/drawingml/2006/main" prst="rect">
+            <a:avLst/>
+          </a:prstGeom>
+          <a:noFill xmlns:a="http://schemas.openxmlformats.org/drawingml/2006/main"/>
+          <a:ln xmlns:a="http://schemas.openxmlformats.org/drawingml/2006/main" w="0">
+            <a:noFill/>
+            <a:prstDash val="solid"/>
+          </a:ln>
+        </p:spPr>
+        <p:txBody>
+          <a:bodyPr xmlns:a="http://schemas.openxmlformats.org/drawingml/2006/main" anchor="t">
+            <a:normAutofit fontScale="100000"/>
+          </a:bodyPr>
+          <a:lstStyle xmlns:a="http://schemas.openxmlformats.org/drawingml/2006/main"/>
+          <a:p xmlns:a="http://schemas.openxmlformats.org/drawingml/2006/main">
+            <a:pPr algn="l">
+              <a:defRPr sz="1575" b="1">
+                <a:solidFill>
+                  <a:srgbClr val="111111"/>
+                </a:solidFill>
+                <a:latin typeface="Helvetica Neue"/>
+                <a:ea typeface="Helvetica Neue"/>
+                <a:cs typeface="Helvetica Neue"/>
+              </a:defRPr>
+            </a:pPr>
+            <a:r>
+              <a:rPr sz="1575" b="1">
+                <a:solidFill>
+                  <a:srgbClr val="111111"/>
+                </a:solidFill>
+                <a:latin typeface="Helvetica Neue"/>
+                <a:ea typeface="Helvetica Neue"/>
+                <a:cs typeface="Helvetica Neue"/>
+              </a:rPr>
+              <a:t>When is a distributed runtime justified?</a:t>
+            </a:r>
+          </a:p>
+        </p:txBody>
+      </p:sp>
+      <p:sp>
+        <p:nvSpPr>
+          <p:cNvPr id="14" name="exam-number-5">
+            <a:extLst xmlns:a="http://schemas.openxmlformats.org/drawingml/2006/main">
+              <a:ext uri="{FF2B5EF4-FFF2-40B4-BE49-F238E27FC236}">
+                <a16:creationId xmlns:a16="http://schemas.microsoft.com/office/drawing/2014/main" id="{09CBF46F-4180-4AA4-85A9-1C23A8911C4B}"/>
+              </a:ext>
+            </a:extLst>
+          </p:cNvPr>
+          <p:cNvSpPr>
+            <a:spLocks xmlns:a="http://schemas.openxmlformats.org/drawingml/2006/main" noGrp="1"/>
+          </p:cNvSpPr>
+          <p:nvPr/>
+        </p:nvSpPr>
+        <p:spPr>
+          <a:xfrm xmlns:a="http://schemas.openxmlformats.org/drawingml/2006/main">
+            <a:off x="390525" y="4752975"/>
+            <a:ext cx="590550" cy="400050"/>
+          </a:xfrm>
+          <a:prstGeom xmlns:a="http://schemas.openxmlformats.org/drawingml/2006/main" prst="rect">
+            <a:avLst/>
+          </a:prstGeom>
+          <a:noFill xmlns:a="http://schemas.openxmlformats.org/drawingml/2006/main"/>
+          <a:ln xmlns:a="http://schemas.openxmlformats.org/drawingml/2006/main" w="0">
+            <a:noFill/>
+            <a:prstDash val="solid"/>
+          </a:ln>
+        </p:spPr>
+        <p:txBody>
+          <a:bodyPr xmlns:a="http://schemas.openxmlformats.org/drawingml/2006/main" anchor="t">
+            <a:noAutofit/>
+          </a:bodyPr>
+          <a:lstStyle xmlns:a="http://schemas.openxmlformats.org/drawingml/2006/main"/>
+          <a:p xmlns:a="http://schemas.openxmlformats.org/drawingml/2006/main">
+            <a:pPr algn="l">
+              <a:defRPr sz="1725" b="1">
+                <a:solidFill>
+                  <a:srgbClr val="FFB45E"/>
+                </a:solidFill>
+                <a:latin typeface="Helvetica Neue"/>
+                <a:ea typeface="Helvetica Neue"/>
+                <a:cs typeface="Helvetica Neue"/>
+              </a:defRPr>
+            </a:pPr>
+            <a:r>
+              <a:rPr sz="1725" b="1">
+                <a:solidFill>
+                  <a:srgbClr val="FFB45E"/>
+                </a:solidFill>
+                <a:latin typeface="Helvetica Neue"/>
+                <a:ea typeface="Helvetica Neue"/>
+                <a:cs typeface="Helvetica Neue"/>
+              </a:rPr>
+              <a:t>05</a:t>
+            </a:r>
+          </a:p>
+        </p:txBody>
+      </p:sp>
+      <p:sp>
+        <p:nvSpPr>
+          <p:cNvPr id="15" name="exam-question-5">
+            <a:extLst xmlns:a="http://schemas.openxmlformats.org/drawingml/2006/main">
+              <a:ext uri="{FF2B5EF4-FFF2-40B4-BE49-F238E27FC236}">
+                <a16:creationId xmlns:a16="http://schemas.microsoft.com/office/drawing/2014/main" id="{7015AD75-7DB9-4832-B366-F7370F1BF8F5}"/>
+              </a:ext>
+            </a:extLst>
+          </p:cNvPr>
+          <p:cNvSpPr>
+            <a:spLocks xmlns:a="http://schemas.openxmlformats.org/drawingml/2006/main" noGrp="1"/>
+          </p:cNvSpPr>
+          <p:nvPr/>
+        </p:nvSpPr>
+        <p:spPr>
+          <a:xfrm xmlns:a="http://schemas.openxmlformats.org/drawingml/2006/main">
+            <a:off x="1076325" y="4752975"/>
+            <a:ext cx="4762500" cy="895350"/>
+          </a:xfrm>
+          <a:prstGeom xmlns:a="http://schemas.openxmlformats.org/drawingml/2006/main" prst="rect">
+            <a:avLst/>
+          </a:prstGeom>
+          <a:noFill xmlns:a="http://schemas.openxmlformats.org/drawingml/2006/main"/>
+          <a:ln xmlns:a="http://schemas.openxmlformats.org/drawingml/2006/main" w="0">
+            <a:noFill/>
+            <a:prstDash val="solid"/>
+          </a:ln>
+        </p:spPr>
+        <p:txBody>
+          <a:bodyPr xmlns:a="http://schemas.openxmlformats.org/drawingml/2006/main" anchor="t">
+            <a:normAutofit fontScale="100000"/>
+          </a:bodyPr>
+          <a:lstStyle xmlns:a="http://schemas.openxmlformats.org/drawingml/2006/main"/>
+          <a:p xmlns:a="http://schemas.openxmlformats.org/drawingml/2006/main">
+            <a:pPr algn="l">
+              <a:defRPr sz="1575" b="1">
+                <a:solidFill>
+                  <a:srgbClr val="111111"/>
+                </a:solidFill>
+                <a:latin typeface="Helvetica Neue"/>
+                <a:ea typeface="Helvetica Neue"/>
+                <a:cs typeface="Helvetica Neue"/>
+              </a:defRPr>
+            </a:pPr>
+            <a:r>
+              <a:rPr sz="1575" b="1">
+                <a:solidFill>
+                  <a:srgbClr val="111111"/>
+                </a:solidFill>
+                <a:latin typeface="Helvetica Neue"/>
+                <a:ea typeface="Helvetica Neue"/>
+                <a:cs typeface="Helvetica Neue"/>
+              </a:rPr>
+              <a:t>Compare centralized, decentralized, and hierarchical topologies.</a:t>
+            </a:r>
+          </a:p>
+        </p:txBody>
+      </p:sp>
+      <p:sp>
+        <p:nvSpPr>
+          <p:cNvPr id="16" name="exam-number-6">
+            <a:extLst xmlns:a="http://schemas.openxmlformats.org/drawingml/2006/main">
+              <a:ext uri="{FF2B5EF4-FFF2-40B4-BE49-F238E27FC236}">
+                <a16:creationId xmlns:a16="http://schemas.microsoft.com/office/drawing/2014/main" id="{9316A91E-30F1-4548-8EB6-E1F7AEAF835C}"/>
+              </a:ext>
+            </a:extLst>
+          </p:cNvPr>
+          <p:cNvSpPr>
+            <a:spLocks xmlns:a="http://schemas.openxmlformats.org/drawingml/2006/main" noGrp="1"/>
+          </p:cNvSpPr>
+          <p:nvPr/>
+        </p:nvSpPr>
+        <p:spPr>
+          <a:xfrm xmlns:a="http://schemas.openxmlformats.org/drawingml/2006/main">
+            <a:off x="6191250" y="4752975"/>
+            <a:ext cx="590550" cy="400050"/>
+          </a:xfrm>
+          <a:prstGeom xmlns:a="http://schemas.openxmlformats.org/drawingml/2006/main" prst="rect">
+            <a:avLst/>
+          </a:prstGeom>
+          <a:noFill xmlns:a="http://schemas.openxmlformats.org/drawingml/2006/main"/>
+          <a:ln xmlns:a="http://schemas.openxmlformats.org/drawingml/2006/main" w="0">
+            <a:noFill/>
+            <a:prstDash val="solid"/>
+          </a:ln>
+        </p:spPr>
+        <p:txBody>
+          <a:bodyPr xmlns:a="http://schemas.openxmlformats.org/drawingml/2006/main" anchor="t">
+            <a:noAutofit/>
+          </a:bodyPr>
+          <a:lstStyle xmlns:a="http://schemas.openxmlformats.org/drawingml/2006/main"/>
+          <a:p xmlns:a="http://schemas.openxmlformats.org/drawingml/2006/main">
+            <a:pPr algn="l">
+              <a:defRPr sz="1725" b="1">
+                <a:solidFill>
+                  <a:srgbClr val="FFB45E"/>
+                </a:solidFill>
+                <a:latin typeface="Helvetica Neue"/>
+                <a:ea typeface="Helvetica Neue"/>
+                <a:cs typeface="Helvetica Neue"/>
+              </a:defRPr>
+            </a:pPr>
+            <a:r>
+              <a:rPr sz="1725" b="1">
+                <a:solidFill>
+                  <a:srgbClr val="FFB45E"/>
+                </a:solidFill>
+                <a:latin typeface="Helvetica Neue"/>
+                <a:ea typeface="Helvetica Neue"/>
+                <a:cs typeface="Helvetica Neue"/>
+              </a:rPr>
+              <a:t>06</a:t>
+            </a:r>
+          </a:p>
+        </p:txBody>
+      </p:sp>
+      <p:sp>
+        <p:nvSpPr>
+          <p:cNvPr id="17" name="exam-question-6">
+            <a:extLst xmlns:a="http://schemas.openxmlformats.org/drawingml/2006/main">
+              <a:ext uri="{FF2B5EF4-FFF2-40B4-BE49-F238E27FC236}">
+                <a16:creationId xmlns:a16="http://schemas.microsoft.com/office/drawing/2014/main" id="{5E699ABB-DF62-43AD-ADC2-6AF6E89EBA98}"/>
+              </a:ext>
+            </a:extLst>
+          </p:cNvPr>
+          <p:cNvSpPr>
+            <a:spLocks xmlns:a="http://schemas.openxmlformats.org/drawingml/2006/main" noGrp="1"/>
+          </p:cNvSpPr>
+          <p:nvPr/>
+        </p:nvSpPr>
+        <p:spPr>
+          <a:xfrm xmlns:a="http://schemas.openxmlformats.org/drawingml/2006/main">
+            <a:off x="6877050" y="4752975"/>
+            <a:ext cx="4762500" cy="895350"/>
+          </a:xfrm>
+          <a:prstGeom xmlns:a="http://schemas.openxmlformats.org/drawingml/2006/main" prst="rect">
+            <a:avLst/>
+          </a:prstGeom>
+          <a:noFill xmlns:a="http://schemas.openxmlformats.org/drawingml/2006/main"/>
+          <a:ln xmlns:a="http://schemas.openxmlformats.org/drawingml/2006/main" w="0">
+            <a:noFill/>
+            <a:prstDash val="solid"/>
+          </a:ln>
+        </p:spPr>
+        <p:txBody>
+          <a:bodyPr xmlns:a="http://schemas.openxmlformats.org/drawingml/2006/main" anchor="t">
+            <a:normAutofit fontScale="100000"/>
+          </a:bodyPr>
+          <a:lstStyle xmlns:a="http://schemas.openxmlformats.org/drawingml/2006/main"/>
+          <a:p xmlns:a="http://schemas.openxmlformats.org/drawingml/2006/main">
+            <a:pPr algn="l">
+              <a:defRPr sz="1575" b="1">
+                <a:solidFill>
+                  <a:srgbClr val="111111"/>
+                </a:solidFill>
+                <a:latin typeface="Helvetica Neue"/>
+                <a:ea typeface="Helvetica Neue"/>
+                <a:cs typeface="Helvetica Neue"/>
+              </a:defRPr>
+            </a:pPr>
+            <a:r>
+              <a:rPr sz="1575" b="1">
+                <a:solidFill>
+                  <a:srgbClr val="111111"/>
+                </a:solidFill>
+                <a:latin typeface="Helvetica Neue"/>
+                <a:ea typeface="Helvetica Neue"/>
+                <a:cs typeface="Helvetica Neue"/>
+              </a:rPr>
+              <a:t>Why can a team agree on an incorrect answer even when its members sample separately?</a:t>
+            </a:r>
+          </a:p>
+        </p:txBody>
+      </p:sp>
+    </p:spTree>
+    <p:extLst>
+      <p:ext uri="{BB962C8B-B14F-4D97-AF65-F5344CB8AC3E}">
+        <p14:creationId xmlns:p14="http://schemas.microsoft.com/office/powerpoint/2010/main" val="262460876"/>
+      </p:ext>
+    </p:extLst>
+  </p:cSld>
+</p:sld>
+</file>
+
+<file path=ppt/slides/slide11.xml><?xml version="1.0" encoding="utf-8"?>
 <p:sld xmlns:p="http://schemas.openxmlformats.org/presentationml/2006/main">
   <p:cSld>
     <p:bg>
@@ -2258,7 +3960,7 @@
           <p:cNvPr id="14" name="accent-line">
             <a:extLst xmlns:a="http://schemas.openxmlformats.org/drawingml/2006/main">
               <a:ext uri="{FF2B5EF4-FFF2-40B4-BE49-F238E27FC236}">
-                <a16:creationId xmlns:a16="http://schemas.microsoft.com/office/drawing/2014/main" id="{4D435469-23D6-42E6-B3F6-F33F589BA61F}"/>
+                <a16:creationId xmlns:a16="http://schemas.microsoft.com/office/drawing/2014/main" id="{3DA26801-CEC7-4FC6-9A1A-0C424551151F}"/>
               </a:ext>
             </a:extLst>
           </p:cNvPr>
@@ -2291,7 +3993,7 @@
           <p:cNvPr id="2" name="chapter-label">
             <a:extLst xmlns:a="http://schemas.openxmlformats.org/drawingml/2006/main">
               <a:ext uri="{FF2B5EF4-FFF2-40B4-BE49-F238E27FC236}">
-                <a16:creationId xmlns:a16="http://schemas.microsoft.com/office/drawing/2014/main" id="{B80E641E-8E59-4027-87E3-5C1DE9561C40}"/>
+                <a16:creationId xmlns:a16="http://schemas.microsoft.com/office/drawing/2014/main" id="{A7109CB4-E0EC-49AF-8CAB-004DE46F3B1C}"/>
               </a:ext>
             </a:extLst>
           </p:cNvPr>
@@ -2349,7 +4051,7 @@
           <p:cNvPr id="3" name="slide-number">
             <a:extLst xmlns:a="http://schemas.openxmlformats.org/drawingml/2006/main">
               <a:ext uri="{FF2B5EF4-FFF2-40B4-BE49-F238E27FC236}">
-                <a16:creationId xmlns:a16="http://schemas.microsoft.com/office/drawing/2014/main" id="{3EFD7CA3-41EF-4D42-AEC8-C17B7BB1E732}"/>
+                <a16:creationId xmlns:a16="http://schemas.microsoft.com/office/drawing/2014/main" id="{F6B02BBF-AE59-4AA5-B6DF-439D34ABFE7C}"/>
               </a:ext>
             </a:extLst>
           </p:cNvPr>
@@ -2397,7 +4099,7 @@
                 <a:ea typeface="Helvetica Neue"/>
                 <a:cs typeface="Helvetica Neue"/>
               </a:rPr>
-              <a:t>10</a:t>
+              <a:t>11</a:t>
             </a:r>
           </a:p>
         </p:txBody>
@@ -2407,7 +4109,7 @@
           <p:cNvPr id="4" name="chapter-footer">
             <a:extLst xmlns:a="http://schemas.openxmlformats.org/drawingml/2006/main">
               <a:ext uri="{FF2B5EF4-FFF2-40B4-BE49-F238E27FC236}">
-                <a16:creationId xmlns:a16="http://schemas.microsoft.com/office/drawing/2014/main" id="{39479805-23F5-44BE-9D7A-7C6D92F19860}"/>
+                <a16:creationId xmlns:a16="http://schemas.microsoft.com/office/drawing/2014/main" id="{BB20207D-A8A9-4647-899E-D5DDCC7E8F54}"/>
               </a:ext>
             </a:extLst>
           </p:cNvPr>
@@ -2465,7 +4167,7 @@
           <p:cNvPr id="5" name="closing-title">
             <a:extLst xmlns:a="http://schemas.openxmlformats.org/drawingml/2006/main">
               <a:ext uri="{FF2B5EF4-FFF2-40B4-BE49-F238E27FC236}">
-                <a16:creationId xmlns:a16="http://schemas.microsoft.com/office/drawing/2014/main" id="{14199640-8B0B-4082-8EB1-0B949716CA84}"/>
+                <a16:creationId xmlns:a16="http://schemas.microsoft.com/office/drawing/2014/main" id="{2A29872A-DBA0-4526-8A6D-AA233458E710}"/>
               </a:ext>
             </a:extLst>
           </p:cNvPr>
@@ -2523,7 +4225,7 @@
           <p:cNvPr id="6" name="takeaway-number-1">
             <a:extLst xmlns:a="http://schemas.openxmlformats.org/drawingml/2006/main">
               <a:ext uri="{FF2B5EF4-FFF2-40B4-BE49-F238E27FC236}">
-                <a16:creationId xmlns:a16="http://schemas.microsoft.com/office/drawing/2014/main" id="{723C973B-59A6-475C-8D72-AB689CBCBCF8}"/>
+                <a16:creationId xmlns:a16="http://schemas.microsoft.com/office/drawing/2014/main" id="{6C6FAE3B-1731-41A2-BFC4-AB13BF26762B}"/>
               </a:ext>
             </a:extLst>
           </p:cNvPr>
@@ -2581,7 +4283,7 @@
           <p:cNvPr id="7" name="takeaway-1">
             <a:extLst xmlns:a="http://schemas.openxmlformats.org/drawingml/2006/main">
               <a:ext uri="{FF2B5EF4-FFF2-40B4-BE49-F238E27FC236}">
-                <a16:creationId xmlns:a16="http://schemas.microsoft.com/office/drawing/2014/main" id="{BFF59768-85F7-4AB4-84D6-A6130A019480}"/>
+                <a16:creationId xmlns:a16="http://schemas.microsoft.com/office/drawing/2014/main" id="{AD20BE5F-A3D5-4C50-BA9C-FA4DA7E0E86A}"/>
               </a:ext>
             </a:extLst>
           </p:cNvPr>
@@ -2639,7 +4341,7 @@
           <p:cNvPr id="8" name="takeaway-number-2">
             <a:extLst xmlns:a="http://schemas.openxmlformats.org/drawingml/2006/main">
               <a:ext uri="{FF2B5EF4-FFF2-40B4-BE49-F238E27FC236}">
-                <a16:creationId xmlns:a16="http://schemas.microsoft.com/office/drawing/2014/main" id="{E95CC5B0-9D19-452F-9503-44B0D2C7706E}"/>
+                <a16:creationId xmlns:a16="http://schemas.microsoft.com/office/drawing/2014/main" id="{D1350882-2FF5-497D-9A15-5314CC27EBF8}"/>
               </a:ext>
             </a:extLst>
           </p:cNvPr>
@@ -2697,7 +4399,7 @@
           <p:cNvPr id="9" name="takeaway-2">
             <a:extLst xmlns:a="http://schemas.openxmlformats.org/drawingml/2006/main">
               <a:ext uri="{FF2B5EF4-FFF2-40B4-BE49-F238E27FC236}">
-                <a16:creationId xmlns:a16="http://schemas.microsoft.com/office/drawing/2014/main" id="{A2228D5C-C73D-47AC-AD04-CAC0DBAE2177}"/>
+                <a16:creationId xmlns:a16="http://schemas.microsoft.com/office/drawing/2014/main" id="{1BE906A5-2B16-4762-8669-8BCD23737A2F}"/>
               </a:ext>
             </a:extLst>
           </p:cNvPr>
@@ -2755,7 +4457,7 @@
           <p:cNvPr id="10" name="takeaway-number-3">
             <a:extLst xmlns:a="http://schemas.openxmlformats.org/drawingml/2006/main">
               <a:ext uri="{FF2B5EF4-FFF2-40B4-BE49-F238E27FC236}">
-                <a16:creationId xmlns:a16="http://schemas.microsoft.com/office/drawing/2014/main" id="{E935C8CD-F6D2-4728-87C6-84BD0A2CB78E}"/>
+                <a16:creationId xmlns:a16="http://schemas.microsoft.com/office/drawing/2014/main" id="{C99BFA3C-48D9-4B27-A87A-EBC90C4974E8}"/>
               </a:ext>
             </a:extLst>
           </p:cNvPr>
@@ -2813,7 +4515,7 @@
           <p:cNvPr id="11" name="takeaway-3">
             <a:extLst xmlns:a="http://schemas.openxmlformats.org/drawingml/2006/main">
               <a:ext uri="{FF2B5EF4-FFF2-40B4-BE49-F238E27FC236}">
-                <a16:creationId xmlns:a16="http://schemas.microsoft.com/office/drawing/2014/main" id="{B5BFF72E-CB32-4FCC-8779-290C637FFC88}"/>
+                <a16:creationId xmlns:a16="http://schemas.microsoft.com/office/drawing/2014/main" id="{DD99A074-3ECD-4868-93AD-7E86998CA9C6}"/>
               </a:ext>
             </a:extLst>
           </p:cNvPr>
@@ -2871,7 +4573,7 @@
           <p:cNvPr id="12" name="takeaway-number-4">
             <a:extLst xmlns:a="http://schemas.openxmlformats.org/drawingml/2006/main">
               <a:ext uri="{FF2B5EF4-FFF2-40B4-BE49-F238E27FC236}">
-                <a16:creationId xmlns:a16="http://schemas.microsoft.com/office/drawing/2014/main" id="{03DF193B-49B8-4C65-A00B-D67336661548}"/>
+                <a16:creationId xmlns:a16="http://schemas.microsoft.com/office/drawing/2014/main" id="{33AD3749-6FE2-4F63-B466-A603F1FF8515}"/>
               </a:ext>
             </a:extLst>
           </p:cNvPr>
@@ -2929,7 +4631,7 @@
           <p:cNvPr id="13" name="takeaway-4">
             <a:extLst xmlns:a="http://schemas.openxmlformats.org/drawingml/2006/main">
               <a:ext uri="{FF2B5EF4-FFF2-40B4-BE49-F238E27FC236}">
-                <a16:creationId xmlns:a16="http://schemas.microsoft.com/office/drawing/2014/main" id="{6A9413D7-3C17-49C9-8B68-BEA0C7168315}"/>
+                <a16:creationId xmlns:a16="http://schemas.microsoft.com/office/drawing/2014/main" id="{E09845F4-AC6B-404A-8E52-B8CA01C15939}"/>
               </a:ext>
             </a:extLst>
           </p:cNvPr>
@@ -2985,7 +4687,556 @@
     </p:spTree>
     <p:extLst>
       <p:ext uri="{BB962C8B-B14F-4D97-AF65-F5344CB8AC3E}">
-        <p14:creationId xmlns:p14="http://schemas.microsoft.com/office/powerpoint/2010/main" val="718788905"/>
+        <p14:creationId xmlns:p14="http://schemas.microsoft.com/office/powerpoint/2010/main" val="1939762396"/>
+      </p:ext>
+    </p:extLst>
+  </p:cSld>
+</p:sld>
+</file>
+
+<file path=ppt/slides/slide12.xml><?xml version="1.0" encoding="utf-8"?>
+<p:sld xmlns:p="http://schemas.openxmlformats.org/presentationml/2006/main">
+  <p:cSld>
+    <p:bg>
+      <p:bgPr>
+        <a:solidFill xmlns:a="http://schemas.openxmlformats.org/drawingml/2006/main">
+          <a:srgbClr val="FFFFFF"/>
+        </a:solidFill>
+      </p:bgPr>
+    </p:bg>
+    <p:spTree>
+      <p:nvGrpSpPr>
+        <p:cNvPr id="1" name=""/>
+        <p:cNvGrpSpPr/>
+        <p:nvPr/>
+      </p:nvGrpSpPr>
+      <p:grpSpPr>
+        <a:xfrm xmlns:a="http://schemas.openxmlformats.org/drawingml/2006/main"/>
+      </p:grpSpPr>
+      <p:sp>
+        <p:nvSpPr>
+          <p:cNvPr id="10" name="accent-line">
+            <a:extLst xmlns:a="http://schemas.openxmlformats.org/drawingml/2006/main">
+              <a:ext uri="{FF2B5EF4-FFF2-40B4-BE49-F238E27FC236}">
+                <a16:creationId xmlns:a16="http://schemas.microsoft.com/office/drawing/2014/main" id="{AAF9EFFD-B930-47F2-BE9B-72F23AD16FBB}"/>
+              </a:ext>
+            </a:extLst>
+          </p:cNvPr>
+          <p:cNvSpPr>
+            <a:spLocks xmlns:a="http://schemas.openxmlformats.org/drawingml/2006/main" noGrp="1"/>
+          </p:cNvSpPr>
+          <p:nvPr/>
+        </p:nvSpPr>
+        <p:spPr>
+          <a:xfrm xmlns:a="http://schemas.openxmlformats.org/drawingml/2006/main">
+            <a:off x="390525" y="304800"/>
+            <a:ext cx="11410950" cy="66675"/>
+          </a:xfrm>
+          <a:prstGeom xmlns:a="http://schemas.openxmlformats.org/drawingml/2006/main" prst="rect">
+            <a:avLst/>
+          </a:prstGeom>
+          <a:solidFill xmlns:a="http://schemas.openxmlformats.org/drawingml/2006/main">
+            <a:srgbClr val="FFB45E"/>
+          </a:solidFill>
+          <a:ln xmlns:a="http://schemas.openxmlformats.org/drawingml/2006/main" w="0">
+            <a:solidFill>
+              <a:srgbClr val="FFB45E"/>
+            </a:solidFill>
+            <a:prstDash val="solid"/>
+          </a:ln>
+        </p:spPr>
+      </p:sp>
+      <p:sp>
+        <p:nvSpPr>
+          <p:cNvPr id="2" name="chapter-label">
+            <a:extLst xmlns:a="http://schemas.openxmlformats.org/drawingml/2006/main">
+              <a:ext uri="{FF2B5EF4-FFF2-40B4-BE49-F238E27FC236}">
+                <a16:creationId xmlns:a16="http://schemas.microsoft.com/office/drawing/2014/main" id="{DF37A20A-96FD-4B78-9BBF-4729078AF1A8}"/>
+              </a:ext>
+            </a:extLst>
+          </p:cNvPr>
+          <p:cNvSpPr>
+            <a:spLocks xmlns:a="http://schemas.openxmlformats.org/drawingml/2006/main" noGrp="1"/>
+          </p:cNvSpPr>
+          <p:nvPr/>
+        </p:nvSpPr>
+        <p:spPr>
+          <a:xfrm xmlns:a="http://schemas.openxmlformats.org/drawingml/2006/main">
+            <a:off x="390525" y="466725"/>
+            <a:ext cx="4953000" cy="323850"/>
+          </a:xfrm>
+          <a:prstGeom xmlns:a="http://schemas.openxmlformats.org/drawingml/2006/main" prst="rect">
+            <a:avLst/>
+          </a:prstGeom>
+          <a:noFill xmlns:a="http://schemas.openxmlformats.org/drawingml/2006/main"/>
+          <a:ln xmlns:a="http://schemas.openxmlformats.org/drawingml/2006/main" w="0">
+            <a:noFill/>
+            <a:prstDash val="solid"/>
+          </a:ln>
+        </p:spPr>
+        <p:txBody>
+          <a:bodyPr xmlns:a="http://schemas.openxmlformats.org/drawingml/2006/main" anchor="t">
+            <a:noAutofit/>
+          </a:bodyPr>
+          <a:lstStyle xmlns:a="http://schemas.openxmlformats.org/drawingml/2006/main"/>
+          <a:p xmlns:a="http://schemas.openxmlformats.org/drawingml/2006/main">
+            <a:pPr algn="l">
+              <a:defRPr sz="1275" b="1">
+                <a:solidFill>
+                  <a:srgbClr val="5B5B57"/>
+                </a:solidFill>
+                <a:latin typeface="Helvetica Neue"/>
+                <a:ea typeface="Helvetica Neue"/>
+                <a:cs typeface="Helvetica Neue"/>
+              </a:defRPr>
+            </a:pPr>
+            <a:r>
+              <a:rPr sz="1275" b="1">
+                <a:solidFill>
+                  <a:srgbClr val="5B5B57"/>
+                </a:solidFill>
+                <a:latin typeface="Helvetica Neue"/>
+                <a:ea typeface="Helvetica Neue"/>
+                <a:cs typeface="Helvetica Neue"/>
+              </a:rPr>
+              <a:t>PRACTICE AND READING  /  08</a:t>
+            </a:r>
+          </a:p>
+        </p:txBody>
+      </p:sp>
+      <p:sp>
+        <p:nvSpPr>
+          <p:cNvPr id="3" name="slide-number">
+            <a:extLst xmlns:a="http://schemas.openxmlformats.org/drawingml/2006/main">
+              <a:ext uri="{FF2B5EF4-FFF2-40B4-BE49-F238E27FC236}">
+                <a16:creationId xmlns:a16="http://schemas.microsoft.com/office/drawing/2014/main" id="{08DA7E91-BD07-4BBB-8687-DEC228469414}"/>
+              </a:ext>
+            </a:extLst>
+          </p:cNvPr>
+          <p:cNvSpPr>
+            <a:spLocks xmlns:a="http://schemas.openxmlformats.org/drawingml/2006/main" noGrp="1"/>
+          </p:cNvSpPr>
+          <p:nvPr/>
+        </p:nvSpPr>
+        <p:spPr>
+          <a:xfrm xmlns:a="http://schemas.openxmlformats.org/drawingml/2006/main">
+            <a:off x="11049000" y="6286500"/>
+            <a:ext cx="742950" cy="266700"/>
+          </a:xfrm>
+          <a:prstGeom xmlns:a="http://schemas.openxmlformats.org/drawingml/2006/main" prst="rect">
+            <a:avLst/>
+          </a:prstGeom>
+          <a:noFill xmlns:a="http://schemas.openxmlformats.org/drawingml/2006/main"/>
+          <a:ln xmlns:a="http://schemas.openxmlformats.org/drawingml/2006/main" w="0">
+            <a:noFill/>
+            <a:prstDash val="solid"/>
+          </a:ln>
+        </p:spPr>
+        <p:txBody>
+          <a:bodyPr xmlns:a="http://schemas.openxmlformats.org/drawingml/2006/main" anchor="t">
+            <a:noAutofit/>
+          </a:bodyPr>
+          <a:lstStyle xmlns:a="http://schemas.openxmlformats.org/drawingml/2006/main"/>
+          <a:p xmlns:a="http://schemas.openxmlformats.org/drawingml/2006/main">
+            <a:pPr algn="r">
+              <a:defRPr sz="1200" b="0">
+                <a:solidFill>
+                  <a:srgbClr val="5B5B57"/>
+                </a:solidFill>
+                <a:latin typeface="Helvetica Neue"/>
+                <a:ea typeface="Helvetica Neue"/>
+                <a:cs typeface="Helvetica Neue"/>
+              </a:defRPr>
+            </a:pPr>
+            <a:r>
+              <a:rPr sz="1200" b="0">
+                <a:solidFill>
+                  <a:srgbClr val="5B5B57"/>
+                </a:solidFill>
+                <a:latin typeface="Helvetica Neue"/>
+                <a:ea typeface="Helvetica Neue"/>
+                <a:cs typeface="Helvetica Neue"/>
+              </a:rPr>
+              <a:t>12</a:t>
+            </a:r>
+          </a:p>
+        </p:txBody>
+      </p:sp>
+      <p:sp>
+        <p:nvSpPr>
+          <p:cNvPr id="4" name="chapter-footer">
+            <a:extLst xmlns:a="http://schemas.openxmlformats.org/drawingml/2006/main">
+              <a:ext uri="{FF2B5EF4-FFF2-40B4-BE49-F238E27FC236}">
+                <a16:creationId xmlns:a16="http://schemas.microsoft.com/office/drawing/2014/main" id="{21562DE9-686A-48B8-BA1D-2B465F96DB6D}"/>
+              </a:ext>
+            </a:extLst>
+          </p:cNvPr>
+          <p:cNvSpPr>
+            <a:spLocks xmlns:a="http://schemas.openxmlformats.org/drawingml/2006/main" noGrp="1"/>
+          </p:cNvSpPr>
+          <p:nvPr/>
+        </p:nvSpPr>
+        <p:spPr>
+          <a:xfrm xmlns:a="http://schemas.openxmlformats.org/drawingml/2006/main">
+            <a:off x="390525" y="6286500"/>
+            <a:ext cx="8191500" cy="266700"/>
+          </a:xfrm>
+          <a:prstGeom xmlns:a="http://schemas.openxmlformats.org/drawingml/2006/main" prst="rect">
+            <a:avLst/>
+          </a:prstGeom>
+          <a:noFill xmlns:a="http://schemas.openxmlformats.org/drawingml/2006/main"/>
+          <a:ln xmlns:a="http://schemas.openxmlformats.org/drawingml/2006/main" w="0">
+            <a:noFill/>
+            <a:prstDash val="solid"/>
+          </a:ln>
+        </p:spPr>
+        <p:txBody>
+          <a:bodyPr xmlns:a="http://schemas.openxmlformats.org/drawingml/2006/main" anchor="t">
+            <a:noAutofit/>
+          </a:bodyPr>
+          <a:lstStyle xmlns:a="http://schemas.openxmlformats.org/drawingml/2006/main"/>
+          <a:p xmlns:a="http://schemas.openxmlformats.org/drawingml/2006/main">
+            <a:pPr algn="l">
+              <a:defRPr sz="1125" b="0">
+                <a:solidFill>
+                  <a:srgbClr val="5B5B57"/>
+                </a:solidFill>
+                <a:latin typeface="Helvetica Neue"/>
+                <a:ea typeface="Helvetica Neue"/>
+                <a:cs typeface="Helvetica Neue"/>
+              </a:defRPr>
+            </a:pPr>
+            <a:r>
+              <a:rPr sz="1125" b="0">
+                <a:solidFill>
+                  <a:srgbClr val="5B5B57"/>
+                </a:solidFill>
+                <a:latin typeface="Helvetica Neue"/>
+                <a:ea typeface="Helvetica Neue"/>
+                <a:cs typeface="Helvetica Neue"/>
+              </a:rPr>
+              <a:t>Multi-Agent Systems</a:t>
+            </a:r>
+          </a:p>
+        </p:txBody>
+      </p:sp>
+      <p:sp>
+        <p:nvSpPr>
+          <p:cNvPr id="5" name="practice-title">
+            <a:extLst xmlns:a="http://schemas.openxmlformats.org/drawingml/2006/main">
+              <a:ext uri="{FF2B5EF4-FFF2-40B4-BE49-F238E27FC236}">
+                <a16:creationId xmlns:a16="http://schemas.microsoft.com/office/drawing/2014/main" id="{93C67123-2BBE-4EA0-BCBA-7E1143F0DC6E}"/>
+              </a:ext>
+            </a:extLst>
+          </p:cNvPr>
+          <p:cNvSpPr>
+            <a:spLocks xmlns:a="http://schemas.openxmlformats.org/drawingml/2006/main" noGrp="1"/>
+          </p:cNvSpPr>
+          <p:nvPr/>
+        </p:nvSpPr>
+        <p:spPr>
+          <a:xfrm xmlns:a="http://schemas.openxmlformats.org/drawingml/2006/main">
+            <a:off x="390525" y="1000125"/>
+            <a:ext cx="11144250" cy="666750"/>
+          </a:xfrm>
+          <a:prstGeom xmlns:a="http://schemas.openxmlformats.org/drawingml/2006/main" prst="rect">
+            <a:avLst/>
+          </a:prstGeom>
+          <a:noFill xmlns:a="http://schemas.openxmlformats.org/drawingml/2006/main"/>
+          <a:ln xmlns:a="http://schemas.openxmlformats.org/drawingml/2006/main" w="0">
+            <a:noFill/>
+            <a:prstDash val="solid"/>
+          </a:ln>
+        </p:spPr>
+        <p:txBody>
+          <a:bodyPr xmlns:a="http://schemas.openxmlformats.org/drawingml/2006/main" anchor="t">
+            <a:normAutofit fontScale="100000"/>
+          </a:bodyPr>
+          <a:lstStyle xmlns:a="http://schemas.openxmlformats.org/drawingml/2006/main"/>
+          <a:p xmlns:a="http://schemas.openxmlformats.org/drawingml/2006/main">
+            <a:pPr algn="l">
+              <a:defRPr sz="3000" b="1">
+                <a:solidFill>
+                  <a:srgbClr val="111111"/>
+                </a:solidFill>
+                <a:latin typeface="Helvetica Neue"/>
+                <a:ea typeface="Helvetica Neue"/>
+                <a:cs typeface="Helvetica Neue"/>
+              </a:defRPr>
+            </a:pPr>
+            <a:r>
+              <a:rPr sz="3000" b="1">
+                <a:solidFill>
+                  <a:srgbClr val="111111"/>
+                </a:solidFill>
+                <a:latin typeface="Helvetica Neue"/>
+                <a:ea typeface="Helvetica Neue"/>
+                <a:cs typeface="Helvetica Neue"/>
+              </a:rPr>
+              <a:t>Evidence to submit</a:t>
+            </a:r>
+          </a:p>
+        </p:txBody>
+      </p:sp>
+      <p:sp>
+        <p:nvSpPr>
+          <p:cNvPr id="6" name="practice-task">
+            <a:extLst xmlns:a="http://schemas.openxmlformats.org/drawingml/2006/main">
+              <a:ext uri="{FF2B5EF4-FFF2-40B4-BE49-F238E27FC236}">
+                <a16:creationId xmlns:a16="http://schemas.microsoft.com/office/drawing/2014/main" id="{CDFD40B5-DAA6-457E-BFBE-2EC2E7C26F30}"/>
+              </a:ext>
+            </a:extLst>
+          </p:cNvPr>
+          <p:cNvSpPr>
+            <a:spLocks xmlns:a="http://schemas.openxmlformats.org/drawingml/2006/main" noGrp="1"/>
+          </p:cNvSpPr>
+          <p:nvPr/>
+        </p:nvSpPr>
+        <p:spPr>
+          <a:xfrm xmlns:a="http://schemas.openxmlformats.org/drawingml/2006/main">
+            <a:off x="390525" y="2000250"/>
+            <a:ext cx="10953750" cy="1238250"/>
+          </a:xfrm>
+          <a:prstGeom xmlns:a="http://schemas.openxmlformats.org/drawingml/2006/main" prst="rect">
+            <a:avLst/>
+          </a:prstGeom>
+          <a:noFill xmlns:a="http://schemas.openxmlformats.org/drawingml/2006/main"/>
+          <a:ln xmlns:a="http://schemas.openxmlformats.org/drawingml/2006/main" w="0">
+            <a:noFill/>
+            <a:prstDash val="solid"/>
+          </a:ln>
+        </p:spPr>
+        <p:txBody>
+          <a:bodyPr xmlns:a="http://schemas.openxmlformats.org/drawingml/2006/main" anchor="t">
+            <a:normAutofit fontScale="100000"/>
+          </a:bodyPr>
+          <a:lstStyle xmlns:a="http://schemas.openxmlformats.org/drawingml/2006/main"/>
+          <a:p xmlns:a="http://schemas.openxmlformats.org/drawingml/2006/main">
+            <a:pPr algn="l">
+              <a:defRPr sz="1950" b="0">
+                <a:solidFill>
+                  <a:srgbClr val="111111"/>
+                </a:solidFill>
+                <a:latin typeface="Helvetica Neue"/>
+                <a:ea typeface="Helvetica Neue"/>
+                <a:cs typeface="Helvetica Neue"/>
+              </a:defRPr>
+            </a:pPr>
+            <a:r>
+              <a:rPr sz="1950" b="0">
+                <a:solidFill>
+                  <a:srgbClr val="111111"/>
+                </a:solidFill>
+                <a:latin typeface="Helvetica Neue"/>
+                <a:ea typeface="Helvetica Neue"/>
+                <a:cs typeface="Helvetica Neue"/>
+              </a:rPr>
+              <a:t>Complete Lab 7. Compare a single agent, an objective reviewer, and an optional model reviewer. Add one case where every role sees the same misleading cue.</a:t>
+            </a:r>
+          </a:p>
+        </p:txBody>
+      </p:sp>
+      <p:sp>
+        <p:nvSpPr>
+          <p:cNvPr id="7" name="practice-check">
+            <a:extLst xmlns:a="http://schemas.openxmlformats.org/drawingml/2006/main">
+              <a:ext uri="{FF2B5EF4-FFF2-40B4-BE49-F238E27FC236}">
+                <a16:creationId xmlns:a16="http://schemas.microsoft.com/office/drawing/2014/main" id="{8B0FCDA0-5115-4DC0-B4FA-E230FD46AAE8}"/>
+              </a:ext>
+            </a:extLst>
+          </p:cNvPr>
+          <p:cNvSpPr>
+            <a:spLocks xmlns:a="http://schemas.openxmlformats.org/drawingml/2006/main" noGrp="1"/>
+          </p:cNvSpPr>
+          <p:nvPr/>
+        </p:nvSpPr>
+        <p:spPr>
+          <a:xfrm xmlns:a="http://schemas.openxmlformats.org/drawingml/2006/main">
+            <a:off x="390525" y="3381375"/>
+            <a:ext cx="10953750" cy="1095375"/>
+          </a:xfrm>
+          <a:prstGeom xmlns:a="http://schemas.openxmlformats.org/drawingml/2006/main" prst="rect">
+            <a:avLst/>
+          </a:prstGeom>
+          <a:noFill xmlns:a="http://schemas.openxmlformats.org/drawingml/2006/main"/>
+          <a:ln xmlns:a="http://schemas.openxmlformats.org/drawingml/2006/main" w="0">
+            <a:noFill/>
+            <a:prstDash val="solid"/>
+          </a:ln>
+        </p:spPr>
+        <p:txBody>
+          <a:bodyPr xmlns:a="http://schemas.openxmlformats.org/drawingml/2006/main" anchor="t">
+            <a:normAutofit fontScale="100000"/>
+          </a:bodyPr>
+          <a:lstStyle xmlns:a="http://schemas.openxmlformats.org/drawingml/2006/main"/>
+          <a:p xmlns:a="http://schemas.openxmlformats.org/drawingml/2006/main">
+            <a:pPr algn="l">
+              <a:defRPr sz="1800" b="0">
+                <a:solidFill>
+                  <a:srgbClr val="5B5B57"/>
+                </a:solidFill>
+                <a:latin typeface="Helvetica Neue"/>
+                <a:ea typeface="Helvetica Neue"/>
+                <a:cs typeface="Helvetica Neue"/>
+              </a:defRPr>
+            </a:pPr>
+            <a:r>
+              <a:rPr sz="1800" b="0">
+                <a:solidFill>
+                  <a:srgbClr val="5B5B57"/>
+                </a:solidFill>
+                <a:latin typeface="Helvetica Neue"/>
+                <a:ea typeface="Helvetica Neue"/>
+                <a:cs typeface="Helvetica Neue"/>
+              </a:rPr>
+              <a:t>Report extra requests and shared errors. Explain any scope or information advantage before comparing outcomes.</a:t>
+            </a:r>
+          </a:p>
+        </p:txBody>
+      </p:sp>
+      <p:sp>
+        <p:nvSpPr>
+          <p:cNvPr id="8" name="practice-readings">
+            <a:extLst xmlns:a="http://schemas.openxmlformats.org/drawingml/2006/main">
+              <a:ext uri="{FF2B5EF4-FFF2-40B4-BE49-F238E27FC236}">
+                <a16:creationId xmlns:a16="http://schemas.microsoft.com/office/drawing/2014/main" id="{AEDFC4B3-E360-4A64-8C6B-448DB292D269}"/>
+              </a:ext>
+            </a:extLst>
+          </p:cNvPr>
+          <p:cNvSpPr>
+            <a:spLocks xmlns:a="http://schemas.openxmlformats.org/drawingml/2006/main" noGrp="1"/>
+          </p:cNvSpPr>
+          <p:nvPr/>
+        </p:nvSpPr>
+        <p:spPr>
+          <a:xfrm xmlns:a="http://schemas.openxmlformats.org/drawingml/2006/main">
+            <a:off x="390525" y="4667250"/>
+            <a:ext cx="10953750" cy="1000125"/>
+          </a:xfrm>
+          <a:prstGeom xmlns:a="http://schemas.openxmlformats.org/drawingml/2006/main" prst="rect">
+            <a:avLst/>
+          </a:prstGeom>
+          <a:noFill xmlns:a="http://schemas.openxmlformats.org/drawingml/2006/main"/>
+          <a:ln xmlns:a="http://schemas.openxmlformats.org/drawingml/2006/main" w="0">
+            <a:noFill/>
+            <a:prstDash val="solid"/>
+          </a:ln>
+        </p:spPr>
+        <p:txBody>
+          <a:bodyPr xmlns:a="http://schemas.openxmlformats.org/drawingml/2006/main" anchor="t">
+            <a:normAutofit fontScale="100000"/>
+          </a:bodyPr>
+          <a:lstStyle xmlns:a="http://schemas.openxmlformats.org/drawingml/2006/main"/>
+          <a:p xmlns:a="http://schemas.openxmlformats.org/drawingml/2006/main">
+            <a:pPr algn="l">
+              <a:defRPr sz="1425" b="0">
+                <a:solidFill>
+                  <a:srgbClr val="111111"/>
+                </a:solidFill>
+                <a:latin typeface="Helvetica Neue"/>
+                <a:ea typeface="Helvetica Neue"/>
+                <a:cs typeface="Helvetica Neue"/>
+              </a:defRPr>
+            </a:pPr>
+            <a:r>
+              <a:rPr sz="1425" b="0">
+                <a:solidFill>
+                  <a:srgbClr val="111111"/>
+                </a:solidFill>
+                <a:latin typeface="Helvetica Neue"/>
+                <a:ea typeface="Helvetica Neue"/>
+                <a:cs typeface="Helvetica Neue"/>
+              </a:rPr>
+              <a:t>R1  Patterns and problems in emerging multiagent systems</a:t>
+            </a:r>
+          </a:p>
+          <a:p xmlns:a="http://schemas.openxmlformats.org/drawingml/2006/main">
+            <a:pPr algn="l">
+              <a:defRPr sz="1425" b="0">
+                <a:solidFill>
+                  <a:srgbClr val="111111"/>
+                </a:solidFill>
+                <a:latin typeface="Helvetica Neue"/>
+                <a:ea typeface="Helvetica Neue"/>
+                <a:cs typeface="Helvetica Neue"/>
+              </a:defRPr>
+            </a:pPr>
+            <a:r>
+              <a:rPr sz="1425" b="0">
+                <a:solidFill>
+                  <a:srgbClr val="111111"/>
+                </a:solidFill>
+                <a:latin typeface="Helvetica Neue"/>
+                <a:ea typeface="Helvetica Neue"/>
+                <a:cs typeface="Helvetica Neue"/>
+              </a:rPr>
+              <a:t>S2  OpenAI Agents SDK model integration</a:t>
+            </a:r>
+          </a:p>
+        </p:txBody>
+      </p:sp>
+      <p:sp>
+        <p:nvSpPr>
+          <p:cNvPr id="9" name="practice-lab">
+            <a:extLst xmlns:a="http://schemas.openxmlformats.org/drawingml/2006/main">
+              <a:ext uri="{FF2B5EF4-FFF2-40B4-BE49-F238E27FC236}">
+                <a16:creationId xmlns:a16="http://schemas.microsoft.com/office/drawing/2014/main" id="{084E78F8-C9F8-46B9-8FF2-EC572C104D5C}"/>
+              </a:ext>
+            </a:extLst>
+          </p:cNvPr>
+          <p:cNvSpPr>
+            <a:spLocks xmlns:a="http://schemas.openxmlformats.org/drawingml/2006/main" noGrp="1"/>
+          </p:cNvSpPr>
+          <p:nvPr/>
+        </p:nvSpPr>
+        <p:spPr>
+          <a:xfrm xmlns:a="http://schemas.openxmlformats.org/drawingml/2006/main">
+            <a:off x="390525" y="5857875"/>
+            <a:ext cx="10953750" cy="266700"/>
+          </a:xfrm>
+          <a:prstGeom xmlns:a="http://schemas.openxmlformats.org/drawingml/2006/main" prst="rect">
+            <a:avLst/>
+          </a:prstGeom>
+          <a:noFill xmlns:a="http://schemas.openxmlformats.org/drawingml/2006/main"/>
+          <a:ln xmlns:a="http://schemas.openxmlformats.org/drawingml/2006/main" w="0">
+            <a:noFill/>
+            <a:prstDash val="solid"/>
+          </a:ln>
+        </p:spPr>
+        <p:txBody>
+          <a:bodyPr xmlns:a="http://schemas.openxmlformats.org/drawingml/2006/main" anchor="t">
+            <a:normAutofit fontScale="90196"/>
+          </a:bodyPr>
+          <a:lstStyle xmlns:a="http://schemas.openxmlformats.org/drawingml/2006/main"/>
+          <a:p xmlns:a="http://schemas.openxmlformats.org/drawingml/2006/main">
+            <a:pPr algn="l">
+              <a:defRPr sz="1275" b="0">
+                <a:solidFill>
+                  <a:srgbClr val="5B5B57"/>
+                </a:solidFill>
+                <a:latin typeface="Helvetica Neue"/>
+                <a:ea typeface="Helvetica Neue"/>
+                <a:cs typeface="Helvetica Neue"/>
+              </a:defRPr>
+            </a:pPr>
+            <a:r>
+              <a:rPr sz="1275" b="0">
+                <a:solidFill>
+                  <a:srgbClr val="5B5B57"/>
+                </a:solidFill>
+                <a:latin typeface="Helvetica Neue"/>
+                <a:ea typeface="Helvetica Neue"/>
+                <a:cs typeface="Helvetica Neue"/>
+              </a:rPr>
+              <a:t>labs/07_agents_sdk_evaluation.ipynb</a:t>
+            </a:r>
+          </a:p>
+        </p:txBody>
+      </p:sp>
+    </p:spTree>
+    <p:extLst>
+      <p:ext uri="{BB962C8B-B14F-4D97-AF65-F5344CB8AC3E}">
+        <p14:creationId xmlns:p14="http://schemas.microsoft.com/office/powerpoint/2010/main" val="723978925"/>
       </p:ext>
     </p:extLst>
   </p:cSld>
@@ -3016,7 +5267,7 @@
           <p:cNvPr id="14" name="accent-line">
             <a:extLst xmlns:a="http://schemas.openxmlformats.org/drawingml/2006/main">
               <a:ext uri="{FF2B5EF4-FFF2-40B4-BE49-F238E27FC236}">
-                <a16:creationId xmlns:a16="http://schemas.microsoft.com/office/drawing/2014/main" id="{DA2B34C9-00DB-445C-BF92-A68FCB2DCFA1}"/>
+                <a16:creationId xmlns:a16="http://schemas.microsoft.com/office/drawing/2014/main" id="{656AF2A5-F568-45E1-9C0E-1738EDAD9493}"/>
               </a:ext>
             </a:extLst>
           </p:cNvPr>
@@ -3049,7 +5300,7 @@
           <p:cNvPr id="2" name="chapter-label">
             <a:extLst xmlns:a="http://schemas.openxmlformats.org/drawingml/2006/main">
               <a:ext uri="{FF2B5EF4-FFF2-40B4-BE49-F238E27FC236}">
-                <a16:creationId xmlns:a16="http://schemas.microsoft.com/office/drawing/2014/main" id="{C018C905-FBBB-4172-B06E-6F8E7978480B}"/>
+                <a16:creationId xmlns:a16="http://schemas.microsoft.com/office/drawing/2014/main" id="{90A549BB-F78B-4B2E-A58B-3EDB33A23BBD}"/>
               </a:ext>
             </a:extLst>
           </p:cNvPr>
@@ -3107,7 +5358,7 @@
           <p:cNvPr id="3" name="slide-number">
             <a:extLst xmlns:a="http://schemas.openxmlformats.org/drawingml/2006/main">
               <a:ext uri="{FF2B5EF4-FFF2-40B4-BE49-F238E27FC236}">
-                <a16:creationId xmlns:a16="http://schemas.microsoft.com/office/drawing/2014/main" id="{C2AF185E-3F8A-4D94-B575-7FD86CD5718C}"/>
+                <a16:creationId xmlns:a16="http://schemas.microsoft.com/office/drawing/2014/main" id="{D004580A-5259-4803-B2DC-CEE89391A23C}"/>
               </a:ext>
             </a:extLst>
           </p:cNvPr>
@@ -3165,7 +5416,7 @@
           <p:cNvPr id="4" name="chapter-footer">
             <a:extLst xmlns:a="http://schemas.openxmlformats.org/drawingml/2006/main">
               <a:ext uri="{FF2B5EF4-FFF2-40B4-BE49-F238E27FC236}">
-                <a16:creationId xmlns:a16="http://schemas.microsoft.com/office/drawing/2014/main" id="{2DA95E04-D1CB-40C9-8CD8-F93AAE60AEA4}"/>
+                <a16:creationId xmlns:a16="http://schemas.microsoft.com/office/drawing/2014/main" id="{E01B773B-9E9D-4E3F-840E-45E9539FB7EB}"/>
               </a:ext>
             </a:extLst>
           </p:cNvPr>
@@ -3223,7 +5474,7 @@
           <p:cNvPr id="5" name="objectives-title">
             <a:extLst xmlns:a="http://schemas.openxmlformats.org/drawingml/2006/main">
               <a:ext uri="{FF2B5EF4-FFF2-40B4-BE49-F238E27FC236}">
-                <a16:creationId xmlns:a16="http://schemas.microsoft.com/office/drawing/2014/main" id="{8D668344-8C34-483A-BA72-908859F8ADB7}"/>
+                <a16:creationId xmlns:a16="http://schemas.microsoft.com/office/drawing/2014/main" id="{59632A6D-446A-4F5B-8460-B188DF32E2DD}"/>
               </a:ext>
             </a:extLst>
           </p:cNvPr>
@@ -3281,7 +5532,7 @@
           <p:cNvPr id="6" name="objective-number-1">
             <a:extLst xmlns:a="http://schemas.openxmlformats.org/drawingml/2006/main">
               <a:ext uri="{FF2B5EF4-FFF2-40B4-BE49-F238E27FC236}">
-                <a16:creationId xmlns:a16="http://schemas.microsoft.com/office/drawing/2014/main" id="{C327C0BC-E320-4E70-A182-491F805C1B26}"/>
+                <a16:creationId xmlns:a16="http://schemas.microsoft.com/office/drawing/2014/main" id="{BE7AB2DD-35E1-4AFA-B473-6B9FE28ED69A}"/>
               </a:ext>
             </a:extLst>
           </p:cNvPr>
@@ -3339,7 +5590,7 @@
           <p:cNvPr id="7" name="objective-1">
             <a:extLst xmlns:a="http://schemas.openxmlformats.org/drawingml/2006/main">
               <a:ext uri="{FF2B5EF4-FFF2-40B4-BE49-F238E27FC236}">
-                <a16:creationId xmlns:a16="http://schemas.microsoft.com/office/drawing/2014/main" id="{C090E7A9-0798-46BF-9841-4ED0E7962E3B}"/>
+                <a16:creationId xmlns:a16="http://schemas.microsoft.com/office/drawing/2014/main" id="{8725CE3F-B0F5-438E-828F-95EE13E7A446}"/>
               </a:ext>
             </a:extLst>
           </p:cNvPr>
@@ -3397,7 +5648,7 @@
           <p:cNvPr id="8" name="objective-number-2">
             <a:extLst xmlns:a="http://schemas.openxmlformats.org/drawingml/2006/main">
               <a:ext uri="{FF2B5EF4-FFF2-40B4-BE49-F238E27FC236}">
-                <a16:creationId xmlns:a16="http://schemas.microsoft.com/office/drawing/2014/main" id="{70E3BA52-D703-4C49-A14C-6751267B333F}"/>
+                <a16:creationId xmlns:a16="http://schemas.microsoft.com/office/drawing/2014/main" id="{B3530C0A-F838-4332-92B2-6862C001820C}"/>
               </a:ext>
             </a:extLst>
           </p:cNvPr>
@@ -3455,7 +5706,7 @@
           <p:cNvPr id="9" name="objective-2">
             <a:extLst xmlns:a="http://schemas.openxmlformats.org/drawingml/2006/main">
               <a:ext uri="{FF2B5EF4-FFF2-40B4-BE49-F238E27FC236}">
-                <a16:creationId xmlns:a16="http://schemas.microsoft.com/office/drawing/2014/main" id="{14622154-A4B6-4A66-AE0D-5C5811B5660F}"/>
+                <a16:creationId xmlns:a16="http://schemas.microsoft.com/office/drawing/2014/main" id="{7E05762A-0D91-4CC1-88B2-45DA671AFB4B}"/>
               </a:ext>
             </a:extLst>
           </p:cNvPr>
@@ -3513,7 +5764,7 @@
           <p:cNvPr id="10" name="objective-number-3">
             <a:extLst xmlns:a="http://schemas.openxmlformats.org/drawingml/2006/main">
               <a:ext uri="{FF2B5EF4-FFF2-40B4-BE49-F238E27FC236}">
-                <a16:creationId xmlns:a16="http://schemas.microsoft.com/office/drawing/2014/main" id="{1719B23D-DD68-499D-BEA0-26C591DD078B}"/>
+                <a16:creationId xmlns:a16="http://schemas.microsoft.com/office/drawing/2014/main" id="{45BDB1F6-FE8E-4E93-9644-1E2AE2359474}"/>
               </a:ext>
             </a:extLst>
           </p:cNvPr>
@@ -3571,7 +5822,7 @@
           <p:cNvPr id="11" name="objective-3">
             <a:extLst xmlns:a="http://schemas.openxmlformats.org/drawingml/2006/main">
               <a:ext uri="{FF2B5EF4-FFF2-40B4-BE49-F238E27FC236}">
-                <a16:creationId xmlns:a16="http://schemas.microsoft.com/office/drawing/2014/main" id="{6EC6343D-BD2B-436D-A378-8248461C0769}"/>
+                <a16:creationId xmlns:a16="http://schemas.microsoft.com/office/drawing/2014/main" id="{8EE5C770-A01A-41A2-B53F-7360EE3F7911}"/>
               </a:ext>
             </a:extLst>
           </p:cNvPr>
@@ -3629,7 +5880,7 @@
           <p:cNvPr id="12" name="objective-number-4">
             <a:extLst xmlns:a="http://schemas.openxmlformats.org/drawingml/2006/main">
               <a:ext uri="{FF2B5EF4-FFF2-40B4-BE49-F238E27FC236}">
-                <a16:creationId xmlns:a16="http://schemas.microsoft.com/office/drawing/2014/main" id="{7BC33D0D-D46F-45D9-8629-D69FB6D11B51}"/>
+                <a16:creationId xmlns:a16="http://schemas.microsoft.com/office/drawing/2014/main" id="{6EC55A1A-E7A0-4D90-81E7-C290F3268743}"/>
               </a:ext>
             </a:extLst>
           </p:cNvPr>
@@ -3687,7 +5938,7 @@
           <p:cNvPr id="13" name="objective-4">
             <a:extLst xmlns:a="http://schemas.openxmlformats.org/drawingml/2006/main">
               <a:ext uri="{FF2B5EF4-FFF2-40B4-BE49-F238E27FC236}">
-                <a16:creationId xmlns:a16="http://schemas.microsoft.com/office/drawing/2014/main" id="{6191C1D6-7753-4B68-BBD5-A5C503E8E127}"/>
+                <a16:creationId xmlns:a16="http://schemas.microsoft.com/office/drawing/2014/main" id="{6E3F60EC-9F09-40C2-AAD4-157926AC00D0}"/>
               </a:ext>
             </a:extLst>
           </p:cNvPr>
@@ -3743,7 +5994,7 @@
     </p:spTree>
     <p:extLst>
       <p:ext uri="{BB962C8B-B14F-4D97-AF65-F5344CB8AC3E}">
-        <p14:creationId xmlns:p14="http://schemas.microsoft.com/office/powerpoint/2010/main" val="1180381386"/>
+        <p14:creationId xmlns:p14="http://schemas.microsoft.com/office/powerpoint/2010/main" val="1801303543"/>
       </p:ext>
     </p:extLst>
   </p:cSld>
@@ -3774,7 +6025,7 @@
           <p:cNvPr id="9" name="accent-line">
             <a:extLst xmlns:a="http://schemas.openxmlformats.org/drawingml/2006/main">
               <a:ext uri="{FF2B5EF4-FFF2-40B4-BE49-F238E27FC236}">
-                <a16:creationId xmlns:a16="http://schemas.microsoft.com/office/drawing/2014/main" id="{A65FB0A0-BD08-4A4E-B05F-6E0EF7F1ED47}"/>
+                <a16:creationId xmlns:a16="http://schemas.microsoft.com/office/drawing/2014/main" id="{B1826F75-9422-415B-B83C-58D13BE7C5CF}"/>
               </a:ext>
             </a:extLst>
           </p:cNvPr>
@@ -3807,7 +6058,7 @@
           <p:cNvPr id="2" name="chapter-label">
             <a:extLst xmlns:a="http://schemas.openxmlformats.org/drawingml/2006/main">
               <a:ext uri="{FF2B5EF4-FFF2-40B4-BE49-F238E27FC236}">
-                <a16:creationId xmlns:a16="http://schemas.microsoft.com/office/drawing/2014/main" id="{05767FF9-7AE0-4956-A71D-42391F2418BF}"/>
+                <a16:creationId xmlns:a16="http://schemas.microsoft.com/office/drawing/2014/main" id="{19F7ACBE-8A1D-4102-A389-7EB50AC550D1}"/>
               </a:ext>
             </a:extLst>
           </p:cNvPr>
@@ -3865,7 +6116,7 @@
           <p:cNvPr id="3" name="slide-number">
             <a:extLst xmlns:a="http://schemas.openxmlformats.org/drawingml/2006/main">
               <a:ext uri="{FF2B5EF4-FFF2-40B4-BE49-F238E27FC236}">
-                <a16:creationId xmlns:a16="http://schemas.microsoft.com/office/drawing/2014/main" id="{3A8F7468-0553-404E-B9C5-3A3A76656624}"/>
+                <a16:creationId xmlns:a16="http://schemas.microsoft.com/office/drawing/2014/main" id="{0E51C8CF-68D1-40C9-BC1E-7720F21C8ECA}"/>
               </a:ext>
             </a:extLst>
           </p:cNvPr>
@@ -3923,7 +6174,7 @@
           <p:cNvPr id="4" name="chapter-footer">
             <a:extLst xmlns:a="http://schemas.openxmlformats.org/drawingml/2006/main">
               <a:ext uri="{FF2B5EF4-FFF2-40B4-BE49-F238E27FC236}">
-                <a16:creationId xmlns:a16="http://schemas.microsoft.com/office/drawing/2014/main" id="{DBF16143-891F-4F2C-BFAF-58D195375185}"/>
+                <a16:creationId xmlns:a16="http://schemas.microsoft.com/office/drawing/2014/main" id="{C9940D03-DA14-464B-8760-C4E480B8F1A6}"/>
               </a:ext>
             </a:extLst>
           </p:cNvPr>
@@ -3981,7 +6232,7 @@
           <p:cNvPr id="5" name="section-title">
             <a:extLst xmlns:a="http://schemas.openxmlformats.org/drawingml/2006/main">
               <a:ext uri="{FF2B5EF4-FFF2-40B4-BE49-F238E27FC236}">
-                <a16:creationId xmlns:a16="http://schemas.microsoft.com/office/drawing/2014/main" id="{60F33371-1592-4BA7-AD7C-54830CF122A1}"/>
+                <a16:creationId xmlns:a16="http://schemas.microsoft.com/office/drawing/2014/main" id="{D81E7ACF-2710-4194-AA0F-D933002A8A17}"/>
               </a:ext>
             </a:extLst>
           </p:cNvPr>
@@ -4039,7 +6290,7 @@
           <p:cNvPr id="6" name="section-explanation">
             <a:extLst xmlns:a="http://schemas.openxmlformats.org/drawingml/2006/main">
               <a:ext uri="{FF2B5EF4-FFF2-40B4-BE49-F238E27FC236}">
-                <a16:creationId xmlns:a16="http://schemas.microsoft.com/office/drawing/2014/main" id="{7BAB098E-1161-44A6-9C6F-BED2A0799240}"/>
+                <a16:creationId xmlns:a16="http://schemas.microsoft.com/office/drawing/2014/main" id="{64F6F324-A819-4281-BACF-C7ED541A0591}"/>
               </a:ext>
             </a:extLst>
           </p:cNvPr>
@@ -4097,7 +6348,7 @@
           <p:cNvPr id="7" name="column-rule">
             <a:extLst xmlns:a="http://schemas.openxmlformats.org/drawingml/2006/main">
               <a:ext uri="{FF2B5EF4-FFF2-40B4-BE49-F238E27FC236}">
-                <a16:creationId xmlns:a16="http://schemas.microsoft.com/office/drawing/2014/main" id="{82C9790A-725A-4D98-974D-2BA8357AE586}"/>
+                <a16:creationId xmlns:a16="http://schemas.microsoft.com/office/drawing/2014/main" id="{748BCEEE-4843-4913-908D-5D1001AC7F1B}"/>
               </a:ext>
             </a:extLst>
           </p:cNvPr>
@@ -4130,7 +6381,7 @@
           <p:cNvPr id="8" name="section-points">
             <a:extLst xmlns:a="http://schemas.openxmlformats.org/drawingml/2006/main">
               <a:ext uri="{FF2B5EF4-FFF2-40B4-BE49-F238E27FC236}">
-                <a16:creationId xmlns:a16="http://schemas.microsoft.com/office/drawing/2014/main" id="{6148D3F2-7975-4899-9EC0-0651F916AF35}"/>
+                <a16:creationId xmlns:a16="http://schemas.microsoft.com/office/drawing/2014/main" id="{997A37C0-DDA2-4E9A-816A-10ABFF89B553}"/>
               </a:ext>
             </a:extLst>
           </p:cNvPr>
@@ -4270,7 +6521,7 @@
     </p:spTree>
     <p:extLst>
       <p:ext uri="{BB962C8B-B14F-4D97-AF65-F5344CB8AC3E}">
-        <p14:creationId xmlns:p14="http://schemas.microsoft.com/office/powerpoint/2010/main" val="33171572"/>
+        <p14:creationId xmlns:p14="http://schemas.microsoft.com/office/powerpoint/2010/main" val="651118270"/>
       </p:ext>
     </p:extLst>
   </p:cSld>
@@ -4301,7 +6552,7 @@
           <p:cNvPr id="15" name="accent-line">
             <a:extLst xmlns:a="http://schemas.openxmlformats.org/drawingml/2006/main">
               <a:ext uri="{FF2B5EF4-FFF2-40B4-BE49-F238E27FC236}">
-                <a16:creationId xmlns:a16="http://schemas.microsoft.com/office/drawing/2014/main" id="{7822E272-8CF2-4214-8B24-83D06FF342C9}"/>
+                <a16:creationId xmlns:a16="http://schemas.microsoft.com/office/drawing/2014/main" id="{2A7477EE-32F1-4F79-9743-8F3BD50CA211}"/>
               </a:ext>
             </a:extLst>
           </p:cNvPr>
@@ -4334,7 +6585,7 @@
           <p:cNvPr id="2" name="chapter-label">
             <a:extLst xmlns:a="http://schemas.openxmlformats.org/drawingml/2006/main">
               <a:ext uri="{FF2B5EF4-FFF2-40B4-BE49-F238E27FC236}">
-                <a16:creationId xmlns:a16="http://schemas.microsoft.com/office/drawing/2014/main" id="{1CDCCDF6-9853-4E63-A3FA-0387F6E9B080}"/>
+                <a16:creationId xmlns:a16="http://schemas.microsoft.com/office/drawing/2014/main" id="{B4913774-2AD1-42B8-8CB3-59CB96542E69}"/>
               </a:ext>
             </a:extLst>
           </p:cNvPr>
@@ -4392,7 +6643,7 @@
           <p:cNvPr id="3" name="slide-number">
             <a:extLst xmlns:a="http://schemas.openxmlformats.org/drawingml/2006/main">
               <a:ext uri="{FF2B5EF4-FFF2-40B4-BE49-F238E27FC236}">
-                <a16:creationId xmlns:a16="http://schemas.microsoft.com/office/drawing/2014/main" id="{0F2AB850-4F4C-4A50-8FA2-8547BA36659A}"/>
+                <a16:creationId xmlns:a16="http://schemas.microsoft.com/office/drawing/2014/main" id="{7F33D214-6755-4754-BE68-5CA1E5D93015}"/>
               </a:ext>
             </a:extLst>
           </p:cNvPr>
@@ -4450,7 +6701,7 @@
           <p:cNvPr id="4" name="chapter-footer">
             <a:extLst xmlns:a="http://schemas.openxmlformats.org/drawingml/2006/main">
               <a:ext uri="{FF2B5EF4-FFF2-40B4-BE49-F238E27FC236}">
-                <a16:creationId xmlns:a16="http://schemas.microsoft.com/office/drawing/2014/main" id="{07EAE772-8E4B-4DB9-AC52-CB7218C7F917}"/>
+                <a16:creationId xmlns:a16="http://schemas.microsoft.com/office/drawing/2014/main" id="{6FEAB430-3FD8-4247-9D3F-22668D6A71FD}"/>
               </a:ext>
             </a:extLst>
           </p:cNvPr>
@@ -4508,7 +6759,7 @@
           <p:cNvPr id="5" name="section-title">
             <a:extLst xmlns:a="http://schemas.openxmlformats.org/drawingml/2006/main">
               <a:ext uri="{FF2B5EF4-FFF2-40B4-BE49-F238E27FC236}">
-                <a16:creationId xmlns:a16="http://schemas.microsoft.com/office/drawing/2014/main" id="{A742D26F-E9BB-4BE2-A3C7-364DC24FDA69}"/>
+                <a16:creationId xmlns:a16="http://schemas.microsoft.com/office/drawing/2014/main" id="{5BAAB0A4-B582-4954-9693-7BE18E285857}"/>
               </a:ext>
             </a:extLst>
           </p:cNvPr>
@@ -4566,7 +6817,7 @@
           <p:cNvPr id="6" name="section-explanation">
             <a:extLst xmlns:a="http://schemas.openxmlformats.org/drawingml/2006/main">
               <a:ext uri="{FF2B5EF4-FFF2-40B4-BE49-F238E27FC236}">
-                <a16:creationId xmlns:a16="http://schemas.microsoft.com/office/drawing/2014/main" id="{A605CB5A-B8B8-41C3-9CC8-2732CC2BCAA6}"/>
+                <a16:creationId xmlns:a16="http://schemas.microsoft.com/office/drawing/2014/main" id="{47F68A3F-976D-48EB-BBF6-2BD6513DF4F5}"/>
               </a:ext>
             </a:extLst>
           </p:cNvPr>
@@ -4624,7 +6875,7 @@
           <p:cNvPr id="7" name="point-band-1">
             <a:extLst xmlns:a="http://schemas.openxmlformats.org/drawingml/2006/main">
               <a:ext uri="{FF2B5EF4-FFF2-40B4-BE49-F238E27FC236}">
-                <a16:creationId xmlns:a16="http://schemas.microsoft.com/office/drawing/2014/main" id="{3A8A3B2F-889B-416E-9A7F-0033BA719BC0}"/>
+                <a16:creationId xmlns:a16="http://schemas.microsoft.com/office/drawing/2014/main" id="{81BD4548-F212-4396-8C29-E88396255C6F}"/>
               </a:ext>
             </a:extLst>
           </p:cNvPr>
@@ -4657,7 +6908,7 @@
           <p:cNvPr id="8" name="point-1">
             <a:extLst xmlns:a="http://schemas.openxmlformats.org/drawingml/2006/main">
               <a:ext uri="{FF2B5EF4-FFF2-40B4-BE49-F238E27FC236}">
-                <a16:creationId xmlns:a16="http://schemas.microsoft.com/office/drawing/2014/main" id="{AA9A9233-D040-4169-A04C-1640839EA47E}"/>
+                <a16:creationId xmlns:a16="http://schemas.microsoft.com/office/drawing/2014/main" id="{88A0002E-E870-49F9-9D32-146969F07408}"/>
               </a:ext>
             </a:extLst>
           </p:cNvPr>
@@ -4715,7 +6966,7 @@
           <p:cNvPr id="9" name="point-band-2">
             <a:extLst xmlns:a="http://schemas.openxmlformats.org/drawingml/2006/main">
               <a:ext uri="{FF2B5EF4-FFF2-40B4-BE49-F238E27FC236}">
-                <a16:creationId xmlns:a16="http://schemas.microsoft.com/office/drawing/2014/main" id="{3607DAA8-FAE0-441C-9F63-8C10D1D9798A}"/>
+                <a16:creationId xmlns:a16="http://schemas.microsoft.com/office/drawing/2014/main" id="{54C746E7-0958-4D7A-8633-018EBD61A8F1}"/>
               </a:ext>
             </a:extLst>
           </p:cNvPr>
@@ -4748,7 +6999,7 @@
           <p:cNvPr id="10" name="point-2">
             <a:extLst xmlns:a="http://schemas.openxmlformats.org/drawingml/2006/main">
               <a:ext uri="{FF2B5EF4-FFF2-40B4-BE49-F238E27FC236}">
-                <a16:creationId xmlns:a16="http://schemas.microsoft.com/office/drawing/2014/main" id="{70B73C10-56DE-4CBD-85BF-17C65892C6E0}"/>
+                <a16:creationId xmlns:a16="http://schemas.microsoft.com/office/drawing/2014/main" id="{148CC490-CFEE-4C74-B6AD-1A28BB0E58D8}"/>
               </a:ext>
             </a:extLst>
           </p:cNvPr>
@@ -4806,7 +7057,7 @@
           <p:cNvPr id="11" name="point-band-3">
             <a:extLst xmlns:a="http://schemas.openxmlformats.org/drawingml/2006/main">
               <a:ext uri="{FF2B5EF4-FFF2-40B4-BE49-F238E27FC236}">
-                <a16:creationId xmlns:a16="http://schemas.microsoft.com/office/drawing/2014/main" id="{524CA32B-D99C-41EE-94A1-2A6DB429A206}"/>
+                <a16:creationId xmlns:a16="http://schemas.microsoft.com/office/drawing/2014/main" id="{A11E74C8-6A57-45E4-A669-9B32E00E0199}"/>
               </a:ext>
             </a:extLst>
           </p:cNvPr>
@@ -4839,7 +7090,7 @@
           <p:cNvPr id="12" name="point-3">
             <a:extLst xmlns:a="http://schemas.openxmlformats.org/drawingml/2006/main">
               <a:ext uri="{FF2B5EF4-FFF2-40B4-BE49-F238E27FC236}">
-                <a16:creationId xmlns:a16="http://schemas.microsoft.com/office/drawing/2014/main" id="{78A9AA3C-B99D-45E7-9CD5-3F6D396FECE6}"/>
+                <a16:creationId xmlns:a16="http://schemas.microsoft.com/office/drawing/2014/main" id="{1CC8CEDE-73A0-42FF-A4F6-767826DB7202}"/>
               </a:ext>
             </a:extLst>
           </p:cNvPr>
@@ -4897,7 +7148,7 @@
           <p:cNvPr id="13" name="point-band-4">
             <a:extLst xmlns:a="http://schemas.openxmlformats.org/drawingml/2006/main">
               <a:ext uri="{FF2B5EF4-FFF2-40B4-BE49-F238E27FC236}">
-                <a16:creationId xmlns:a16="http://schemas.microsoft.com/office/drawing/2014/main" id="{7BF6ACEF-ED0C-44A3-AC49-DEBEA8A6E81B}"/>
+                <a16:creationId xmlns:a16="http://schemas.microsoft.com/office/drawing/2014/main" id="{6FF7E07E-8633-43A1-AB28-04331658605E}"/>
               </a:ext>
             </a:extLst>
           </p:cNvPr>
@@ -4930,7 +7181,7 @@
           <p:cNvPr id="14" name="point-4">
             <a:extLst xmlns:a="http://schemas.openxmlformats.org/drawingml/2006/main">
               <a:ext uri="{FF2B5EF4-FFF2-40B4-BE49-F238E27FC236}">
-                <a16:creationId xmlns:a16="http://schemas.microsoft.com/office/drawing/2014/main" id="{2A33520E-EAE2-4BC1-8E29-D2AADE5AD5AD}"/>
+                <a16:creationId xmlns:a16="http://schemas.microsoft.com/office/drawing/2014/main" id="{DC31745D-3FDC-4963-BB46-0DCD998D21E3}"/>
               </a:ext>
             </a:extLst>
           </p:cNvPr>
@@ -4986,7 +7237,7 @@
     </p:spTree>
     <p:extLst>
       <p:ext uri="{BB962C8B-B14F-4D97-AF65-F5344CB8AC3E}">
-        <p14:creationId xmlns:p14="http://schemas.microsoft.com/office/powerpoint/2010/main" val="1432055845"/>
+        <p14:creationId xmlns:p14="http://schemas.microsoft.com/office/powerpoint/2010/main" val="970130664"/>
       </p:ext>
     </p:extLst>
   </p:cSld>
@@ -5017,7 +7268,7 @@
           <p:cNvPr id="9" name="accent-line">
             <a:extLst xmlns:a="http://schemas.openxmlformats.org/drawingml/2006/main">
               <a:ext uri="{FF2B5EF4-FFF2-40B4-BE49-F238E27FC236}">
-                <a16:creationId xmlns:a16="http://schemas.microsoft.com/office/drawing/2014/main" id="{DAF2B93F-10F0-45D6-AB1A-CE79E8A9E9CE}"/>
+                <a16:creationId xmlns:a16="http://schemas.microsoft.com/office/drawing/2014/main" id="{23EA9AEB-8BBB-4C62-8A9B-85DCD2F78779}"/>
               </a:ext>
             </a:extLst>
           </p:cNvPr>
@@ -5050,7 +7301,7 @@
           <p:cNvPr id="2" name="chapter-label">
             <a:extLst xmlns:a="http://schemas.openxmlformats.org/drawingml/2006/main">
               <a:ext uri="{FF2B5EF4-FFF2-40B4-BE49-F238E27FC236}">
-                <a16:creationId xmlns:a16="http://schemas.microsoft.com/office/drawing/2014/main" id="{BBA18DE5-2F57-46A6-B10E-DF0775C459F0}"/>
+                <a16:creationId xmlns:a16="http://schemas.microsoft.com/office/drawing/2014/main" id="{FF606378-214E-479C-8E61-60C7B610710B}"/>
               </a:ext>
             </a:extLst>
           </p:cNvPr>
@@ -5108,7 +7359,7 @@
           <p:cNvPr id="3" name="slide-number">
             <a:extLst xmlns:a="http://schemas.openxmlformats.org/drawingml/2006/main">
               <a:ext uri="{FF2B5EF4-FFF2-40B4-BE49-F238E27FC236}">
-                <a16:creationId xmlns:a16="http://schemas.microsoft.com/office/drawing/2014/main" id="{CEF746DE-3772-4137-8A67-61C7B79B2C96}"/>
+                <a16:creationId xmlns:a16="http://schemas.microsoft.com/office/drawing/2014/main" id="{4E89263A-11F1-4401-896B-6EDC38421492}"/>
               </a:ext>
             </a:extLst>
           </p:cNvPr>
@@ -5166,7 +7417,7 @@
           <p:cNvPr id="4" name="chapter-footer">
             <a:extLst xmlns:a="http://schemas.openxmlformats.org/drawingml/2006/main">
               <a:ext uri="{FF2B5EF4-FFF2-40B4-BE49-F238E27FC236}">
-                <a16:creationId xmlns:a16="http://schemas.microsoft.com/office/drawing/2014/main" id="{F60EE44A-A178-4F14-A023-48E7AC306993}"/>
+                <a16:creationId xmlns:a16="http://schemas.microsoft.com/office/drawing/2014/main" id="{C69AD8C3-5F71-44B7-87D8-0704CEA5279E}"/>
               </a:ext>
             </a:extLst>
           </p:cNvPr>
@@ -5224,7 +7475,7 @@
           <p:cNvPr id="5" name="section-title">
             <a:extLst xmlns:a="http://schemas.openxmlformats.org/drawingml/2006/main">
               <a:ext uri="{FF2B5EF4-FFF2-40B4-BE49-F238E27FC236}">
-                <a16:creationId xmlns:a16="http://schemas.microsoft.com/office/drawing/2014/main" id="{861E036A-F407-4B69-9386-08EBB1B384D7}"/>
+                <a16:creationId xmlns:a16="http://schemas.microsoft.com/office/drawing/2014/main" id="{8DB44349-90D2-4BC0-80D1-8085304E2539}"/>
               </a:ext>
             </a:extLst>
           </p:cNvPr>
@@ -5282,7 +7533,7 @@
           <p:cNvPr id="6" name="section-explanation">
             <a:extLst xmlns:a="http://schemas.openxmlformats.org/drawingml/2006/main">
               <a:ext uri="{FF2B5EF4-FFF2-40B4-BE49-F238E27FC236}">
-                <a16:creationId xmlns:a16="http://schemas.microsoft.com/office/drawing/2014/main" id="{EACA9E23-699A-401F-B95E-32EABBC6819E}"/>
+                <a16:creationId xmlns:a16="http://schemas.microsoft.com/office/drawing/2014/main" id="{C9C17180-4093-4014-A3C5-BFDED46E100F}"/>
               </a:ext>
             </a:extLst>
           </p:cNvPr>
@@ -5340,7 +7591,7 @@
           <p:cNvPr id="7" name="column-rule">
             <a:extLst xmlns:a="http://schemas.openxmlformats.org/drawingml/2006/main">
               <a:ext uri="{FF2B5EF4-FFF2-40B4-BE49-F238E27FC236}">
-                <a16:creationId xmlns:a16="http://schemas.microsoft.com/office/drawing/2014/main" id="{E69EA70A-4FCC-4A89-973F-FF150977B8E7}"/>
+                <a16:creationId xmlns:a16="http://schemas.microsoft.com/office/drawing/2014/main" id="{8683AEBB-BD2D-47A3-BA6E-7E0500954ABB}"/>
               </a:ext>
             </a:extLst>
           </p:cNvPr>
@@ -5373,7 +7624,7 @@
           <p:cNvPr id="8" name="section-points">
             <a:extLst xmlns:a="http://schemas.openxmlformats.org/drawingml/2006/main">
               <a:ext uri="{FF2B5EF4-FFF2-40B4-BE49-F238E27FC236}">
-                <a16:creationId xmlns:a16="http://schemas.microsoft.com/office/drawing/2014/main" id="{D771BE13-EC50-4E54-B35E-4960910F07E9}"/>
+                <a16:creationId xmlns:a16="http://schemas.microsoft.com/office/drawing/2014/main" id="{69688233-1849-4666-904F-987F944DEA06}"/>
               </a:ext>
             </a:extLst>
           </p:cNvPr>
@@ -5513,7 +7764,7 @@
     </p:spTree>
     <p:extLst>
       <p:ext uri="{BB962C8B-B14F-4D97-AF65-F5344CB8AC3E}">
-        <p14:creationId xmlns:p14="http://schemas.microsoft.com/office/powerpoint/2010/main" val="1206576678"/>
+        <p14:creationId xmlns:p14="http://schemas.microsoft.com/office/powerpoint/2010/main" val="1290246311"/>
       </p:ext>
     </p:extLst>
   </p:cSld>
@@ -5544,7 +7795,7 @@
           <p:cNvPr id="13" name="accent-line">
             <a:extLst xmlns:a="http://schemas.openxmlformats.org/drawingml/2006/main">
               <a:ext uri="{FF2B5EF4-FFF2-40B4-BE49-F238E27FC236}">
-                <a16:creationId xmlns:a16="http://schemas.microsoft.com/office/drawing/2014/main" id="{74EBA63A-8EC2-4C89-8C75-20C97A3BA42A}"/>
+                <a16:creationId xmlns:a16="http://schemas.microsoft.com/office/drawing/2014/main" id="{37D463EA-0881-443C-80A0-BB05FA7FBFA5}"/>
               </a:ext>
             </a:extLst>
           </p:cNvPr>
@@ -5577,7 +7828,7 @@
           <p:cNvPr id="2" name="chapter-label">
             <a:extLst xmlns:a="http://schemas.openxmlformats.org/drawingml/2006/main">
               <a:ext uri="{FF2B5EF4-FFF2-40B4-BE49-F238E27FC236}">
-                <a16:creationId xmlns:a16="http://schemas.microsoft.com/office/drawing/2014/main" id="{3226DE08-FF15-4E4C-B312-12EBACA4FEFD}"/>
+                <a16:creationId xmlns:a16="http://schemas.microsoft.com/office/drawing/2014/main" id="{ECECB9BF-3D0D-4C4A-B05C-710E3F27160E}"/>
               </a:ext>
             </a:extLst>
           </p:cNvPr>
@@ -5635,7 +7886,7 @@
           <p:cNvPr id="3" name="slide-number">
             <a:extLst xmlns:a="http://schemas.openxmlformats.org/drawingml/2006/main">
               <a:ext uri="{FF2B5EF4-FFF2-40B4-BE49-F238E27FC236}">
-                <a16:creationId xmlns:a16="http://schemas.microsoft.com/office/drawing/2014/main" id="{2265785C-4EB4-4CDC-B9F0-81A2318D3098}"/>
+                <a16:creationId xmlns:a16="http://schemas.microsoft.com/office/drawing/2014/main" id="{7089E732-CB6A-494E-AD01-CC5541C57D5C}"/>
               </a:ext>
             </a:extLst>
           </p:cNvPr>
@@ -5693,7 +7944,7 @@
           <p:cNvPr id="4" name="chapter-footer">
             <a:extLst xmlns:a="http://schemas.openxmlformats.org/drawingml/2006/main">
               <a:ext uri="{FF2B5EF4-FFF2-40B4-BE49-F238E27FC236}">
-                <a16:creationId xmlns:a16="http://schemas.microsoft.com/office/drawing/2014/main" id="{D5257FE3-9172-4CF3-A28B-F778890BC9F4}"/>
+                <a16:creationId xmlns:a16="http://schemas.microsoft.com/office/drawing/2014/main" id="{BC2DF845-04AB-48B8-A882-02B957741238}"/>
               </a:ext>
             </a:extLst>
           </p:cNvPr>
@@ -5751,7 +8002,7 @@
           <p:cNvPr id="5" name="section-title">
             <a:extLst xmlns:a="http://schemas.openxmlformats.org/drawingml/2006/main">
               <a:ext uri="{FF2B5EF4-FFF2-40B4-BE49-F238E27FC236}">
-                <a16:creationId xmlns:a16="http://schemas.microsoft.com/office/drawing/2014/main" id="{28523407-C52F-425A-B64F-66D90AF87F29}"/>
+                <a16:creationId xmlns:a16="http://schemas.microsoft.com/office/drawing/2014/main" id="{D96ACDF6-87B9-4E35-80B6-E1C1705F6614}"/>
               </a:ext>
             </a:extLst>
           </p:cNvPr>
@@ -5809,7 +8060,7 @@
           <p:cNvPr id="6" name="section-explanation">
             <a:extLst xmlns:a="http://schemas.openxmlformats.org/drawingml/2006/main">
               <a:ext uri="{FF2B5EF4-FFF2-40B4-BE49-F238E27FC236}">
-                <a16:creationId xmlns:a16="http://schemas.microsoft.com/office/drawing/2014/main" id="{AED6454B-B603-4C1E-ABCB-FE092CF510EA}"/>
+                <a16:creationId xmlns:a16="http://schemas.microsoft.com/office/drawing/2014/main" id="{60EBFAB6-AB1D-4FFC-AB58-A724EF7920E7}"/>
               </a:ext>
             </a:extLst>
           </p:cNvPr>
@@ -5867,7 +8118,7 @@
           <p:cNvPr id="7" name="point-band-1">
             <a:extLst xmlns:a="http://schemas.openxmlformats.org/drawingml/2006/main">
               <a:ext uri="{FF2B5EF4-FFF2-40B4-BE49-F238E27FC236}">
-                <a16:creationId xmlns:a16="http://schemas.microsoft.com/office/drawing/2014/main" id="{B8235946-1137-4692-AFEC-5CA48E698737}"/>
+                <a16:creationId xmlns:a16="http://schemas.microsoft.com/office/drawing/2014/main" id="{7CE58FEF-4C8A-4939-B820-0E23FB36EB78}"/>
               </a:ext>
             </a:extLst>
           </p:cNvPr>
@@ -5900,7 +8151,7 @@
           <p:cNvPr id="8" name="point-1">
             <a:extLst xmlns:a="http://schemas.openxmlformats.org/drawingml/2006/main">
               <a:ext uri="{FF2B5EF4-FFF2-40B4-BE49-F238E27FC236}">
-                <a16:creationId xmlns:a16="http://schemas.microsoft.com/office/drawing/2014/main" id="{D6255B9D-85BC-442F-B95C-C9D04CD222CB}"/>
+                <a16:creationId xmlns:a16="http://schemas.microsoft.com/office/drawing/2014/main" id="{278E3853-D5C0-45C8-BD06-25F906A12654}"/>
               </a:ext>
             </a:extLst>
           </p:cNvPr>
@@ -5958,7 +8209,7 @@
           <p:cNvPr id="9" name="point-band-2">
             <a:extLst xmlns:a="http://schemas.openxmlformats.org/drawingml/2006/main">
               <a:ext uri="{FF2B5EF4-FFF2-40B4-BE49-F238E27FC236}">
-                <a16:creationId xmlns:a16="http://schemas.microsoft.com/office/drawing/2014/main" id="{AEDF034C-8ECB-41D8-B35F-152457E3428F}"/>
+                <a16:creationId xmlns:a16="http://schemas.microsoft.com/office/drawing/2014/main" id="{0CA2F327-3532-4C61-9E87-3D2430E78BBD}"/>
               </a:ext>
             </a:extLst>
           </p:cNvPr>
@@ -5991,7 +8242,7 @@
           <p:cNvPr id="10" name="point-2">
             <a:extLst xmlns:a="http://schemas.openxmlformats.org/drawingml/2006/main">
               <a:ext uri="{FF2B5EF4-FFF2-40B4-BE49-F238E27FC236}">
-                <a16:creationId xmlns:a16="http://schemas.microsoft.com/office/drawing/2014/main" id="{FDAA4EDA-4D58-4059-9CAA-73052B2B3CDC}"/>
+                <a16:creationId xmlns:a16="http://schemas.microsoft.com/office/drawing/2014/main" id="{DA4C8234-76FF-46C4-8811-F031274AE384}"/>
               </a:ext>
             </a:extLst>
           </p:cNvPr>
@@ -6049,7 +8300,7 @@
           <p:cNvPr id="11" name="point-band-3">
             <a:extLst xmlns:a="http://schemas.openxmlformats.org/drawingml/2006/main">
               <a:ext uri="{FF2B5EF4-FFF2-40B4-BE49-F238E27FC236}">
-                <a16:creationId xmlns:a16="http://schemas.microsoft.com/office/drawing/2014/main" id="{EC5289D8-7F78-4ACB-A41E-E8A088ED1493}"/>
+                <a16:creationId xmlns:a16="http://schemas.microsoft.com/office/drawing/2014/main" id="{F331C5E6-7EE1-4A55-9E0D-F8B5079A2245}"/>
               </a:ext>
             </a:extLst>
           </p:cNvPr>
@@ -6082,7 +8333,7 @@
           <p:cNvPr id="12" name="point-3">
             <a:extLst xmlns:a="http://schemas.openxmlformats.org/drawingml/2006/main">
               <a:ext uri="{FF2B5EF4-FFF2-40B4-BE49-F238E27FC236}">
-                <a16:creationId xmlns:a16="http://schemas.microsoft.com/office/drawing/2014/main" id="{9A6B01AC-BF2D-498F-9A13-0AB1DC119EE4}"/>
+                <a16:creationId xmlns:a16="http://schemas.microsoft.com/office/drawing/2014/main" id="{8EE4254F-6898-4D93-9070-F8019A5E51C9}"/>
               </a:ext>
             </a:extLst>
           </p:cNvPr>
@@ -6138,7 +8389,7 @@
     </p:spTree>
     <p:extLst>
       <p:ext uri="{BB962C8B-B14F-4D97-AF65-F5344CB8AC3E}">
-        <p14:creationId xmlns:p14="http://schemas.microsoft.com/office/powerpoint/2010/main" val="599060065"/>
+        <p14:creationId xmlns:p14="http://schemas.microsoft.com/office/powerpoint/2010/main" val="1345347657"/>
       </p:ext>
     </p:extLst>
   </p:cSld>
@@ -6169,7 +8420,7 @@
           <p:cNvPr id="9" name="accent-line">
             <a:extLst xmlns:a="http://schemas.openxmlformats.org/drawingml/2006/main">
               <a:ext uri="{FF2B5EF4-FFF2-40B4-BE49-F238E27FC236}">
-                <a16:creationId xmlns:a16="http://schemas.microsoft.com/office/drawing/2014/main" id="{671A7EFE-5669-4BC6-AD00-9447D2CBD845}"/>
+                <a16:creationId xmlns:a16="http://schemas.microsoft.com/office/drawing/2014/main" id="{0A185BB9-78BF-42FE-ADD6-5C56342B2F8B}"/>
               </a:ext>
             </a:extLst>
           </p:cNvPr>
@@ -6202,7 +8453,7 @@
           <p:cNvPr id="2" name="chapter-label">
             <a:extLst xmlns:a="http://schemas.openxmlformats.org/drawingml/2006/main">
               <a:ext uri="{FF2B5EF4-FFF2-40B4-BE49-F238E27FC236}">
-                <a16:creationId xmlns:a16="http://schemas.microsoft.com/office/drawing/2014/main" id="{AD7F4EB9-FC73-4A74-9502-F5BB924D3FEF}"/>
+                <a16:creationId xmlns:a16="http://schemas.microsoft.com/office/drawing/2014/main" id="{243F4512-82A6-45B7-BB70-616F86122C46}"/>
               </a:ext>
             </a:extLst>
           </p:cNvPr>
@@ -6260,7 +8511,7 @@
           <p:cNvPr id="3" name="slide-number">
             <a:extLst xmlns:a="http://schemas.openxmlformats.org/drawingml/2006/main">
               <a:ext uri="{FF2B5EF4-FFF2-40B4-BE49-F238E27FC236}">
-                <a16:creationId xmlns:a16="http://schemas.microsoft.com/office/drawing/2014/main" id="{D5D8EE31-EDB1-43E4-8107-D0D6D69552E8}"/>
+                <a16:creationId xmlns:a16="http://schemas.microsoft.com/office/drawing/2014/main" id="{7DEB19A8-085B-46C2-BB34-1142A7CA7098}"/>
               </a:ext>
             </a:extLst>
           </p:cNvPr>
@@ -6318,7 +8569,7 @@
           <p:cNvPr id="4" name="chapter-footer">
             <a:extLst xmlns:a="http://schemas.openxmlformats.org/drawingml/2006/main">
               <a:ext uri="{FF2B5EF4-FFF2-40B4-BE49-F238E27FC236}">
-                <a16:creationId xmlns:a16="http://schemas.microsoft.com/office/drawing/2014/main" id="{CCA7B141-A39C-4B58-830C-82F74DC566E5}"/>
+                <a16:creationId xmlns:a16="http://schemas.microsoft.com/office/drawing/2014/main" id="{523D475F-DD32-4388-8CE6-E77672DD86B9}"/>
               </a:ext>
             </a:extLst>
           </p:cNvPr>
@@ -6376,7 +8627,7 @@
           <p:cNvPr id="5" name="section-title">
             <a:extLst xmlns:a="http://schemas.openxmlformats.org/drawingml/2006/main">
               <a:ext uri="{FF2B5EF4-FFF2-40B4-BE49-F238E27FC236}">
-                <a16:creationId xmlns:a16="http://schemas.microsoft.com/office/drawing/2014/main" id="{AD76AA92-47F6-4486-86D9-8F68A9306AB2}"/>
+                <a16:creationId xmlns:a16="http://schemas.microsoft.com/office/drawing/2014/main" id="{12E8C68A-D5B2-4BE0-B1E9-42D7B00A0D75}"/>
               </a:ext>
             </a:extLst>
           </p:cNvPr>
@@ -6434,7 +8685,7 @@
           <p:cNvPr id="6" name="section-explanation">
             <a:extLst xmlns:a="http://schemas.openxmlformats.org/drawingml/2006/main">
               <a:ext uri="{FF2B5EF4-FFF2-40B4-BE49-F238E27FC236}">
-                <a16:creationId xmlns:a16="http://schemas.microsoft.com/office/drawing/2014/main" id="{8D6DEAD3-6CBC-4715-B1DE-394691AD204C}"/>
+                <a16:creationId xmlns:a16="http://schemas.microsoft.com/office/drawing/2014/main" id="{FCEC8167-A527-4AEA-B530-01A5BB9B512C}"/>
               </a:ext>
             </a:extLst>
           </p:cNvPr>
@@ -6492,7 +8743,7 @@
           <p:cNvPr id="7" name="column-rule">
             <a:extLst xmlns:a="http://schemas.openxmlformats.org/drawingml/2006/main">
               <a:ext uri="{FF2B5EF4-FFF2-40B4-BE49-F238E27FC236}">
-                <a16:creationId xmlns:a16="http://schemas.microsoft.com/office/drawing/2014/main" id="{02D51F32-1857-469F-9013-0EEB029C215E}"/>
+                <a16:creationId xmlns:a16="http://schemas.microsoft.com/office/drawing/2014/main" id="{EE2FE00E-50EE-422A-A07F-5C337D147C20}"/>
               </a:ext>
             </a:extLst>
           </p:cNvPr>
@@ -6525,7 +8776,7 @@
           <p:cNvPr id="8" name="section-points">
             <a:extLst xmlns:a="http://schemas.openxmlformats.org/drawingml/2006/main">
               <a:ext uri="{FF2B5EF4-FFF2-40B4-BE49-F238E27FC236}">
-                <a16:creationId xmlns:a16="http://schemas.microsoft.com/office/drawing/2014/main" id="{6AC875FC-E4B4-4791-B8A1-6EDDB323A18C}"/>
+                <a16:creationId xmlns:a16="http://schemas.microsoft.com/office/drawing/2014/main" id="{67BE0D6B-EFC9-4627-8229-78097091BB50}"/>
               </a:ext>
             </a:extLst>
           </p:cNvPr>
@@ -6665,7 +8916,7 @@
     </p:spTree>
     <p:extLst>
       <p:ext uri="{BB962C8B-B14F-4D97-AF65-F5344CB8AC3E}">
-        <p14:creationId xmlns:p14="http://schemas.microsoft.com/office/powerpoint/2010/main" val="1394268781"/>
+        <p14:creationId xmlns:p14="http://schemas.microsoft.com/office/powerpoint/2010/main" val="1861963235"/>
       </p:ext>
     </p:extLst>
   </p:cSld>
@@ -6696,7 +8947,7 @@
           <p:cNvPr id="15" name="accent-line">
             <a:extLst xmlns:a="http://schemas.openxmlformats.org/drawingml/2006/main">
               <a:ext uri="{FF2B5EF4-FFF2-40B4-BE49-F238E27FC236}">
-                <a16:creationId xmlns:a16="http://schemas.microsoft.com/office/drawing/2014/main" id="{EDAC3E79-9733-42A8-A9EE-391AA25D5FFB}"/>
+                <a16:creationId xmlns:a16="http://schemas.microsoft.com/office/drawing/2014/main" id="{22B728DC-6E7B-4C37-B233-3117EB505EA0}"/>
               </a:ext>
             </a:extLst>
           </p:cNvPr>
@@ -6729,7 +8980,7 @@
           <p:cNvPr id="2" name="chapter-label">
             <a:extLst xmlns:a="http://schemas.openxmlformats.org/drawingml/2006/main">
               <a:ext uri="{FF2B5EF4-FFF2-40B4-BE49-F238E27FC236}">
-                <a16:creationId xmlns:a16="http://schemas.microsoft.com/office/drawing/2014/main" id="{8CB3CC00-45F6-4890-A632-BC2F6C91D413}"/>
+                <a16:creationId xmlns:a16="http://schemas.microsoft.com/office/drawing/2014/main" id="{375C3998-031A-4AD2-917D-CC4F64F1D8B3}"/>
               </a:ext>
             </a:extLst>
           </p:cNvPr>
@@ -6787,7 +9038,7 @@
           <p:cNvPr id="3" name="slide-number">
             <a:extLst xmlns:a="http://schemas.openxmlformats.org/drawingml/2006/main">
               <a:ext uri="{FF2B5EF4-FFF2-40B4-BE49-F238E27FC236}">
-                <a16:creationId xmlns:a16="http://schemas.microsoft.com/office/drawing/2014/main" id="{57F7B977-92F0-4011-996E-F5C5446AB36F}"/>
+                <a16:creationId xmlns:a16="http://schemas.microsoft.com/office/drawing/2014/main" id="{CBBC9EB3-AC12-4543-871A-92EB128203AA}"/>
               </a:ext>
             </a:extLst>
           </p:cNvPr>
@@ -6845,7 +9096,7 @@
           <p:cNvPr id="4" name="chapter-footer">
             <a:extLst xmlns:a="http://schemas.openxmlformats.org/drawingml/2006/main">
               <a:ext uri="{FF2B5EF4-FFF2-40B4-BE49-F238E27FC236}">
-                <a16:creationId xmlns:a16="http://schemas.microsoft.com/office/drawing/2014/main" id="{2F1A5D9E-87FD-41ED-B447-A4DD9870320B}"/>
+                <a16:creationId xmlns:a16="http://schemas.microsoft.com/office/drawing/2014/main" id="{18A3C06A-D5FF-4879-A289-FE8808A3A219}"/>
               </a:ext>
             </a:extLst>
           </p:cNvPr>
@@ -6903,7 +9154,7 @@
           <p:cNvPr id="5" name="section-title">
             <a:extLst xmlns:a="http://schemas.openxmlformats.org/drawingml/2006/main">
               <a:ext uri="{FF2B5EF4-FFF2-40B4-BE49-F238E27FC236}">
-                <a16:creationId xmlns:a16="http://schemas.microsoft.com/office/drawing/2014/main" id="{39A9C1AC-0287-4EF9-8FA0-7031A035102A}"/>
+                <a16:creationId xmlns:a16="http://schemas.microsoft.com/office/drawing/2014/main" id="{2A2B4C75-56B3-4962-9E06-D95095935427}"/>
               </a:ext>
             </a:extLst>
           </p:cNvPr>
@@ -6961,7 +9212,7 @@
           <p:cNvPr id="6" name="section-explanation">
             <a:extLst xmlns:a="http://schemas.openxmlformats.org/drawingml/2006/main">
               <a:ext uri="{FF2B5EF4-FFF2-40B4-BE49-F238E27FC236}">
-                <a16:creationId xmlns:a16="http://schemas.microsoft.com/office/drawing/2014/main" id="{D9AA222B-3317-4866-B27C-FE92AC89E382}"/>
+                <a16:creationId xmlns:a16="http://schemas.microsoft.com/office/drawing/2014/main" id="{3D26141A-02AF-479A-8171-ED58F22BF713}"/>
               </a:ext>
             </a:extLst>
           </p:cNvPr>
@@ -7019,7 +9270,7 @@
           <p:cNvPr id="7" name="point-band-1">
             <a:extLst xmlns:a="http://schemas.openxmlformats.org/drawingml/2006/main">
               <a:ext uri="{FF2B5EF4-FFF2-40B4-BE49-F238E27FC236}">
-                <a16:creationId xmlns:a16="http://schemas.microsoft.com/office/drawing/2014/main" id="{0B7503BB-B7A8-4C6E-AC2D-7C65BDB9C8E6}"/>
+                <a16:creationId xmlns:a16="http://schemas.microsoft.com/office/drawing/2014/main" id="{5016FF44-C211-45FA-9B42-D85F870327C8}"/>
               </a:ext>
             </a:extLst>
           </p:cNvPr>
@@ -7052,7 +9303,7 @@
           <p:cNvPr id="8" name="point-1">
             <a:extLst xmlns:a="http://schemas.openxmlformats.org/drawingml/2006/main">
               <a:ext uri="{FF2B5EF4-FFF2-40B4-BE49-F238E27FC236}">
-                <a16:creationId xmlns:a16="http://schemas.microsoft.com/office/drawing/2014/main" id="{95DBC330-FF0B-4DA9-83B5-8A083E79CBA7}"/>
+                <a16:creationId xmlns:a16="http://schemas.microsoft.com/office/drawing/2014/main" id="{23C50433-E621-41B8-9592-D7C82760CD23}"/>
               </a:ext>
             </a:extLst>
           </p:cNvPr>
@@ -7110,7 +9361,7 @@
           <p:cNvPr id="9" name="point-band-2">
             <a:extLst xmlns:a="http://schemas.openxmlformats.org/drawingml/2006/main">
               <a:ext uri="{FF2B5EF4-FFF2-40B4-BE49-F238E27FC236}">
-                <a16:creationId xmlns:a16="http://schemas.microsoft.com/office/drawing/2014/main" id="{3CD039BC-5F00-44F6-BCED-E5B20F608D83}"/>
+                <a16:creationId xmlns:a16="http://schemas.microsoft.com/office/drawing/2014/main" id="{3F80C9DA-91BE-478B-AC63-4C0909BAFB32}"/>
               </a:ext>
             </a:extLst>
           </p:cNvPr>
@@ -7143,7 +9394,7 @@
           <p:cNvPr id="10" name="point-2">
             <a:extLst xmlns:a="http://schemas.openxmlformats.org/drawingml/2006/main">
               <a:ext uri="{FF2B5EF4-FFF2-40B4-BE49-F238E27FC236}">
-                <a16:creationId xmlns:a16="http://schemas.microsoft.com/office/drawing/2014/main" id="{D4661B89-60D7-4A81-8C0A-58AE22E65700}"/>
+                <a16:creationId xmlns:a16="http://schemas.microsoft.com/office/drawing/2014/main" id="{26F1E555-2BB4-4723-A6DF-1A0652C89088}"/>
               </a:ext>
             </a:extLst>
           </p:cNvPr>
@@ -7201,7 +9452,7 @@
           <p:cNvPr id="11" name="point-band-3">
             <a:extLst xmlns:a="http://schemas.openxmlformats.org/drawingml/2006/main">
               <a:ext uri="{FF2B5EF4-FFF2-40B4-BE49-F238E27FC236}">
-                <a16:creationId xmlns:a16="http://schemas.microsoft.com/office/drawing/2014/main" id="{D33F896A-0CB4-4601-B8DB-C06E4D74E4E2}"/>
+                <a16:creationId xmlns:a16="http://schemas.microsoft.com/office/drawing/2014/main" id="{BAD1CF2D-76E5-47E4-A49E-3698E0D6A4EF}"/>
               </a:ext>
             </a:extLst>
           </p:cNvPr>
@@ -7234,7 +9485,7 @@
           <p:cNvPr id="12" name="point-3">
             <a:extLst xmlns:a="http://schemas.openxmlformats.org/drawingml/2006/main">
               <a:ext uri="{FF2B5EF4-FFF2-40B4-BE49-F238E27FC236}">
-                <a16:creationId xmlns:a16="http://schemas.microsoft.com/office/drawing/2014/main" id="{F7B9E2D5-D46B-4B73-9C5A-212E6FA798BC}"/>
+                <a16:creationId xmlns:a16="http://schemas.microsoft.com/office/drawing/2014/main" id="{DE8D5FEA-09D0-480F-8CF5-7D2F96A3178B}"/>
               </a:ext>
             </a:extLst>
           </p:cNvPr>
@@ -7292,7 +9543,7 @@
           <p:cNvPr id="13" name="point-band-4">
             <a:extLst xmlns:a="http://schemas.openxmlformats.org/drawingml/2006/main">
               <a:ext uri="{FF2B5EF4-FFF2-40B4-BE49-F238E27FC236}">
-                <a16:creationId xmlns:a16="http://schemas.microsoft.com/office/drawing/2014/main" id="{AF21F687-783B-4AAA-A30F-8922E0888D9F}"/>
+                <a16:creationId xmlns:a16="http://schemas.microsoft.com/office/drawing/2014/main" id="{7B424F6A-561D-406A-9A2A-E79732AB63C8}"/>
               </a:ext>
             </a:extLst>
           </p:cNvPr>
@@ -7325,7 +9576,7 @@
           <p:cNvPr id="14" name="point-4">
             <a:extLst xmlns:a="http://schemas.openxmlformats.org/drawingml/2006/main">
               <a:ext uri="{FF2B5EF4-FFF2-40B4-BE49-F238E27FC236}">
-                <a16:creationId xmlns:a16="http://schemas.microsoft.com/office/drawing/2014/main" id="{E6BA4DE3-F0AF-4DF6-A228-142DDCB11CA5}"/>
+                <a16:creationId xmlns:a16="http://schemas.microsoft.com/office/drawing/2014/main" id="{82A058E6-A81A-42CC-A252-CF4E72E320A6}"/>
               </a:ext>
             </a:extLst>
           </p:cNvPr>
@@ -7381,7 +9632,7 @@
     </p:spTree>
     <p:extLst>
       <p:ext uri="{BB962C8B-B14F-4D97-AF65-F5344CB8AC3E}">
-        <p14:creationId xmlns:p14="http://schemas.microsoft.com/office/powerpoint/2010/main" val="189601271"/>
+        <p14:creationId xmlns:p14="http://schemas.microsoft.com/office/powerpoint/2010/main" val="2071892618"/>
       </p:ext>
     </p:extLst>
   </p:cSld>
@@ -7409,10 +9660,10 @@
       </p:grpSpPr>
       <p:sp>
         <p:nvSpPr>
-          <p:cNvPr id="18" name="accent-line">
-            <a:extLst xmlns:a="http://schemas.openxmlformats.org/drawingml/2006/main">
-              <a:ext uri="{FF2B5EF4-FFF2-40B4-BE49-F238E27FC236}">
-                <a16:creationId xmlns:a16="http://schemas.microsoft.com/office/drawing/2014/main" id="{AFFFDC0B-C5B5-4DB4-A360-0F83C88047F3}"/>
+          <p:cNvPr id="9" name="accent-line">
+            <a:extLst xmlns:a="http://schemas.openxmlformats.org/drawingml/2006/main">
+              <a:ext uri="{FF2B5EF4-FFF2-40B4-BE49-F238E27FC236}">
+                <a16:creationId xmlns:a16="http://schemas.microsoft.com/office/drawing/2014/main" id="{BB95B21D-3E5F-47AA-B5AE-37F76612AF01}"/>
               </a:ext>
             </a:extLst>
           </p:cNvPr>
@@ -7445,7 +9696,7 @@
           <p:cNvPr id="2" name="chapter-label">
             <a:extLst xmlns:a="http://schemas.openxmlformats.org/drawingml/2006/main">
               <a:ext uri="{FF2B5EF4-FFF2-40B4-BE49-F238E27FC236}">
-                <a16:creationId xmlns:a16="http://schemas.microsoft.com/office/drawing/2014/main" id="{19DE9324-2043-4CCF-88BE-684DDDCFDFA9}"/>
+                <a16:creationId xmlns:a16="http://schemas.microsoft.com/office/drawing/2014/main" id="{AB34AB66-DEF7-4B11-A1B6-67EF0E234585}"/>
               </a:ext>
             </a:extLst>
           </p:cNvPr>
@@ -7493,7 +9744,7 @@
                 <a:ea typeface="Helvetica Neue"/>
                 <a:cs typeface="Helvetica Neue"/>
               </a:rPr>
-              <a:t>EXAM CHECK  /  08</a:t>
+              <a:t>CORE IDEA 07  /  08</a:t>
             </a:r>
           </a:p>
         </p:txBody>
@@ -7503,7 +9754,7 @@
           <p:cNvPr id="3" name="slide-number">
             <a:extLst xmlns:a="http://schemas.openxmlformats.org/drawingml/2006/main">
               <a:ext uri="{FF2B5EF4-FFF2-40B4-BE49-F238E27FC236}">
-                <a16:creationId xmlns:a16="http://schemas.microsoft.com/office/drawing/2014/main" id="{EE7630B1-7CC4-4FE0-9A3E-0425AEF849B3}"/>
+                <a16:creationId xmlns:a16="http://schemas.microsoft.com/office/drawing/2014/main" id="{2FC39BB9-A72E-49BB-AF5C-1697BC797D48}"/>
               </a:ext>
             </a:extLst>
           </p:cNvPr>
@@ -7561,7 +9812,7 @@
           <p:cNvPr id="4" name="chapter-footer">
             <a:extLst xmlns:a="http://schemas.openxmlformats.org/drawingml/2006/main">
               <a:ext uri="{FF2B5EF4-FFF2-40B4-BE49-F238E27FC236}">
-                <a16:creationId xmlns:a16="http://schemas.microsoft.com/office/drawing/2014/main" id="{FE7F04E2-64FA-488D-AC2A-76D43798A05F}"/>
+                <a16:creationId xmlns:a16="http://schemas.microsoft.com/office/drawing/2014/main" id="{1C77361B-7906-46AE-BC33-D72014B99781}"/>
               </a:ext>
             </a:extLst>
           </p:cNvPr>
@@ -7616,138 +9867,22 @@
       </p:sp>
       <p:sp>
         <p:nvSpPr>
-          <p:cNvPr id="5" name="exam-title">
-            <a:extLst xmlns:a="http://schemas.openxmlformats.org/drawingml/2006/main">
-              <a:ext uri="{FF2B5EF4-FFF2-40B4-BE49-F238E27FC236}">
-                <a16:creationId xmlns:a16="http://schemas.microsoft.com/office/drawing/2014/main" id="{07E4A4A7-70F1-4404-9CC1-24E1ADBFB21C}"/>
-              </a:ext>
-            </a:extLst>
-          </p:cNvPr>
-          <p:cNvSpPr>
-            <a:spLocks xmlns:a="http://schemas.openxmlformats.org/drawingml/2006/main" noGrp="1"/>
-          </p:cNvSpPr>
-          <p:nvPr/>
-        </p:nvSpPr>
-        <p:spPr>
-          <a:xfrm xmlns:a="http://schemas.openxmlformats.org/drawingml/2006/main">
-            <a:off x="390525" y="981075"/>
-            <a:ext cx="10668000" cy="781050"/>
-          </a:xfrm>
-          <a:prstGeom xmlns:a="http://schemas.openxmlformats.org/drawingml/2006/main" prst="rect">
-            <a:avLst/>
-          </a:prstGeom>
-          <a:noFill xmlns:a="http://schemas.openxmlformats.org/drawingml/2006/main"/>
-          <a:ln xmlns:a="http://schemas.openxmlformats.org/drawingml/2006/main" w="0">
-            <a:noFill/>
-            <a:prstDash val="solid"/>
-          </a:ln>
-        </p:spPr>
-        <p:txBody>
-          <a:bodyPr xmlns:a="http://schemas.openxmlformats.org/drawingml/2006/main" anchor="t">
-            <a:noAutofit/>
-          </a:bodyPr>
-          <a:lstStyle xmlns:a="http://schemas.openxmlformats.org/drawingml/2006/main"/>
-          <a:p xmlns:a="http://schemas.openxmlformats.org/drawingml/2006/main">
-            <a:pPr algn="l">
-              <a:defRPr sz="3150" b="1">
-                <a:solidFill>
-                  <a:srgbClr val="111111"/>
-                </a:solidFill>
-                <a:latin typeface="Helvetica Neue"/>
-                <a:ea typeface="Helvetica Neue"/>
-                <a:cs typeface="Helvetica Neue"/>
-              </a:defRPr>
-            </a:pPr>
-            <a:r>
-              <a:rPr sz="3150" b="1">
-                <a:solidFill>
-                  <a:srgbClr val="111111"/>
-                </a:solidFill>
-                <a:latin typeface="Helvetica Neue"/>
-                <a:ea typeface="Helvetica Neue"/>
-                <a:cs typeface="Helvetica Neue"/>
-              </a:rPr>
-              <a:t>Can you answer these without notes?</a:t>
-            </a:r>
-          </a:p>
-        </p:txBody>
-      </p:sp>
-      <p:sp>
-        <p:nvSpPr>
-          <p:cNvPr id="6" name="exam-number-1">
-            <a:extLst xmlns:a="http://schemas.openxmlformats.org/drawingml/2006/main">
-              <a:ext uri="{FF2B5EF4-FFF2-40B4-BE49-F238E27FC236}">
-                <a16:creationId xmlns:a16="http://schemas.microsoft.com/office/drawing/2014/main" id="{1C9DE29F-98BF-4DF1-901E-B5B346D6DCA8}"/>
-              </a:ext>
-            </a:extLst>
-          </p:cNvPr>
-          <p:cNvSpPr>
-            <a:spLocks xmlns:a="http://schemas.openxmlformats.org/drawingml/2006/main" noGrp="1"/>
-          </p:cNvSpPr>
-          <p:nvPr/>
-        </p:nvSpPr>
-        <p:spPr>
-          <a:xfrm xmlns:a="http://schemas.openxmlformats.org/drawingml/2006/main">
-            <a:off x="390525" y="2238375"/>
-            <a:ext cx="590550" cy="400050"/>
-          </a:xfrm>
-          <a:prstGeom xmlns:a="http://schemas.openxmlformats.org/drawingml/2006/main" prst="rect">
-            <a:avLst/>
-          </a:prstGeom>
-          <a:noFill xmlns:a="http://schemas.openxmlformats.org/drawingml/2006/main"/>
-          <a:ln xmlns:a="http://schemas.openxmlformats.org/drawingml/2006/main" w="0">
-            <a:noFill/>
-            <a:prstDash val="solid"/>
-          </a:ln>
-        </p:spPr>
-        <p:txBody>
-          <a:bodyPr xmlns:a="http://schemas.openxmlformats.org/drawingml/2006/main" anchor="t">
-            <a:noAutofit/>
-          </a:bodyPr>
-          <a:lstStyle xmlns:a="http://schemas.openxmlformats.org/drawingml/2006/main"/>
-          <a:p xmlns:a="http://schemas.openxmlformats.org/drawingml/2006/main">
-            <a:pPr algn="l">
-              <a:defRPr sz="1725" b="1">
-                <a:solidFill>
-                  <a:srgbClr val="FFB45E"/>
-                </a:solidFill>
-                <a:latin typeface="Helvetica Neue"/>
-                <a:ea typeface="Helvetica Neue"/>
-                <a:cs typeface="Helvetica Neue"/>
-              </a:defRPr>
-            </a:pPr>
-            <a:r>
-              <a:rPr sz="1725" b="1">
-                <a:solidFill>
-                  <a:srgbClr val="FFB45E"/>
-                </a:solidFill>
-                <a:latin typeface="Helvetica Neue"/>
-                <a:ea typeface="Helvetica Neue"/>
-                <a:cs typeface="Helvetica Neue"/>
-              </a:rPr>
-              <a:t>01</a:t>
-            </a:r>
-          </a:p>
-        </p:txBody>
-      </p:sp>
-      <p:sp>
-        <p:nvSpPr>
-          <p:cNvPr id="7" name="exam-question-1">
-            <a:extLst xmlns:a="http://schemas.openxmlformats.org/drawingml/2006/main">
-              <a:ext uri="{FF2B5EF4-FFF2-40B4-BE49-F238E27FC236}">
-                <a16:creationId xmlns:a16="http://schemas.microsoft.com/office/drawing/2014/main" id="{50C95ECE-7F31-41F6-B978-8A98EE32178A}"/>
-              </a:ext>
-            </a:extLst>
-          </p:cNvPr>
-          <p:cNvSpPr>
-            <a:spLocks xmlns:a="http://schemas.openxmlformats.org/drawingml/2006/main" noGrp="1"/>
-          </p:cNvSpPr>
-          <p:nvPr/>
-        </p:nvSpPr>
-        <p:spPr>
-          <a:xfrm xmlns:a="http://schemas.openxmlformats.org/drawingml/2006/main">
-            <a:off x="1076325" y="2238375"/>
-            <a:ext cx="4762500" cy="895350"/>
+          <p:cNvPr id="5" name="section-title">
+            <a:extLst xmlns:a="http://schemas.openxmlformats.org/drawingml/2006/main">
+              <a:ext uri="{FF2B5EF4-FFF2-40B4-BE49-F238E27FC236}">
+                <a16:creationId xmlns:a16="http://schemas.microsoft.com/office/drawing/2014/main" id="{F9F68691-13B3-42CB-9CC9-15C985CA02BC}"/>
+              </a:ext>
+            </a:extLst>
+          </p:cNvPr>
+          <p:cNvSpPr>
+            <a:spLocks xmlns:a="http://schemas.openxmlformats.org/drawingml/2006/main" noGrp="1"/>
+          </p:cNvSpPr>
+          <p:nvPr/>
+        </p:nvSpPr>
+        <p:spPr>
+          <a:xfrm xmlns:a="http://schemas.openxmlformats.org/drawingml/2006/main">
+            <a:off x="390525" y="971550"/>
+            <a:ext cx="11144250" cy="971550"/>
           </a:xfrm>
           <a:prstGeom xmlns:a="http://schemas.openxmlformats.org/drawingml/2006/main" prst="rect">
             <a:avLst/>
@@ -7765,105 +9900,47 @@
           <a:lstStyle xmlns:a="http://schemas.openxmlformats.org/drawingml/2006/main"/>
           <a:p xmlns:a="http://schemas.openxmlformats.org/drawingml/2006/main">
             <a:pPr algn="l">
-              <a:defRPr sz="1575" b="1">
-                <a:solidFill>
-                  <a:srgbClr val="111111"/>
-                </a:solidFill>
-                <a:latin typeface="Helvetica Neue"/>
-                <a:ea typeface="Helvetica Neue"/>
-                <a:cs typeface="Helvetica Neue"/>
-              </a:defRPr>
-            </a:pPr>
-            <a:r>
-              <a:rPr sz="1575" b="1">
-                <a:solidFill>
-                  <a:srgbClr val="111111"/>
-                </a:solidFill>
-                <a:latin typeface="Helvetica Neue"/>
-                <a:ea typeface="Helvetica Neue"/>
-                <a:cs typeface="Helvetica Neue"/>
-              </a:rPr>
-              <a:t>List four benefits and four costs of multi-agent systems.</a:t>
-            </a:r>
-          </a:p>
-        </p:txBody>
-      </p:sp>
-      <p:sp>
-        <p:nvSpPr>
-          <p:cNvPr id="8" name="exam-number-2">
-            <a:extLst xmlns:a="http://schemas.openxmlformats.org/drawingml/2006/main">
-              <a:ext uri="{FF2B5EF4-FFF2-40B4-BE49-F238E27FC236}">
-                <a16:creationId xmlns:a16="http://schemas.microsoft.com/office/drawing/2014/main" id="{89E77D2A-3485-44E8-9109-E0D9C3A3F5A0}"/>
-              </a:ext>
-            </a:extLst>
-          </p:cNvPr>
-          <p:cNvSpPr>
-            <a:spLocks xmlns:a="http://schemas.openxmlformats.org/drawingml/2006/main" noGrp="1"/>
-          </p:cNvSpPr>
-          <p:nvPr/>
-        </p:nvSpPr>
-        <p:spPr>
-          <a:xfrm xmlns:a="http://schemas.openxmlformats.org/drawingml/2006/main">
-            <a:off x="6191250" y="2238375"/>
-            <a:ext cx="590550" cy="400050"/>
-          </a:xfrm>
-          <a:prstGeom xmlns:a="http://schemas.openxmlformats.org/drawingml/2006/main" prst="rect">
-            <a:avLst/>
-          </a:prstGeom>
-          <a:noFill xmlns:a="http://schemas.openxmlformats.org/drawingml/2006/main"/>
-          <a:ln xmlns:a="http://schemas.openxmlformats.org/drawingml/2006/main" w="0">
-            <a:noFill/>
-            <a:prstDash val="solid"/>
-          </a:ln>
-        </p:spPr>
-        <p:txBody>
-          <a:bodyPr xmlns:a="http://schemas.openxmlformats.org/drawingml/2006/main" anchor="t">
-            <a:noAutofit/>
-          </a:bodyPr>
-          <a:lstStyle xmlns:a="http://schemas.openxmlformats.org/drawingml/2006/main"/>
-          <a:p xmlns:a="http://schemas.openxmlformats.org/drawingml/2006/main">
-            <a:pPr algn="l">
-              <a:defRPr sz="1725" b="1">
-                <a:solidFill>
-                  <a:srgbClr val="FFB45E"/>
-                </a:solidFill>
-                <a:latin typeface="Helvetica Neue"/>
-                <a:ea typeface="Helvetica Neue"/>
-                <a:cs typeface="Helvetica Neue"/>
-              </a:defRPr>
-            </a:pPr>
-            <a:r>
-              <a:rPr sz="1725" b="1">
-                <a:solidFill>
-                  <a:srgbClr val="FFB45E"/>
-                </a:solidFill>
-                <a:latin typeface="Helvetica Neue"/>
-                <a:ea typeface="Helvetica Neue"/>
-                <a:cs typeface="Helvetica Neue"/>
-              </a:rPr>
-              <a:t>02</a:t>
-            </a:r>
-          </a:p>
-        </p:txBody>
-      </p:sp>
-      <p:sp>
-        <p:nvSpPr>
-          <p:cNvPr id="9" name="exam-question-2">
-            <a:extLst xmlns:a="http://schemas.openxmlformats.org/drawingml/2006/main">
-              <a:ext uri="{FF2B5EF4-FFF2-40B4-BE49-F238E27FC236}">
-                <a16:creationId xmlns:a16="http://schemas.microsoft.com/office/drawing/2014/main" id="{725C005C-5CA5-43BF-8F48-A80F580190BB}"/>
-              </a:ext>
-            </a:extLst>
-          </p:cNvPr>
-          <p:cNvSpPr>
-            <a:spLocks xmlns:a="http://schemas.openxmlformats.org/drawingml/2006/main" noGrp="1"/>
-          </p:cNvSpPr>
-          <p:nvPr/>
-        </p:nvSpPr>
-        <p:spPr>
-          <a:xfrm xmlns:a="http://schemas.openxmlformats.org/drawingml/2006/main">
-            <a:off x="6877050" y="2238375"/>
-            <a:ext cx="4762500" cy="895350"/>
+              <a:defRPr sz="3000" b="1">
+                <a:solidFill>
+                  <a:srgbClr val="111111"/>
+                </a:solidFill>
+                <a:latin typeface="Helvetica Neue"/>
+                <a:ea typeface="Helvetica Neue"/>
+                <a:cs typeface="Helvetica Neue"/>
+              </a:defRPr>
+            </a:pPr>
+            <a:r>
+              <a:rPr sz="3000" b="1">
+                <a:solidFill>
+                  <a:srgbClr val="111111"/>
+                </a:solidFill>
+                <a:latin typeface="Helvetica Neue"/>
+                <a:ea typeface="Helvetica Neue"/>
+                <a:cs typeface="Helvetica Neue"/>
+              </a:rPr>
+              <a:t>Shared evidence matters more than agreement</a:t>
+            </a:r>
+          </a:p>
+        </p:txBody>
+      </p:sp>
+      <p:sp>
+        <p:nvSpPr>
+          <p:cNvPr id="6" name="section-explanation">
+            <a:extLst xmlns:a="http://schemas.openxmlformats.org/drawingml/2006/main">
+              <a:ext uri="{FF2B5EF4-FFF2-40B4-BE49-F238E27FC236}">
+                <a16:creationId xmlns:a16="http://schemas.microsoft.com/office/drawing/2014/main" id="{443F9372-7301-453B-9952-934CC8DB20F9}"/>
+              </a:ext>
+            </a:extLst>
+          </p:cNvPr>
+          <p:cNvSpPr>
+            <a:spLocks xmlns:a="http://schemas.openxmlformats.org/drawingml/2006/main" noGrp="1"/>
+          </p:cNvSpPr>
+          <p:nvPr/>
+        </p:nvSpPr>
+        <p:spPr>
+          <a:xfrm xmlns:a="http://schemas.openxmlformats.org/drawingml/2006/main">
+            <a:off x="390525" y="2381250"/>
+            <a:ext cx="4524375" cy="2905125"/>
           </a:xfrm>
           <a:prstGeom xmlns:a="http://schemas.openxmlformats.org/drawingml/2006/main" prst="rect">
             <a:avLst/>
@@ -7881,105 +9958,80 @@
           <a:lstStyle xmlns:a="http://schemas.openxmlformats.org/drawingml/2006/main"/>
           <a:p xmlns:a="http://schemas.openxmlformats.org/drawingml/2006/main">
             <a:pPr algn="l">
-              <a:defRPr sz="1575" b="1">
-                <a:solidFill>
-                  <a:srgbClr val="111111"/>
-                </a:solidFill>
-                <a:latin typeface="Helvetica Neue"/>
-                <a:ea typeface="Helvetica Neue"/>
-                <a:cs typeface="Helvetica Neue"/>
-              </a:defRPr>
-            </a:pPr>
-            <a:r>
-              <a:rPr sz="1575" b="1">
-                <a:solidFill>
-                  <a:srgbClr val="111111"/>
-                </a:solidFill>
-                <a:latin typeface="Helvetica Neue"/>
-                <a:ea typeface="Helvetica Neue"/>
-                <a:cs typeface="Helvetica Neue"/>
-              </a:rPr>
-              <a:t>What are the four dimensions of collaboration?</a:t>
-            </a:r>
-          </a:p>
-        </p:txBody>
-      </p:sp>
-      <p:sp>
-        <p:nvSpPr>
-          <p:cNvPr id="10" name="exam-number-3">
-            <a:extLst xmlns:a="http://schemas.openxmlformats.org/drawingml/2006/main">
-              <a:ext uri="{FF2B5EF4-FFF2-40B4-BE49-F238E27FC236}">
-                <a16:creationId xmlns:a16="http://schemas.microsoft.com/office/drawing/2014/main" id="{D2301E5B-3000-4CFB-AAB6-CD0DFF91238C}"/>
-              </a:ext>
-            </a:extLst>
-          </p:cNvPr>
-          <p:cNvSpPr>
-            <a:spLocks xmlns:a="http://schemas.openxmlformats.org/drawingml/2006/main" noGrp="1"/>
-          </p:cNvSpPr>
-          <p:nvPr/>
-        </p:nvSpPr>
-        <p:spPr>
-          <a:xfrm xmlns:a="http://schemas.openxmlformats.org/drawingml/2006/main">
-            <a:off x="390525" y="3495675"/>
-            <a:ext cx="590550" cy="400050"/>
-          </a:xfrm>
-          <a:prstGeom xmlns:a="http://schemas.openxmlformats.org/drawingml/2006/main" prst="rect">
-            <a:avLst/>
-          </a:prstGeom>
-          <a:noFill xmlns:a="http://schemas.openxmlformats.org/drawingml/2006/main"/>
-          <a:ln xmlns:a="http://schemas.openxmlformats.org/drawingml/2006/main" w="0">
-            <a:noFill/>
-            <a:prstDash val="solid"/>
-          </a:ln>
-        </p:spPr>
-        <p:txBody>
-          <a:bodyPr xmlns:a="http://schemas.openxmlformats.org/drawingml/2006/main" anchor="t">
-            <a:noAutofit/>
-          </a:bodyPr>
-          <a:lstStyle xmlns:a="http://schemas.openxmlformats.org/drawingml/2006/main"/>
-          <a:p xmlns:a="http://schemas.openxmlformats.org/drawingml/2006/main">
-            <a:pPr algn="l">
-              <a:defRPr sz="1725" b="1">
-                <a:solidFill>
-                  <a:srgbClr val="FFB45E"/>
-                </a:solidFill>
-                <a:latin typeface="Helvetica Neue"/>
-                <a:ea typeface="Helvetica Neue"/>
-                <a:cs typeface="Helvetica Neue"/>
-              </a:defRPr>
-            </a:pPr>
-            <a:r>
-              <a:rPr sz="1725" b="1">
-                <a:solidFill>
-                  <a:srgbClr val="FFB45E"/>
-                </a:solidFill>
-                <a:latin typeface="Helvetica Neue"/>
-                <a:ea typeface="Helvetica Neue"/>
-                <a:cs typeface="Helvetica Neue"/>
-              </a:rPr>
-              <a:t>03</a:t>
-            </a:r>
-          </a:p>
-        </p:txBody>
-      </p:sp>
-      <p:sp>
-        <p:nvSpPr>
-          <p:cNvPr id="11" name="exam-question-3">
-            <a:extLst xmlns:a="http://schemas.openxmlformats.org/drawingml/2006/main">
-              <a:ext uri="{FF2B5EF4-FFF2-40B4-BE49-F238E27FC236}">
-                <a16:creationId xmlns:a16="http://schemas.microsoft.com/office/drawing/2014/main" id="{1F8E0E9C-4495-4F7E-8090-FA6573EEA32E}"/>
-              </a:ext>
-            </a:extLst>
-          </p:cNvPr>
-          <p:cNvSpPr>
-            <a:spLocks xmlns:a="http://schemas.openxmlformats.org/drawingml/2006/main" noGrp="1"/>
-          </p:cNvSpPr>
-          <p:nvPr/>
-        </p:nvSpPr>
-        <p:spPr>
-          <a:xfrm xmlns:a="http://schemas.openxmlformats.org/drawingml/2006/main">
-            <a:off x="1076325" y="3495675"/>
-            <a:ext cx="4762500" cy="895350"/>
+              <a:defRPr sz="1875" b="0">
+                <a:solidFill>
+                  <a:srgbClr val="5B5B57"/>
+                </a:solidFill>
+                <a:latin typeface="Helvetica Neue"/>
+                <a:ea typeface="Helvetica Neue"/>
+                <a:cs typeface="Helvetica Neue"/>
+              </a:defRPr>
+            </a:pPr>
+            <a:r>
+              <a:rPr sz="1875" b="0">
+                <a:solidFill>
+                  <a:srgbClr val="5B5B57"/>
+                </a:solidFill>
+                <a:latin typeface="Helvetica Neue"/>
+                <a:ea typeface="Helvetica Neue"/>
+                <a:cs typeface="Helvetica Neue"/>
+              </a:rPr>
+              <a:t>Anthropic's multi-agent experiments include information-sharing failures and conflicting objectives. For a classroom comparison, keep task scope and budget explicit. Agreement between agents does not establish independent evidence.</a:t>
+            </a:r>
+          </a:p>
+        </p:txBody>
+      </p:sp>
+      <p:sp>
+        <p:nvSpPr>
+          <p:cNvPr id="7" name="column-rule">
+            <a:extLst xmlns:a="http://schemas.openxmlformats.org/drawingml/2006/main">
+              <a:ext uri="{FF2B5EF4-FFF2-40B4-BE49-F238E27FC236}">
+                <a16:creationId xmlns:a16="http://schemas.microsoft.com/office/drawing/2014/main" id="{E77B0EC2-6BC1-4CD5-85E3-0F86D78FD6F2}"/>
+              </a:ext>
+            </a:extLst>
+          </p:cNvPr>
+          <p:cNvSpPr>
+            <a:spLocks xmlns:a="http://schemas.openxmlformats.org/drawingml/2006/main" noGrp="1"/>
+          </p:cNvSpPr>
+          <p:nvPr/>
+        </p:nvSpPr>
+        <p:spPr>
+          <a:xfrm xmlns:a="http://schemas.openxmlformats.org/drawingml/2006/main">
+            <a:off x="5334000" y="2343150"/>
+            <a:ext cx="47625" cy="3257550"/>
+          </a:xfrm>
+          <a:prstGeom xmlns:a="http://schemas.openxmlformats.org/drawingml/2006/main" prst="rect">
+            <a:avLst/>
+          </a:prstGeom>
+          <a:solidFill xmlns:a="http://schemas.openxmlformats.org/drawingml/2006/main">
+            <a:srgbClr val="FFB45E"/>
+          </a:solidFill>
+          <a:ln xmlns:a="http://schemas.openxmlformats.org/drawingml/2006/main" w="0">
+            <a:solidFill>
+              <a:srgbClr val="FFB45E"/>
+            </a:solidFill>
+            <a:prstDash val="solid"/>
+          </a:ln>
+        </p:spPr>
+      </p:sp>
+      <p:sp>
+        <p:nvSpPr>
+          <p:cNvPr id="8" name="section-points">
+            <a:extLst xmlns:a="http://schemas.openxmlformats.org/drawingml/2006/main">
+              <a:ext uri="{FF2B5EF4-FFF2-40B4-BE49-F238E27FC236}">
+                <a16:creationId xmlns:a16="http://schemas.microsoft.com/office/drawing/2014/main" id="{7EA1568F-B2EA-4585-96D6-28FBA8979C18}"/>
+              </a:ext>
+            </a:extLst>
+          </p:cNvPr>
+          <p:cNvSpPr>
+            <a:spLocks xmlns:a="http://schemas.openxmlformats.org/drawingml/2006/main" noGrp="1"/>
+          </p:cNvSpPr>
+          <p:nvPr/>
+        </p:nvSpPr>
+        <p:spPr>
+          <a:xfrm xmlns:a="http://schemas.openxmlformats.org/drawingml/2006/main">
+            <a:off x="5857875" y="2343150"/>
+            <a:ext cx="5572125" cy="3429000"/>
           </a:xfrm>
           <a:prstGeom xmlns:a="http://schemas.openxmlformats.org/drawingml/2006/main" prst="rect">
             <a:avLst/>
@@ -7997,67 +10049,37 @@
           <a:lstStyle xmlns:a="http://schemas.openxmlformats.org/drawingml/2006/main"/>
           <a:p xmlns:a="http://schemas.openxmlformats.org/drawingml/2006/main">
             <a:pPr algn="l">
-              <a:defRPr sz="1575" b="1">
-                <a:solidFill>
-                  <a:srgbClr val="111111"/>
-                </a:solidFill>
-                <a:latin typeface="Helvetica Neue"/>
-                <a:ea typeface="Helvetica Neue"/>
-                <a:cs typeface="Helvetica Neue"/>
-              </a:defRPr>
-            </a:pPr>
-            <a:r>
-              <a:rPr sz="1575" b="1">
-                <a:solidFill>
-                  <a:srgbClr val="111111"/>
-                </a:solidFill>
-                <a:latin typeface="Helvetica Neue"/>
-                <a:ea typeface="Helvetica Neue"/>
-                <a:cs typeface="Helvetica Neue"/>
-              </a:rPr>
-              <a:t>Compare shared state, direct messaging, and publish-subscribe.</a:t>
-            </a:r>
-          </a:p>
-        </p:txBody>
-      </p:sp>
-      <p:sp>
-        <p:nvSpPr>
-          <p:cNvPr id="12" name="exam-number-4">
-            <a:extLst xmlns:a="http://schemas.openxmlformats.org/drawingml/2006/main">
-              <a:ext uri="{FF2B5EF4-FFF2-40B4-BE49-F238E27FC236}">
-                <a16:creationId xmlns:a16="http://schemas.microsoft.com/office/drawing/2014/main" id="{847D907A-3095-4B89-996B-BFF972719B47}"/>
-              </a:ext>
-            </a:extLst>
-          </p:cNvPr>
-          <p:cNvSpPr>
-            <a:spLocks xmlns:a="http://schemas.openxmlformats.org/drawingml/2006/main" noGrp="1"/>
-          </p:cNvSpPr>
-          <p:nvPr/>
-        </p:nvSpPr>
-        <p:spPr>
-          <a:xfrm xmlns:a="http://schemas.openxmlformats.org/drawingml/2006/main">
-            <a:off x="6191250" y="3495675"/>
-            <a:ext cx="590550" cy="400050"/>
-          </a:xfrm>
-          <a:prstGeom xmlns:a="http://schemas.openxmlformats.org/drawingml/2006/main" prst="rect">
-            <a:avLst/>
-          </a:prstGeom>
-          <a:noFill xmlns:a="http://schemas.openxmlformats.org/drawingml/2006/main"/>
-          <a:ln xmlns:a="http://schemas.openxmlformats.org/drawingml/2006/main" w="0">
-            <a:noFill/>
-            <a:prstDash val="solid"/>
-          </a:ln>
-        </p:spPr>
-        <p:txBody>
-          <a:bodyPr xmlns:a="http://schemas.openxmlformats.org/drawingml/2006/main" anchor="t">
-            <a:noAutofit/>
-          </a:bodyPr>
-          <a:lstStyle xmlns:a="http://schemas.openxmlformats.org/drawingml/2006/main"/>
+              <a:defRPr sz="1725" b="1">
+                <a:solidFill>
+                  <a:srgbClr val="111111"/>
+                </a:solidFill>
+                <a:latin typeface="Helvetica Neue"/>
+                <a:ea typeface="Helvetica Neue"/>
+                <a:cs typeface="Helvetica Neue"/>
+              </a:defRPr>
+            </a:pPr>
+            <a:r>
+              <a:rPr sz="1725" b="1">
+                <a:solidFill>
+                  <a:srgbClr val="111111"/>
+                </a:solidFill>
+                <a:latin typeface="Helvetica Neue"/>
+                <a:ea typeface="Helvetica Neue"/>
+                <a:cs typeface="Helvetica Neue"/>
+              </a:rPr>
+              <a:t>01  Inspect which facts each role receives.</a:t>
+            </a:r>
+          </a:p>
+          <a:p xmlns:a="http://schemas.openxmlformats.org/drawingml/2006/main">
+            <a:r>
+              <a:t/>
+            </a:r>
+          </a:p>
           <a:p xmlns:a="http://schemas.openxmlformats.org/drawingml/2006/main">
             <a:pPr algn="l">
               <a:defRPr sz="1725" b="1">
                 <a:solidFill>
-                  <a:srgbClr val="FFB45E"/>
+                  <a:srgbClr val="111111"/>
                 </a:solidFill>
                 <a:latin typeface="Helvetica Neue"/>
                 <a:ea typeface="Helvetica Neue"/>
@@ -8067,113 +10089,25 @@
             <a:r>
               <a:rPr sz="1725" b="1">
                 <a:solidFill>
-                  <a:srgbClr val="FFB45E"/>
-                </a:solidFill>
-                <a:latin typeface="Helvetica Neue"/>
-                <a:ea typeface="Helvetica Neue"/>
-                <a:cs typeface="Helvetica Neue"/>
-              </a:rPr>
-              <a:t>04</a:t>
-            </a:r>
-          </a:p>
-        </p:txBody>
-      </p:sp>
-      <p:sp>
-        <p:nvSpPr>
-          <p:cNvPr id="13" name="exam-question-4">
-            <a:extLst xmlns:a="http://schemas.openxmlformats.org/drawingml/2006/main">
-              <a:ext uri="{FF2B5EF4-FFF2-40B4-BE49-F238E27FC236}">
-                <a16:creationId xmlns:a16="http://schemas.microsoft.com/office/drawing/2014/main" id="{DC853544-F7F5-4128-8AB2-1A4142226BBB}"/>
-              </a:ext>
-            </a:extLst>
-          </p:cNvPr>
-          <p:cNvSpPr>
-            <a:spLocks xmlns:a="http://schemas.openxmlformats.org/drawingml/2006/main" noGrp="1"/>
-          </p:cNvSpPr>
-          <p:nvPr/>
-        </p:nvSpPr>
-        <p:spPr>
-          <a:xfrm xmlns:a="http://schemas.openxmlformats.org/drawingml/2006/main">
-            <a:off x="6877050" y="3495675"/>
-            <a:ext cx="4762500" cy="895350"/>
-          </a:xfrm>
-          <a:prstGeom xmlns:a="http://schemas.openxmlformats.org/drawingml/2006/main" prst="rect">
-            <a:avLst/>
-          </a:prstGeom>
-          <a:noFill xmlns:a="http://schemas.openxmlformats.org/drawingml/2006/main"/>
-          <a:ln xmlns:a="http://schemas.openxmlformats.org/drawingml/2006/main" w="0">
-            <a:noFill/>
-            <a:prstDash val="solid"/>
-          </a:ln>
-        </p:spPr>
-        <p:txBody>
-          <a:bodyPr xmlns:a="http://schemas.openxmlformats.org/drawingml/2006/main" anchor="t">
-            <a:normAutofit fontScale="100000"/>
-          </a:bodyPr>
-          <a:lstStyle xmlns:a="http://schemas.openxmlformats.org/drawingml/2006/main"/>
-          <a:p xmlns:a="http://schemas.openxmlformats.org/drawingml/2006/main">
-            <a:pPr algn="l">
-              <a:defRPr sz="1575" b="1">
-                <a:solidFill>
-                  <a:srgbClr val="111111"/>
-                </a:solidFill>
-                <a:latin typeface="Helvetica Neue"/>
-                <a:ea typeface="Helvetica Neue"/>
-                <a:cs typeface="Helvetica Neue"/>
-              </a:defRPr>
-            </a:pPr>
-            <a:r>
-              <a:rPr sz="1575" b="1">
-                <a:solidFill>
-                  <a:srgbClr val="111111"/>
-                </a:solidFill>
-                <a:latin typeface="Helvetica Neue"/>
-                <a:ea typeface="Helvetica Neue"/>
-                <a:cs typeface="Helvetica Neue"/>
-              </a:rPr>
-              <a:t>When is a distributed runtime justified?</a:t>
-            </a:r>
-          </a:p>
-        </p:txBody>
-      </p:sp>
-      <p:sp>
-        <p:nvSpPr>
-          <p:cNvPr id="14" name="exam-number-5">
-            <a:extLst xmlns:a="http://schemas.openxmlformats.org/drawingml/2006/main">
-              <a:ext uri="{FF2B5EF4-FFF2-40B4-BE49-F238E27FC236}">
-                <a16:creationId xmlns:a16="http://schemas.microsoft.com/office/drawing/2014/main" id="{2F2A72CE-59BD-4541-9C7B-967BF82DD6C7}"/>
-              </a:ext>
-            </a:extLst>
-          </p:cNvPr>
-          <p:cNvSpPr>
-            <a:spLocks xmlns:a="http://schemas.openxmlformats.org/drawingml/2006/main" noGrp="1"/>
-          </p:cNvSpPr>
-          <p:nvPr/>
-        </p:nvSpPr>
-        <p:spPr>
-          <a:xfrm xmlns:a="http://schemas.openxmlformats.org/drawingml/2006/main">
-            <a:off x="390525" y="4752975"/>
-            <a:ext cx="590550" cy="400050"/>
-          </a:xfrm>
-          <a:prstGeom xmlns:a="http://schemas.openxmlformats.org/drawingml/2006/main" prst="rect">
-            <a:avLst/>
-          </a:prstGeom>
-          <a:noFill xmlns:a="http://schemas.openxmlformats.org/drawingml/2006/main"/>
-          <a:ln xmlns:a="http://schemas.openxmlformats.org/drawingml/2006/main" w="0">
-            <a:noFill/>
-            <a:prstDash val="solid"/>
-          </a:ln>
-        </p:spPr>
-        <p:txBody>
-          <a:bodyPr xmlns:a="http://schemas.openxmlformats.org/drawingml/2006/main" anchor="t">
-            <a:noAutofit/>
-          </a:bodyPr>
-          <a:lstStyle xmlns:a="http://schemas.openxmlformats.org/drawingml/2006/main"/>
+                  <a:srgbClr val="111111"/>
+                </a:solidFill>
+                <a:latin typeface="Helvetica Neue"/>
+                <a:ea typeface="Helvetica Neue"/>
+                <a:cs typeface="Helvetica Neue"/>
+              </a:rPr>
+              <a:t>02  Test a misleading cue shared across agents.</a:t>
+            </a:r>
+          </a:p>
+          <a:p xmlns:a="http://schemas.openxmlformats.org/drawingml/2006/main">
+            <a:r>
+              <a:t/>
+            </a:r>
+          </a:p>
           <a:p xmlns:a="http://schemas.openxmlformats.org/drawingml/2006/main">
             <a:pPr algn="l">
               <a:defRPr sz="1725" b="1">
                 <a:solidFill>
-                  <a:srgbClr val="FFB45E"/>
+                  <a:srgbClr val="111111"/>
                 </a:solidFill>
                 <a:latin typeface="Helvetica Neue"/>
                 <a:ea typeface="Helvetica Neue"/>
@@ -8183,187 +10117,13 @@
             <a:r>
               <a:rPr sz="1725" b="1">
                 <a:solidFill>
-                  <a:srgbClr val="FFB45E"/>
-                </a:solidFill>
-                <a:latin typeface="Helvetica Neue"/>
-                <a:ea typeface="Helvetica Neue"/>
-                <a:cs typeface="Helvetica Neue"/>
-              </a:rPr>
-              <a:t>05</a:t>
-            </a:r>
-          </a:p>
-        </p:txBody>
-      </p:sp>
-      <p:sp>
-        <p:nvSpPr>
-          <p:cNvPr id="15" name="exam-question-5">
-            <a:extLst xmlns:a="http://schemas.openxmlformats.org/drawingml/2006/main">
-              <a:ext uri="{FF2B5EF4-FFF2-40B4-BE49-F238E27FC236}">
-                <a16:creationId xmlns:a16="http://schemas.microsoft.com/office/drawing/2014/main" id="{101F6F17-7D83-4891-8981-142201C8B105}"/>
-              </a:ext>
-            </a:extLst>
-          </p:cNvPr>
-          <p:cNvSpPr>
-            <a:spLocks xmlns:a="http://schemas.openxmlformats.org/drawingml/2006/main" noGrp="1"/>
-          </p:cNvSpPr>
-          <p:nvPr/>
-        </p:nvSpPr>
-        <p:spPr>
-          <a:xfrm xmlns:a="http://schemas.openxmlformats.org/drawingml/2006/main">
-            <a:off x="1076325" y="4752975"/>
-            <a:ext cx="4762500" cy="895350"/>
-          </a:xfrm>
-          <a:prstGeom xmlns:a="http://schemas.openxmlformats.org/drawingml/2006/main" prst="rect">
-            <a:avLst/>
-          </a:prstGeom>
-          <a:noFill xmlns:a="http://schemas.openxmlformats.org/drawingml/2006/main"/>
-          <a:ln xmlns:a="http://schemas.openxmlformats.org/drawingml/2006/main" w="0">
-            <a:noFill/>
-            <a:prstDash val="solid"/>
-          </a:ln>
-        </p:spPr>
-        <p:txBody>
-          <a:bodyPr xmlns:a="http://schemas.openxmlformats.org/drawingml/2006/main" anchor="t">
-            <a:normAutofit fontScale="100000"/>
-          </a:bodyPr>
-          <a:lstStyle xmlns:a="http://schemas.openxmlformats.org/drawingml/2006/main"/>
-          <a:p xmlns:a="http://schemas.openxmlformats.org/drawingml/2006/main">
-            <a:pPr algn="l">
-              <a:defRPr sz="1575" b="1">
-                <a:solidFill>
-                  <a:srgbClr val="111111"/>
-                </a:solidFill>
-                <a:latin typeface="Helvetica Neue"/>
-                <a:ea typeface="Helvetica Neue"/>
-                <a:cs typeface="Helvetica Neue"/>
-              </a:defRPr>
-            </a:pPr>
-            <a:r>
-              <a:rPr sz="1575" b="1">
-                <a:solidFill>
-                  <a:srgbClr val="111111"/>
-                </a:solidFill>
-                <a:latin typeface="Helvetica Neue"/>
-                <a:ea typeface="Helvetica Neue"/>
-                <a:cs typeface="Helvetica Neue"/>
-              </a:rPr>
-              <a:t>Compare centralized, decentralized, and hierarchical topologies.</a:t>
-            </a:r>
-          </a:p>
-        </p:txBody>
-      </p:sp>
-      <p:sp>
-        <p:nvSpPr>
-          <p:cNvPr id="16" name="exam-number-6">
-            <a:extLst xmlns:a="http://schemas.openxmlformats.org/drawingml/2006/main">
-              <a:ext uri="{FF2B5EF4-FFF2-40B4-BE49-F238E27FC236}">
-                <a16:creationId xmlns:a16="http://schemas.microsoft.com/office/drawing/2014/main" id="{38A5EA88-F02E-4CA5-8F46-17D0F8F9FFE3}"/>
-              </a:ext>
-            </a:extLst>
-          </p:cNvPr>
-          <p:cNvSpPr>
-            <a:spLocks xmlns:a="http://schemas.openxmlformats.org/drawingml/2006/main" noGrp="1"/>
-          </p:cNvSpPr>
-          <p:nvPr/>
-        </p:nvSpPr>
-        <p:spPr>
-          <a:xfrm xmlns:a="http://schemas.openxmlformats.org/drawingml/2006/main">
-            <a:off x="6191250" y="4752975"/>
-            <a:ext cx="590550" cy="400050"/>
-          </a:xfrm>
-          <a:prstGeom xmlns:a="http://schemas.openxmlformats.org/drawingml/2006/main" prst="rect">
-            <a:avLst/>
-          </a:prstGeom>
-          <a:noFill xmlns:a="http://schemas.openxmlformats.org/drawingml/2006/main"/>
-          <a:ln xmlns:a="http://schemas.openxmlformats.org/drawingml/2006/main" w="0">
-            <a:noFill/>
-            <a:prstDash val="solid"/>
-          </a:ln>
-        </p:spPr>
-        <p:txBody>
-          <a:bodyPr xmlns:a="http://schemas.openxmlformats.org/drawingml/2006/main" anchor="t">
-            <a:noAutofit/>
-          </a:bodyPr>
-          <a:lstStyle xmlns:a="http://schemas.openxmlformats.org/drawingml/2006/main"/>
-          <a:p xmlns:a="http://schemas.openxmlformats.org/drawingml/2006/main">
-            <a:pPr algn="l">
-              <a:defRPr sz="1725" b="1">
-                <a:solidFill>
-                  <a:srgbClr val="FFB45E"/>
-                </a:solidFill>
-                <a:latin typeface="Helvetica Neue"/>
-                <a:ea typeface="Helvetica Neue"/>
-                <a:cs typeface="Helvetica Neue"/>
-              </a:defRPr>
-            </a:pPr>
-            <a:r>
-              <a:rPr sz="1725" b="1">
-                <a:solidFill>
-                  <a:srgbClr val="FFB45E"/>
-                </a:solidFill>
-                <a:latin typeface="Helvetica Neue"/>
-                <a:ea typeface="Helvetica Neue"/>
-                <a:cs typeface="Helvetica Neue"/>
-              </a:rPr>
-              <a:t>06</a:t>
-            </a:r>
-          </a:p>
-        </p:txBody>
-      </p:sp>
-      <p:sp>
-        <p:nvSpPr>
-          <p:cNvPr id="17" name="exam-question-6">
-            <a:extLst xmlns:a="http://schemas.openxmlformats.org/drawingml/2006/main">
-              <a:ext uri="{FF2B5EF4-FFF2-40B4-BE49-F238E27FC236}">
-                <a16:creationId xmlns:a16="http://schemas.microsoft.com/office/drawing/2014/main" id="{F0F69FF2-AC04-4B17-8959-9C9B37090FA1}"/>
-              </a:ext>
-            </a:extLst>
-          </p:cNvPr>
-          <p:cNvSpPr>
-            <a:spLocks xmlns:a="http://schemas.openxmlformats.org/drawingml/2006/main" noGrp="1"/>
-          </p:cNvSpPr>
-          <p:nvPr/>
-        </p:nvSpPr>
-        <p:spPr>
-          <a:xfrm xmlns:a="http://schemas.openxmlformats.org/drawingml/2006/main">
-            <a:off x="6877050" y="4752975"/>
-            <a:ext cx="4762500" cy="895350"/>
-          </a:xfrm>
-          <a:prstGeom xmlns:a="http://schemas.openxmlformats.org/drawingml/2006/main" prst="rect">
-            <a:avLst/>
-          </a:prstGeom>
-          <a:noFill xmlns:a="http://schemas.openxmlformats.org/drawingml/2006/main"/>
-          <a:ln xmlns:a="http://schemas.openxmlformats.org/drawingml/2006/main" w="0">
-            <a:noFill/>
-            <a:prstDash val="solid"/>
-          </a:ln>
-        </p:spPr>
-        <p:txBody>
-          <a:bodyPr xmlns:a="http://schemas.openxmlformats.org/drawingml/2006/main" anchor="t">
-            <a:normAutofit fontScale="100000"/>
-          </a:bodyPr>
-          <a:lstStyle xmlns:a="http://schemas.openxmlformats.org/drawingml/2006/main"/>
-          <a:p xmlns:a="http://schemas.openxmlformats.org/drawingml/2006/main">
-            <a:pPr algn="l">
-              <a:defRPr sz="1575" b="1">
-                <a:solidFill>
-                  <a:srgbClr val="111111"/>
-                </a:solidFill>
-                <a:latin typeface="Helvetica Neue"/>
-                <a:ea typeface="Helvetica Neue"/>
-                <a:cs typeface="Helvetica Neue"/>
-              </a:defRPr>
-            </a:pPr>
-            <a:r>
-              <a:rPr sz="1575" b="1">
-                <a:solidFill>
-                  <a:srgbClr val="111111"/>
-                </a:solidFill>
-                <a:latin typeface="Helvetica Neue"/>
-                <a:ea typeface="Helvetica Neue"/>
-                <a:cs typeface="Helvetica Neue"/>
-              </a:rPr>
-              <a:t>How does a supervisor pattern terminate safely?</a:t>
+                  <a:srgbClr val="111111"/>
+                </a:solidFill>
+                <a:latin typeface="Helvetica Neue"/>
+                <a:ea typeface="Helvetica Neue"/>
+                <a:cs typeface="Helvetica Neue"/>
+              </a:rPr>
+              <a:t>03  Give one component responsibility for synthesis and termination.</a:t>
             </a:r>
           </a:p>
         </p:txBody>
@@ -8371,7 +10131,7 @@
     </p:spTree>
     <p:extLst>
       <p:ext uri="{BB962C8B-B14F-4D97-AF65-F5344CB8AC3E}">
-        <p14:creationId xmlns:p14="http://schemas.microsoft.com/office/powerpoint/2010/main" val="134231200"/>
+        <p14:creationId xmlns:p14="http://schemas.microsoft.com/office/powerpoint/2010/main" val="318746638"/>
       </p:ext>
     </p:extLst>
   </p:cSld>
@@ -8379,9 +10139,9 @@
 </file>
 
 <file path=ppt/theme/theme1.xml><?xml version="1.0" encoding="utf-8"?>
-<a:theme xmlns:a="http://schemas.openxmlformats.org/drawingml/2006/main" name="ChatGPT">
+<a:theme xmlns:a="http://schemas.openxmlformats.org/drawingml/2006/main" name="Course">
   <a:themeElements>
-    <a:clrScheme name="ChatGPT">
+    <a:clrScheme name="Course">
       <a:dk1>
         <a:srgbClr val="000000"/>
       </a:dk1>
@@ -8431,7 +10191,7 @@
         <a:cs typeface="Calibri"/>
       </a:minorFont>
     </a:fontScheme>
-    <a:fmtScheme name="ChatGPT">
+    <a:fmtScheme name="Course">
       <a:fillStyleLst>
         <a:solidFill>
           <a:schemeClr val="phClr"/>
